--- a/RAC/01장/1장_RAC개요와아키텍처.pptx
+++ b/RAC/01장/1장_RAC개요와아키텍처.pptx
@@ -4,57 +4,60 @@
   <p:sldMasterIdLst>
     <p:sldMasterId id="2147483648" r:id="rId1"/>
   </p:sldMasterIdLst>
+  <p:notesMasterIdLst>
+    <p:notesMasterId r:id="rId50"/>
+  </p:notesMasterIdLst>
   <p:sldIdLst>
-    <p:sldId id="256" r:id="rId7"/>
-    <p:sldId id="257" r:id="rId8"/>
-    <p:sldId id="258" r:id="rId9"/>
-    <p:sldId id="259" r:id="rId10"/>
-    <p:sldId id="260" r:id="rId11"/>
-    <p:sldId id="261" r:id="rId13"/>
-    <p:sldId id="262" r:id="rId14"/>
-    <p:sldId id="263" r:id="rId15"/>
-    <p:sldId id="264" r:id="rId16"/>
-    <p:sldId id="265" r:id="rId17"/>
-    <p:sldId id="266" r:id="rId18"/>
-    <p:sldId id="267" r:id="rId19"/>
-    <p:sldId id="268" r:id="rId20"/>
-    <p:sldId id="269" r:id="rId21"/>
-    <p:sldId id="270" r:id="rId22"/>
-    <p:sldId id="271" r:id="rId23"/>
-    <p:sldId id="272" r:id="rId24"/>
-    <p:sldId id="273" r:id="rId25"/>
-    <p:sldId id="274" r:id="rId26"/>
-    <p:sldId id="275" r:id="rId27"/>
-    <p:sldId id="276" r:id="rId28"/>
-    <p:sldId id="277" r:id="rId29"/>
-    <p:sldId id="278" r:id="rId30"/>
-    <p:sldId id="279" r:id="rId31"/>
-    <p:sldId id="280" r:id="rId32"/>
-    <p:sldId id="281" r:id="rId33"/>
-    <p:sldId id="282" r:id="rId34"/>
-    <p:sldId id="283" r:id="rId35"/>
-    <p:sldId id="284" r:id="rId36"/>
-    <p:sldId id="285" r:id="rId37"/>
-    <p:sldId id="286" r:id="rId38"/>
-    <p:sldId id="287" r:id="rId39"/>
-    <p:sldId id="288" r:id="rId40"/>
-    <p:sldId id="289" r:id="rId41"/>
-    <p:sldId id="290" r:id="rId42"/>
-    <p:sldId id="291" r:id="rId43"/>
-    <p:sldId id="292" r:id="rId44"/>
-    <p:sldId id="293" r:id="rId45"/>
-    <p:sldId id="294" r:id="rId46"/>
-    <p:sldId id="295" r:id="rId47"/>
-    <p:sldId id="296" r:id="rId48"/>
-    <p:sldId id="297" r:id="rId49"/>
-    <p:sldId id="298" r:id="rId50"/>
-    <p:sldId id="299" r:id="rId51"/>
-    <p:sldId id="300" r:id="rId52"/>
-    <p:sldId id="301" r:id="rId53"/>
-    <p:sldId id="302" r:id="rId54"/>
-    <p:sldId id="303" r:id="rId55"/>
+    <p:sldId id="256" r:id="rId2"/>
+    <p:sldId id="257" r:id="rId3"/>
+    <p:sldId id="258" r:id="rId4"/>
+    <p:sldId id="259" r:id="rId5"/>
+    <p:sldId id="260" r:id="rId6"/>
+    <p:sldId id="261" r:id="rId7"/>
+    <p:sldId id="262" r:id="rId8"/>
+    <p:sldId id="263" r:id="rId9"/>
+    <p:sldId id="264" r:id="rId10"/>
+    <p:sldId id="265" r:id="rId11"/>
+    <p:sldId id="266" r:id="rId12"/>
+    <p:sldId id="267" r:id="rId13"/>
+    <p:sldId id="268" r:id="rId14"/>
+    <p:sldId id="269" r:id="rId15"/>
+    <p:sldId id="270" r:id="rId16"/>
+    <p:sldId id="271" r:id="rId17"/>
+    <p:sldId id="272" r:id="rId18"/>
+    <p:sldId id="273" r:id="rId19"/>
+    <p:sldId id="274" r:id="rId20"/>
+    <p:sldId id="275" r:id="rId21"/>
+    <p:sldId id="276" r:id="rId22"/>
+    <p:sldId id="277" r:id="rId23"/>
+    <p:sldId id="278" r:id="rId24"/>
+    <p:sldId id="279" r:id="rId25"/>
+    <p:sldId id="280" r:id="rId26"/>
+    <p:sldId id="281" r:id="rId27"/>
+    <p:sldId id="282" r:id="rId28"/>
+    <p:sldId id="283" r:id="rId29"/>
+    <p:sldId id="284" r:id="rId30"/>
+    <p:sldId id="285" r:id="rId31"/>
+    <p:sldId id="286" r:id="rId32"/>
+    <p:sldId id="287" r:id="rId33"/>
+    <p:sldId id="288" r:id="rId34"/>
+    <p:sldId id="289" r:id="rId35"/>
+    <p:sldId id="290" r:id="rId36"/>
+    <p:sldId id="291" r:id="rId37"/>
+    <p:sldId id="292" r:id="rId38"/>
+    <p:sldId id="293" r:id="rId39"/>
+    <p:sldId id="294" r:id="rId40"/>
+    <p:sldId id="295" r:id="rId41"/>
+    <p:sldId id="296" r:id="rId42"/>
+    <p:sldId id="297" r:id="rId43"/>
+    <p:sldId id="298" r:id="rId44"/>
+    <p:sldId id="299" r:id="rId45"/>
+    <p:sldId id="300" r:id="rId46"/>
+    <p:sldId id="301" r:id="rId47"/>
+    <p:sldId id="302" r:id="rId48"/>
+    <p:sldId id="303" r:id="rId49"/>
   </p:sldIdLst>
-  <p:sldSz cx="12191695" cy="6858000" type="screen4x3"/>
+  <p:sldSz cx="12192000" cy="6858000"/>
   <p:notesSz cx="6858000" cy="9144000"/>
   <p:defaultTextStyle>
     <a:defPPr>
@@ -151,11 +154,27 @@
       </a:defRPr>
     </a:lvl9pPr>
   </p:defaultTextStyle>
+  <p:extLst>
+    <p:ext uri="{EFAFB233-063F-42B5-8137-9DF3F51BA10A}">
+      <p15:sldGuideLst xmlns:p15="http://schemas.microsoft.com/office/powerpoint/2012/main">
+        <p15:guide id="1" orient="horz" pos="2160">
+          <p15:clr>
+            <a:srgbClr val="A4A3A4"/>
+          </p15:clr>
+        </p15:guide>
+        <p15:guide id="2" pos="2880">
+          <p15:clr>
+            <a:srgbClr val="A4A3A4"/>
+          </p15:clr>
+        </p15:guide>
+      </p15:sldGuideLst>
+    </p:ext>
+  </p:extLst>
 </p:presentation>
 </file>
 
 <file path=ppt/notesMasters/notesMaster1.xml><?xml version="1.0" encoding="utf-8"?>
-<p:notesMaster xmlns:a="http://schemas.openxmlformats.org/drawingml/2006/main" xmlns:p="http://schemas.openxmlformats.org/presentationml/2006/main" xmlns:r="http://schemas.openxmlformats.org/officeDocument/2006/relationships">
+<p:notesMaster xmlns:a="http://schemas.openxmlformats.org/drawingml/2006/main" xmlns:r="http://schemas.openxmlformats.org/officeDocument/2006/relationships" xmlns:p="http://schemas.openxmlformats.org/presentationml/2006/main">
   <p:cSld>
     <p:bg>
       <p:bgRef idx="1001">
@@ -178,7 +197,7 @@
       </p:grpSpPr>
       <p:sp>
         <p:nvSpPr>
-          <p:cNvPr id="2" name="Header Placeholder 1"/>
+          <p:cNvPr id="2" name="머리글 개체 틀 1"/>
           <p:cNvSpPr>
             <a:spLocks noGrp="1"/>
           </p:cNvSpPr>
@@ -189,7 +208,7 @@
         <p:spPr>
           <a:xfrm>
             <a:off x="0" y="0"/>
-            <a:ext cx="2971800" cy="457200"/>
+            <a:ext cx="2971800" cy="458788"/>
           </a:xfrm>
           <a:prstGeom prst="rect">
             <a:avLst/>
@@ -203,13 +222,13 @@
             </a:lvl1pPr>
           </a:lstStyle>
           <a:p>
-            <a:endParaRPr lang="en-US"/>
-          </a:p>
-        </p:txBody>
-      </p:sp>
-      <p:sp>
-        <p:nvSpPr>
-          <p:cNvPr id="3" name="Date Placeholder 2"/>
+            <a:endParaRPr lang="ko-KR" altLang="en-US"/>
+          </a:p>
+        </p:txBody>
+      </p:sp>
+      <p:sp>
+        <p:nvSpPr>
+          <p:cNvPr id="3" name="날짜 개체 틀 2"/>
           <p:cNvSpPr>
             <a:spLocks noGrp="1"/>
           </p:cNvSpPr>
@@ -220,7 +239,7 @@
         <p:spPr>
           <a:xfrm>
             <a:off x="3884613" y="0"/>
-            <a:ext cx="2971800" cy="457200"/>
+            <a:ext cx="2971800" cy="458788"/>
           </a:xfrm>
           <a:prstGeom prst="rect">
             <a:avLst/>
@@ -234,17 +253,17 @@
             </a:lvl1pPr>
           </a:lstStyle>
           <a:p>
-            <a:fld id="{0F89C1C7-3DCD-1040-A9CF-14679D8B5DDD}" type="datetimeFigureOut">
-              <a:rPr lang="en-US" smtClean="0"/>
-              <a:t>10/17/16</a:t>
+            <a:fld id="{433AA959-BAF7-44CE-BAB2-10B22343235A}" type="datetimeFigureOut">
+              <a:rPr lang="ko-KR" altLang="en-US" smtClean="0"/>
+              <a:t>2026-10-29</a:t>
             </a:fld>
-            <a:endParaRPr lang="en-US"/>
-          </a:p>
-        </p:txBody>
-      </p:sp>
-      <p:sp>
-        <p:nvSpPr>
-          <p:cNvPr id="4" name="Slide Image Placeholder 3"/>
+            <a:endParaRPr lang="ko-KR" altLang="en-US"/>
+          </a:p>
+        </p:txBody>
+      </p:sp>
+      <p:sp>
+        <p:nvSpPr>
+          <p:cNvPr id="4" name="슬라이드 이미지 개체 틀 3"/>
           <p:cNvSpPr>
             <a:spLocks noGrp="1" noRot="1" noChangeAspect="1"/>
           </p:cNvSpPr>
@@ -254,8 +273,8 @@
         </p:nvSpPr>
         <p:spPr>
           <a:xfrm>
-            <a:off x="1143000" y="685800"/>
-            <a:ext cx="4572000" cy="3429000"/>
+            <a:off x="685800" y="1143000"/>
+            <a:ext cx="5486400" cy="3086100"/>
           </a:xfrm>
           <a:prstGeom prst="rect">
             <a:avLst/>
@@ -271,13 +290,13 @@
           <a:bodyPr vert="horz" lIns="91440" tIns="45720" rIns="91440" bIns="45720" rtlCol="0" anchor="ctr"/>
           <a:lstStyle/>
           <a:p>
-            <a:endParaRPr lang="en-US"/>
-          </a:p>
-        </p:txBody>
-      </p:sp>
-      <p:sp>
-        <p:nvSpPr>
-          <p:cNvPr id="5" name="Notes Placeholder 4"/>
+            <a:endParaRPr lang="ko-KR" altLang="en-US"/>
+          </a:p>
+        </p:txBody>
+      </p:sp>
+      <p:sp>
+        <p:nvSpPr>
+          <p:cNvPr id="5" name="슬라이드 노트 개체 틀 4"/>
           <p:cNvSpPr>
             <a:spLocks noGrp="1"/>
           </p:cNvSpPr>
@@ -287,8 +306,8 @@
         </p:nvSpPr>
         <p:spPr>
           <a:xfrm>
-            <a:off x="685800" y="4343400"/>
-            <a:ext cx="5486400" cy="4114800"/>
+            <a:off x="685800" y="4400550"/>
+            <a:ext cx="5486400" cy="3600450"/>
           </a:xfrm>
           <a:prstGeom prst="rect">
             <a:avLst/>
@@ -300,44 +319,43 @@
           <a:p>
             <a:pPr lvl="0"/>
             <a:r>
-              <a:rPr lang="en-US" smtClean="0"/>
-              <a:t>Click to edit Master text styles</a:t>
+              <a:rPr lang="ko-KR" altLang="en-US"/>
+              <a:t>마스터 텍스트 스타일을 편집하려면 클릭</a:t>
             </a:r>
           </a:p>
           <a:p>
             <a:pPr lvl="1"/>
             <a:r>
-              <a:rPr lang="en-US" smtClean="0"/>
-              <a:t>Second level</a:t>
+              <a:rPr lang="ko-KR" altLang="en-US"/>
+              <a:t>두 번째 수준</a:t>
             </a:r>
           </a:p>
           <a:p>
             <a:pPr lvl="2"/>
             <a:r>
-              <a:rPr lang="en-US" smtClean="0"/>
-              <a:t>Third level</a:t>
+              <a:rPr lang="ko-KR" altLang="en-US"/>
+              <a:t>세 번째 수준</a:t>
             </a:r>
           </a:p>
           <a:p>
             <a:pPr lvl="3"/>
             <a:r>
-              <a:rPr lang="en-US" smtClean="0"/>
-              <a:t>Fourth level</a:t>
+              <a:rPr lang="ko-KR" altLang="en-US"/>
+              <a:t>네 번째 수준</a:t>
             </a:r>
           </a:p>
           <a:p>
             <a:pPr lvl="4"/>
             <a:r>
-              <a:rPr lang="en-US" smtClean="0"/>
-              <a:t>Fifth level</a:t>
-            </a:r>
-            <a:endParaRPr lang="en-US"/>
-          </a:p>
-        </p:txBody>
-      </p:sp>
-      <p:sp>
-        <p:nvSpPr>
-          <p:cNvPr id="6" name="Footer Placeholder 5"/>
+              <a:rPr lang="ko-KR" altLang="en-US"/>
+              <a:t>다섯 번째 수준</a:t>
+            </a:r>
+          </a:p>
+        </p:txBody>
+      </p:sp>
+      <p:sp>
+        <p:nvSpPr>
+          <p:cNvPr id="6" name="바닥글 개체 틀 5"/>
           <p:cNvSpPr>
             <a:spLocks noGrp="1"/>
           </p:cNvSpPr>
@@ -348,7 +366,7 @@
         <p:spPr>
           <a:xfrm>
             <a:off x="0" y="8685213"/>
-            <a:ext cx="2971800" cy="457200"/>
+            <a:ext cx="2971800" cy="458787"/>
           </a:xfrm>
           <a:prstGeom prst="rect">
             <a:avLst/>
@@ -362,13 +380,13 @@
             </a:lvl1pPr>
           </a:lstStyle>
           <a:p>
-            <a:endParaRPr lang="en-US"/>
-          </a:p>
-        </p:txBody>
-      </p:sp>
-      <p:sp>
-        <p:nvSpPr>
-          <p:cNvPr id="7" name="Slide Number Placeholder 6"/>
+            <a:endParaRPr lang="ko-KR" altLang="en-US"/>
+          </a:p>
+        </p:txBody>
+      </p:sp>
+      <p:sp>
+        <p:nvSpPr>
+          <p:cNvPr id="7" name="슬라이드 번호 개체 틀 6"/>
           <p:cNvSpPr>
             <a:spLocks noGrp="1"/>
           </p:cNvSpPr>
@@ -379,7 +397,7 @@
         <p:spPr>
           <a:xfrm>
             <a:off x="3884613" y="8685213"/>
-            <a:ext cx="2971800" cy="457200"/>
+            <a:ext cx="2971800" cy="458787"/>
           </a:xfrm>
           <a:prstGeom prst="rect">
             <a:avLst/>
@@ -393,24 +411,24 @@
             </a:lvl1pPr>
           </a:lstStyle>
           <a:p>
-            <a:fld id="{BB5E49A5-4136-284D-997B-48E1D791AD67}" type="slidenum">
-              <a:rPr lang="en-US" smtClean="0"/>
+            <a:fld id="{E1706A45-76E5-4FA2-B4A6-20F9C5EAD126}" type="slidenum">
+              <a:rPr lang="ko-KR" altLang="en-US" smtClean="0"/>
               <a:t>‹#›</a:t>
             </a:fld>
-            <a:endParaRPr lang="en-US"/>
+            <a:endParaRPr lang="ko-KR" altLang="en-US"/>
           </a:p>
         </p:txBody>
       </p:sp>
     </p:spTree>
     <p:extLst>
       <p:ext uri="{BB962C8B-B14F-4D97-AF65-F5344CB8AC3E}">
-        <p14:creationId xmlns:p14="http://schemas.microsoft.com/office/powerpoint/2010/main" val="2623252185"/>
+        <p14:creationId xmlns:p14="http://schemas.microsoft.com/office/powerpoint/2010/main" val="1977596193"/>
       </p:ext>
     </p:extLst>
   </p:cSld>
   <p:clrMap bg1="lt1" tx1="dk1" bg2="lt2" tx2="dk2" accent1="accent1" accent2="accent2" accent3="accent3" accent4="accent4" accent5="accent5" accent6="accent6" hlink="hlink" folHlink="folHlink"/>
   <p:notesStyle>
-    <a:lvl1pPr marL="0" algn="l" defTabSz="457200" rtl="0" eaLnBrk="1" latinLnBrk="0" hangingPunct="1">
+    <a:lvl1pPr marL="0" algn="l" defTabSz="914400" rtl="0" eaLnBrk="1" latinLnBrk="1" hangingPunct="1">
       <a:defRPr sz="1200" kern="1200">
         <a:solidFill>
           <a:schemeClr val="tx1"/>
@@ -420,7 +438,7 @@
         <a:cs typeface="+mn-cs"/>
       </a:defRPr>
     </a:lvl1pPr>
-    <a:lvl2pPr marL="457200" algn="l" defTabSz="457200" rtl="0" eaLnBrk="1" latinLnBrk="0" hangingPunct="1">
+    <a:lvl2pPr marL="457200" algn="l" defTabSz="914400" rtl="0" eaLnBrk="1" latinLnBrk="1" hangingPunct="1">
       <a:defRPr sz="1200" kern="1200">
         <a:solidFill>
           <a:schemeClr val="tx1"/>
@@ -430,7 +448,7 @@
         <a:cs typeface="+mn-cs"/>
       </a:defRPr>
     </a:lvl2pPr>
-    <a:lvl3pPr marL="914400" algn="l" defTabSz="457200" rtl="0" eaLnBrk="1" latinLnBrk="0" hangingPunct="1">
+    <a:lvl3pPr marL="914400" algn="l" defTabSz="914400" rtl="0" eaLnBrk="1" latinLnBrk="1" hangingPunct="1">
       <a:defRPr sz="1200" kern="1200">
         <a:solidFill>
           <a:schemeClr val="tx1"/>
@@ -440,7 +458,7 @@
         <a:cs typeface="+mn-cs"/>
       </a:defRPr>
     </a:lvl3pPr>
-    <a:lvl4pPr marL="1371600" algn="l" defTabSz="457200" rtl="0" eaLnBrk="1" latinLnBrk="0" hangingPunct="1">
+    <a:lvl4pPr marL="1371600" algn="l" defTabSz="914400" rtl="0" eaLnBrk="1" latinLnBrk="1" hangingPunct="1">
       <a:defRPr sz="1200" kern="1200">
         <a:solidFill>
           <a:schemeClr val="tx1"/>
@@ -450,7 +468,7 @@
         <a:cs typeface="+mn-cs"/>
       </a:defRPr>
     </a:lvl4pPr>
-    <a:lvl5pPr marL="1828800" algn="l" defTabSz="457200" rtl="0" eaLnBrk="1" latinLnBrk="0" hangingPunct="1">
+    <a:lvl5pPr marL="1828800" algn="l" defTabSz="914400" rtl="0" eaLnBrk="1" latinLnBrk="1" hangingPunct="1">
       <a:defRPr sz="1200" kern="1200">
         <a:solidFill>
           <a:schemeClr val="tx1"/>
@@ -460,7 +478,7 @@
         <a:cs typeface="+mn-cs"/>
       </a:defRPr>
     </a:lvl5pPr>
-    <a:lvl6pPr marL="2286000" algn="l" defTabSz="457200" rtl="0" eaLnBrk="1" latinLnBrk="0" hangingPunct="1">
+    <a:lvl6pPr marL="2286000" algn="l" defTabSz="914400" rtl="0" eaLnBrk="1" latinLnBrk="1" hangingPunct="1">
       <a:defRPr sz="1200" kern="1200">
         <a:solidFill>
           <a:schemeClr val="tx1"/>
@@ -470,7 +488,7 @@
         <a:cs typeface="+mn-cs"/>
       </a:defRPr>
     </a:lvl6pPr>
-    <a:lvl7pPr marL="2743200" algn="l" defTabSz="457200" rtl="0" eaLnBrk="1" latinLnBrk="0" hangingPunct="1">
+    <a:lvl7pPr marL="2743200" algn="l" defTabSz="914400" rtl="0" eaLnBrk="1" latinLnBrk="1" hangingPunct="1">
       <a:defRPr sz="1200" kern="1200">
         <a:solidFill>
           <a:schemeClr val="tx1"/>
@@ -480,7 +498,7 @@
         <a:cs typeface="+mn-cs"/>
       </a:defRPr>
     </a:lvl7pPr>
-    <a:lvl8pPr marL="3200400" algn="l" defTabSz="457200" rtl="0" eaLnBrk="1" latinLnBrk="0" hangingPunct="1">
+    <a:lvl8pPr marL="3200400" algn="l" defTabSz="914400" rtl="0" eaLnBrk="1" latinLnBrk="1" hangingPunct="1">
       <a:defRPr sz="1200" kern="1200">
         <a:solidFill>
           <a:schemeClr val="tx1"/>
@@ -490,7 +508,7 @@
         <a:cs typeface="+mn-cs"/>
       </a:defRPr>
     </a:lvl8pPr>
-    <a:lvl9pPr marL="3657600" algn="l" defTabSz="457200" rtl="0" eaLnBrk="1" latinLnBrk="0" hangingPunct="1">
+    <a:lvl9pPr marL="3657600" algn="l" defTabSz="914400" rtl="0" eaLnBrk="1" latinLnBrk="1" hangingPunct="1">
       <a:defRPr sz="1200" kern="1200">
         <a:solidFill>
           <a:schemeClr val="tx1"/>
@@ -505,7 +523,7 @@
 </file>
 
 <file path=ppt/notesSlides/notesSlide1.xml><?xml version="1.0" encoding="utf-8"?>
-<p:notes xmlns:a="http://schemas.openxmlformats.org/drawingml/2006/main" xmlns:p="http://schemas.openxmlformats.org/presentationml/2006/main" xmlns:r="http://schemas.openxmlformats.org/officeDocument/2006/relationships">
+<p:notes xmlns:a="http://schemas.openxmlformats.org/drawingml/2006/main" xmlns:r="http://schemas.openxmlformats.org/officeDocument/2006/relationships" xmlns:p="http://schemas.openxmlformats.org/presentationml/2006/main">
   <p:cSld>
     <p:spTree>
       <p:nvGrpSpPr>
@@ -525,7 +543,7 @@
         <p:nvSpPr>
           <p:cNvPr id="2" name="Slide Image Placeholder 1"/>
           <p:cNvSpPr>
-            <a:spLocks noGrp="1"/>
+            <a:spLocks noGrp="1" noRot="1" noChangeAspect="1"/>
           </p:cNvSpPr>
           <p:nvPr>
             <p:ph type="sldImg" idx="2"/>
@@ -540,7 +558,7 @@
             <a:spLocks noGrp="1"/>
           </p:cNvSpPr>
           <p:nvPr>
-            <p:ph type="body" idx="3" sz="quarter"/>
+            <p:ph type="body" sz="quarter" idx="3"/>
           </p:nvPr>
         </p:nvSpPr>
         <p:spPr/>
@@ -561,7 +579,7 @@
             <a:spLocks noGrp="1"/>
           </p:cNvSpPr>
           <p:nvPr>
-            <p:ph type="sldNum" idx="5" sz="quarter"/>
+            <p:ph type="sldNum" sz="quarter" idx="5"/>
           </p:nvPr>
         </p:nvSpPr>
         <p:spPr/>
@@ -575,7 +593,7 @@
 </file>
 
 <file path=ppt/notesSlides/notesSlide10.xml><?xml version="1.0" encoding="utf-8"?>
-<p:notes xmlns:a="http://schemas.openxmlformats.org/drawingml/2006/main" xmlns:p="http://schemas.openxmlformats.org/presentationml/2006/main" xmlns:r="http://schemas.openxmlformats.org/officeDocument/2006/relationships">
+<p:notes xmlns:a="http://schemas.openxmlformats.org/drawingml/2006/main" xmlns:r="http://schemas.openxmlformats.org/officeDocument/2006/relationships" xmlns:p="http://schemas.openxmlformats.org/presentationml/2006/main">
   <p:cSld>
     <p:spTree>
       <p:nvGrpSpPr>
@@ -595,7 +613,7 @@
         <p:nvSpPr>
           <p:cNvPr id="2" name="Slide Image Placeholder 1"/>
           <p:cNvSpPr>
-            <a:spLocks noGrp="1"/>
+            <a:spLocks noGrp="1" noRot="1" noChangeAspect="1"/>
           </p:cNvSpPr>
           <p:nvPr>
             <p:ph type="sldImg" idx="2"/>
@@ -610,7 +628,7 @@
             <a:spLocks noGrp="1"/>
           </p:cNvSpPr>
           <p:nvPr>
-            <p:ph type="body" idx="3" sz="quarter"/>
+            <p:ph type="body" sz="quarter" idx="3"/>
           </p:nvPr>
         </p:nvSpPr>
         <p:spPr/>
@@ -631,7 +649,7 @@
             <a:spLocks noGrp="1"/>
           </p:cNvSpPr>
           <p:nvPr>
-            <p:ph type="sldNum" idx="5" sz="quarter"/>
+            <p:ph type="sldNum" sz="quarter" idx="5"/>
           </p:nvPr>
         </p:nvSpPr>
         <p:spPr/>
@@ -645,7 +663,7 @@
 </file>
 
 <file path=ppt/notesSlides/notesSlide11.xml><?xml version="1.0" encoding="utf-8"?>
-<p:notes xmlns:a="http://schemas.openxmlformats.org/drawingml/2006/main" xmlns:p="http://schemas.openxmlformats.org/presentationml/2006/main" xmlns:r="http://schemas.openxmlformats.org/officeDocument/2006/relationships">
+<p:notes xmlns:a="http://schemas.openxmlformats.org/drawingml/2006/main" xmlns:r="http://schemas.openxmlformats.org/officeDocument/2006/relationships" xmlns:p="http://schemas.openxmlformats.org/presentationml/2006/main">
   <p:cSld>
     <p:spTree>
       <p:nvGrpSpPr>
@@ -665,7 +683,7 @@
         <p:nvSpPr>
           <p:cNvPr id="2" name="Slide Image Placeholder 1"/>
           <p:cNvSpPr>
-            <a:spLocks noGrp="1"/>
+            <a:spLocks noGrp="1" noRot="1" noChangeAspect="1"/>
           </p:cNvSpPr>
           <p:nvPr>
             <p:ph type="sldImg" idx="2"/>
@@ -680,7 +698,7 @@
             <a:spLocks noGrp="1"/>
           </p:cNvSpPr>
           <p:nvPr>
-            <p:ph type="body" idx="3" sz="quarter"/>
+            <p:ph type="body" sz="quarter" idx="3"/>
           </p:nvPr>
         </p:nvSpPr>
         <p:spPr/>
@@ -701,7 +719,7 @@
             <a:spLocks noGrp="1"/>
           </p:cNvSpPr>
           <p:nvPr>
-            <p:ph type="sldNum" idx="5" sz="quarter"/>
+            <p:ph type="sldNum" sz="quarter" idx="5"/>
           </p:nvPr>
         </p:nvSpPr>
         <p:spPr/>
@@ -715,7 +733,7 @@
 </file>
 
 <file path=ppt/notesSlides/notesSlide12.xml><?xml version="1.0" encoding="utf-8"?>
-<p:notes xmlns:a="http://schemas.openxmlformats.org/drawingml/2006/main" xmlns:p="http://schemas.openxmlformats.org/presentationml/2006/main" xmlns:r="http://schemas.openxmlformats.org/officeDocument/2006/relationships">
+<p:notes xmlns:a="http://schemas.openxmlformats.org/drawingml/2006/main" xmlns:r="http://schemas.openxmlformats.org/officeDocument/2006/relationships" xmlns:p="http://schemas.openxmlformats.org/presentationml/2006/main">
   <p:cSld>
     <p:spTree>
       <p:nvGrpSpPr>
@@ -735,7 +753,7 @@
         <p:nvSpPr>
           <p:cNvPr id="2" name="Slide Image Placeholder 1"/>
           <p:cNvSpPr>
-            <a:spLocks noGrp="1"/>
+            <a:spLocks noGrp="1" noRot="1" noChangeAspect="1"/>
           </p:cNvSpPr>
           <p:nvPr>
             <p:ph type="sldImg" idx="2"/>
@@ -750,7 +768,7 @@
             <a:spLocks noGrp="1"/>
           </p:cNvSpPr>
           <p:nvPr>
-            <p:ph type="body" idx="3" sz="quarter"/>
+            <p:ph type="body" sz="quarter" idx="3"/>
           </p:nvPr>
         </p:nvSpPr>
         <p:spPr/>
@@ -771,7 +789,7 @@
             <a:spLocks noGrp="1"/>
           </p:cNvSpPr>
           <p:nvPr>
-            <p:ph type="sldNum" idx="5" sz="quarter"/>
+            <p:ph type="sldNum" sz="quarter" idx="5"/>
           </p:nvPr>
         </p:nvSpPr>
         <p:spPr/>
@@ -785,7 +803,7 @@
 </file>
 
 <file path=ppt/notesSlides/notesSlide13.xml><?xml version="1.0" encoding="utf-8"?>
-<p:notes xmlns:a="http://schemas.openxmlformats.org/drawingml/2006/main" xmlns:p="http://schemas.openxmlformats.org/presentationml/2006/main" xmlns:r="http://schemas.openxmlformats.org/officeDocument/2006/relationships">
+<p:notes xmlns:a="http://schemas.openxmlformats.org/drawingml/2006/main" xmlns:r="http://schemas.openxmlformats.org/officeDocument/2006/relationships" xmlns:p="http://schemas.openxmlformats.org/presentationml/2006/main">
   <p:cSld>
     <p:spTree>
       <p:nvGrpSpPr>
@@ -805,7 +823,7 @@
         <p:nvSpPr>
           <p:cNvPr id="2" name="Slide Image Placeholder 1"/>
           <p:cNvSpPr>
-            <a:spLocks noGrp="1"/>
+            <a:spLocks noGrp="1" noRot="1" noChangeAspect="1"/>
           </p:cNvSpPr>
           <p:nvPr>
             <p:ph type="sldImg" idx="2"/>
@@ -820,7 +838,7 @@
             <a:spLocks noGrp="1"/>
           </p:cNvSpPr>
           <p:nvPr>
-            <p:ph type="body" idx="3" sz="quarter"/>
+            <p:ph type="body" sz="quarter" idx="3"/>
           </p:nvPr>
         </p:nvSpPr>
         <p:spPr/>
@@ -841,7 +859,7 @@
             <a:spLocks noGrp="1"/>
           </p:cNvSpPr>
           <p:nvPr>
-            <p:ph type="sldNum" idx="5" sz="quarter"/>
+            <p:ph type="sldNum" sz="quarter" idx="5"/>
           </p:nvPr>
         </p:nvSpPr>
         <p:spPr/>
@@ -855,7 +873,7 @@
 </file>
 
 <file path=ppt/notesSlides/notesSlide14.xml><?xml version="1.0" encoding="utf-8"?>
-<p:notes xmlns:a="http://schemas.openxmlformats.org/drawingml/2006/main" xmlns:p="http://schemas.openxmlformats.org/presentationml/2006/main" xmlns:r="http://schemas.openxmlformats.org/officeDocument/2006/relationships">
+<p:notes xmlns:a="http://schemas.openxmlformats.org/drawingml/2006/main" xmlns:r="http://schemas.openxmlformats.org/officeDocument/2006/relationships" xmlns:p="http://schemas.openxmlformats.org/presentationml/2006/main">
   <p:cSld>
     <p:spTree>
       <p:nvGrpSpPr>
@@ -875,7 +893,7 @@
         <p:nvSpPr>
           <p:cNvPr id="2" name="Slide Image Placeholder 1"/>
           <p:cNvSpPr>
-            <a:spLocks noGrp="1"/>
+            <a:spLocks noGrp="1" noRot="1" noChangeAspect="1"/>
           </p:cNvSpPr>
           <p:nvPr>
             <p:ph type="sldImg" idx="2"/>
@@ -890,7 +908,7 @@
             <a:spLocks noGrp="1"/>
           </p:cNvSpPr>
           <p:nvPr>
-            <p:ph type="body" idx="3" sz="quarter"/>
+            <p:ph type="body" sz="quarter" idx="3"/>
           </p:nvPr>
         </p:nvSpPr>
         <p:spPr/>
@@ -911,7 +929,7 @@
             <a:spLocks noGrp="1"/>
           </p:cNvSpPr>
           <p:nvPr>
-            <p:ph type="sldNum" idx="5" sz="quarter"/>
+            <p:ph type="sldNum" sz="quarter" idx="5"/>
           </p:nvPr>
         </p:nvSpPr>
         <p:spPr/>
@@ -925,7 +943,7 @@
 </file>
 
 <file path=ppt/notesSlides/notesSlide15.xml><?xml version="1.0" encoding="utf-8"?>
-<p:notes xmlns:a="http://schemas.openxmlformats.org/drawingml/2006/main" xmlns:p="http://schemas.openxmlformats.org/presentationml/2006/main" xmlns:r="http://schemas.openxmlformats.org/officeDocument/2006/relationships">
+<p:notes xmlns:a="http://schemas.openxmlformats.org/drawingml/2006/main" xmlns:r="http://schemas.openxmlformats.org/officeDocument/2006/relationships" xmlns:p="http://schemas.openxmlformats.org/presentationml/2006/main">
   <p:cSld>
     <p:spTree>
       <p:nvGrpSpPr>
@@ -945,7 +963,7 @@
         <p:nvSpPr>
           <p:cNvPr id="2" name="Slide Image Placeholder 1"/>
           <p:cNvSpPr>
-            <a:spLocks noGrp="1"/>
+            <a:spLocks noGrp="1" noRot="1" noChangeAspect="1"/>
           </p:cNvSpPr>
           <p:nvPr>
             <p:ph type="sldImg" idx="2"/>
@@ -960,7 +978,7 @@
             <a:spLocks noGrp="1"/>
           </p:cNvSpPr>
           <p:nvPr>
-            <p:ph type="body" idx="3" sz="quarter"/>
+            <p:ph type="body" sz="quarter" idx="3"/>
           </p:nvPr>
         </p:nvSpPr>
         <p:spPr/>
@@ -981,7 +999,7 @@
             <a:spLocks noGrp="1"/>
           </p:cNvSpPr>
           <p:nvPr>
-            <p:ph type="sldNum" idx="5" sz="quarter"/>
+            <p:ph type="sldNum" sz="quarter" idx="5"/>
           </p:nvPr>
         </p:nvSpPr>
         <p:spPr/>
@@ -995,7 +1013,7 @@
 </file>
 
 <file path=ppt/notesSlides/notesSlide16.xml><?xml version="1.0" encoding="utf-8"?>
-<p:notes xmlns:a="http://schemas.openxmlformats.org/drawingml/2006/main" xmlns:p="http://schemas.openxmlformats.org/presentationml/2006/main" xmlns:r="http://schemas.openxmlformats.org/officeDocument/2006/relationships">
+<p:notes xmlns:a="http://schemas.openxmlformats.org/drawingml/2006/main" xmlns:r="http://schemas.openxmlformats.org/officeDocument/2006/relationships" xmlns:p="http://schemas.openxmlformats.org/presentationml/2006/main">
   <p:cSld>
     <p:spTree>
       <p:nvGrpSpPr>
@@ -1015,7 +1033,7 @@
         <p:nvSpPr>
           <p:cNvPr id="2" name="Slide Image Placeholder 1"/>
           <p:cNvSpPr>
-            <a:spLocks noGrp="1"/>
+            <a:spLocks noGrp="1" noRot="1" noChangeAspect="1"/>
           </p:cNvSpPr>
           <p:nvPr>
             <p:ph type="sldImg" idx="2"/>
@@ -1030,7 +1048,7 @@
             <a:spLocks noGrp="1"/>
           </p:cNvSpPr>
           <p:nvPr>
-            <p:ph type="body" idx="3" sz="quarter"/>
+            <p:ph type="body" sz="quarter" idx="3"/>
           </p:nvPr>
         </p:nvSpPr>
         <p:spPr/>
@@ -1051,7 +1069,7 @@
             <a:spLocks noGrp="1"/>
           </p:cNvSpPr>
           <p:nvPr>
-            <p:ph type="sldNum" idx="5" sz="quarter"/>
+            <p:ph type="sldNum" sz="quarter" idx="5"/>
           </p:nvPr>
         </p:nvSpPr>
         <p:spPr/>
@@ -1065,7 +1083,7 @@
 </file>
 
 <file path=ppt/notesSlides/notesSlide17.xml><?xml version="1.0" encoding="utf-8"?>
-<p:notes xmlns:a="http://schemas.openxmlformats.org/drawingml/2006/main" xmlns:p="http://schemas.openxmlformats.org/presentationml/2006/main" xmlns:r="http://schemas.openxmlformats.org/officeDocument/2006/relationships">
+<p:notes xmlns:a="http://schemas.openxmlformats.org/drawingml/2006/main" xmlns:r="http://schemas.openxmlformats.org/officeDocument/2006/relationships" xmlns:p="http://schemas.openxmlformats.org/presentationml/2006/main">
   <p:cSld>
     <p:spTree>
       <p:nvGrpSpPr>
@@ -1085,7 +1103,7 @@
         <p:nvSpPr>
           <p:cNvPr id="2" name="Slide Image Placeholder 1"/>
           <p:cNvSpPr>
-            <a:spLocks noGrp="1"/>
+            <a:spLocks noGrp="1" noRot="1" noChangeAspect="1"/>
           </p:cNvSpPr>
           <p:nvPr>
             <p:ph type="sldImg" idx="2"/>
@@ -1100,7 +1118,7 @@
             <a:spLocks noGrp="1"/>
           </p:cNvSpPr>
           <p:nvPr>
-            <p:ph type="body" idx="3" sz="quarter"/>
+            <p:ph type="body" sz="quarter" idx="3"/>
           </p:nvPr>
         </p:nvSpPr>
         <p:spPr/>
@@ -1121,7 +1139,7 @@
             <a:spLocks noGrp="1"/>
           </p:cNvSpPr>
           <p:nvPr>
-            <p:ph type="sldNum" idx="5" sz="quarter"/>
+            <p:ph type="sldNum" sz="quarter" idx="5"/>
           </p:nvPr>
         </p:nvSpPr>
         <p:spPr/>
@@ -1135,7 +1153,7 @@
 </file>
 
 <file path=ppt/notesSlides/notesSlide18.xml><?xml version="1.0" encoding="utf-8"?>
-<p:notes xmlns:a="http://schemas.openxmlformats.org/drawingml/2006/main" xmlns:p="http://schemas.openxmlformats.org/presentationml/2006/main" xmlns:r="http://schemas.openxmlformats.org/officeDocument/2006/relationships">
+<p:notes xmlns:a="http://schemas.openxmlformats.org/drawingml/2006/main" xmlns:r="http://schemas.openxmlformats.org/officeDocument/2006/relationships" xmlns:p="http://schemas.openxmlformats.org/presentationml/2006/main">
   <p:cSld>
     <p:spTree>
       <p:nvGrpSpPr>
@@ -1155,7 +1173,7 @@
         <p:nvSpPr>
           <p:cNvPr id="2" name="Slide Image Placeholder 1"/>
           <p:cNvSpPr>
-            <a:spLocks noGrp="1"/>
+            <a:spLocks noGrp="1" noRot="1" noChangeAspect="1"/>
           </p:cNvSpPr>
           <p:nvPr>
             <p:ph type="sldImg" idx="2"/>
@@ -1170,7 +1188,7 @@
             <a:spLocks noGrp="1"/>
           </p:cNvSpPr>
           <p:nvPr>
-            <p:ph type="body" idx="3" sz="quarter"/>
+            <p:ph type="body" sz="quarter" idx="3"/>
           </p:nvPr>
         </p:nvSpPr>
         <p:spPr/>
@@ -1191,7 +1209,7 @@
             <a:spLocks noGrp="1"/>
           </p:cNvSpPr>
           <p:nvPr>
-            <p:ph type="sldNum" idx="5" sz="quarter"/>
+            <p:ph type="sldNum" sz="quarter" idx="5"/>
           </p:nvPr>
         </p:nvSpPr>
         <p:spPr/>
@@ -1205,7 +1223,7 @@
 </file>
 
 <file path=ppt/notesSlides/notesSlide19.xml><?xml version="1.0" encoding="utf-8"?>
-<p:notes xmlns:a="http://schemas.openxmlformats.org/drawingml/2006/main" xmlns:p="http://schemas.openxmlformats.org/presentationml/2006/main" xmlns:r="http://schemas.openxmlformats.org/officeDocument/2006/relationships">
+<p:notes xmlns:a="http://schemas.openxmlformats.org/drawingml/2006/main" xmlns:r="http://schemas.openxmlformats.org/officeDocument/2006/relationships" xmlns:p="http://schemas.openxmlformats.org/presentationml/2006/main">
   <p:cSld>
     <p:spTree>
       <p:nvGrpSpPr>
@@ -1225,7 +1243,7 @@
         <p:nvSpPr>
           <p:cNvPr id="2" name="Slide Image Placeholder 1"/>
           <p:cNvSpPr>
-            <a:spLocks noGrp="1"/>
+            <a:spLocks noGrp="1" noRot="1" noChangeAspect="1"/>
           </p:cNvSpPr>
           <p:nvPr>
             <p:ph type="sldImg" idx="2"/>
@@ -1240,7 +1258,7 @@
             <a:spLocks noGrp="1"/>
           </p:cNvSpPr>
           <p:nvPr>
-            <p:ph type="body" idx="3" sz="quarter"/>
+            <p:ph type="body" sz="quarter" idx="3"/>
           </p:nvPr>
         </p:nvSpPr>
         <p:spPr/>
@@ -1261,7 +1279,7 @@
             <a:spLocks noGrp="1"/>
           </p:cNvSpPr>
           <p:nvPr>
-            <p:ph type="sldNum" idx="5" sz="quarter"/>
+            <p:ph type="sldNum" sz="quarter" idx="5"/>
           </p:nvPr>
         </p:nvSpPr>
         <p:spPr/>
@@ -1275,7 +1293,7 @@
 </file>
 
 <file path=ppt/notesSlides/notesSlide2.xml><?xml version="1.0" encoding="utf-8"?>
-<p:notes xmlns:a="http://schemas.openxmlformats.org/drawingml/2006/main" xmlns:p="http://schemas.openxmlformats.org/presentationml/2006/main" xmlns:r="http://schemas.openxmlformats.org/officeDocument/2006/relationships">
+<p:notes xmlns:a="http://schemas.openxmlformats.org/drawingml/2006/main" xmlns:r="http://schemas.openxmlformats.org/officeDocument/2006/relationships" xmlns:p="http://schemas.openxmlformats.org/presentationml/2006/main">
   <p:cSld>
     <p:spTree>
       <p:nvGrpSpPr>
@@ -1295,7 +1313,7 @@
         <p:nvSpPr>
           <p:cNvPr id="2" name="Slide Image Placeholder 1"/>
           <p:cNvSpPr>
-            <a:spLocks noGrp="1"/>
+            <a:spLocks noGrp="1" noRot="1" noChangeAspect="1"/>
           </p:cNvSpPr>
           <p:nvPr>
             <p:ph type="sldImg" idx="2"/>
@@ -1310,7 +1328,7 @@
             <a:spLocks noGrp="1"/>
           </p:cNvSpPr>
           <p:nvPr>
-            <p:ph type="body" idx="3" sz="quarter"/>
+            <p:ph type="body" sz="quarter" idx="3"/>
           </p:nvPr>
         </p:nvSpPr>
         <p:spPr/>
@@ -1331,7 +1349,7 @@
             <a:spLocks noGrp="1"/>
           </p:cNvSpPr>
           <p:nvPr>
-            <p:ph type="sldNum" idx="5" sz="quarter"/>
+            <p:ph type="sldNum" sz="quarter" idx="5"/>
           </p:nvPr>
         </p:nvSpPr>
         <p:spPr/>
@@ -1345,7 +1363,7 @@
 </file>
 
 <file path=ppt/notesSlides/notesSlide20.xml><?xml version="1.0" encoding="utf-8"?>
-<p:notes xmlns:a="http://schemas.openxmlformats.org/drawingml/2006/main" xmlns:p="http://schemas.openxmlformats.org/presentationml/2006/main" xmlns:r="http://schemas.openxmlformats.org/officeDocument/2006/relationships">
+<p:notes xmlns:a="http://schemas.openxmlformats.org/drawingml/2006/main" xmlns:r="http://schemas.openxmlformats.org/officeDocument/2006/relationships" xmlns:p="http://schemas.openxmlformats.org/presentationml/2006/main">
   <p:cSld>
     <p:spTree>
       <p:nvGrpSpPr>
@@ -1365,7 +1383,7 @@
         <p:nvSpPr>
           <p:cNvPr id="2" name="Slide Image Placeholder 1"/>
           <p:cNvSpPr>
-            <a:spLocks noGrp="1"/>
+            <a:spLocks noGrp="1" noRot="1" noChangeAspect="1"/>
           </p:cNvSpPr>
           <p:nvPr>
             <p:ph type="sldImg" idx="2"/>
@@ -1380,7 +1398,7 @@
             <a:spLocks noGrp="1"/>
           </p:cNvSpPr>
           <p:nvPr>
-            <p:ph type="body" idx="3" sz="quarter"/>
+            <p:ph type="body" sz="quarter" idx="3"/>
           </p:nvPr>
         </p:nvSpPr>
         <p:spPr/>
@@ -1401,7 +1419,7 @@
             <a:spLocks noGrp="1"/>
           </p:cNvSpPr>
           <p:nvPr>
-            <p:ph type="sldNum" idx="5" sz="quarter"/>
+            <p:ph type="sldNum" sz="quarter" idx="5"/>
           </p:nvPr>
         </p:nvSpPr>
         <p:spPr/>
@@ -1415,7 +1433,7 @@
 </file>
 
 <file path=ppt/notesSlides/notesSlide21.xml><?xml version="1.0" encoding="utf-8"?>
-<p:notes xmlns:a="http://schemas.openxmlformats.org/drawingml/2006/main" xmlns:p="http://schemas.openxmlformats.org/presentationml/2006/main" xmlns:r="http://schemas.openxmlformats.org/officeDocument/2006/relationships">
+<p:notes xmlns:a="http://schemas.openxmlformats.org/drawingml/2006/main" xmlns:r="http://schemas.openxmlformats.org/officeDocument/2006/relationships" xmlns:p="http://schemas.openxmlformats.org/presentationml/2006/main">
   <p:cSld>
     <p:spTree>
       <p:nvGrpSpPr>
@@ -1435,7 +1453,7 @@
         <p:nvSpPr>
           <p:cNvPr id="2" name="Slide Image Placeholder 1"/>
           <p:cNvSpPr>
-            <a:spLocks noGrp="1"/>
+            <a:spLocks noGrp="1" noRot="1" noChangeAspect="1"/>
           </p:cNvSpPr>
           <p:nvPr>
             <p:ph type="sldImg" idx="2"/>
@@ -1450,7 +1468,7 @@
             <a:spLocks noGrp="1"/>
           </p:cNvSpPr>
           <p:nvPr>
-            <p:ph type="body" idx="3" sz="quarter"/>
+            <p:ph type="body" sz="quarter" idx="3"/>
           </p:nvPr>
         </p:nvSpPr>
         <p:spPr/>
@@ -1471,7 +1489,7 @@
             <a:spLocks noGrp="1"/>
           </p:cNvSpPr>
           <p:nvPr>
-            <p:ph type="sldNum" idx="5" sz="quarter"/>
+            <p:ph type="sldNum" sz="quarter" idx="5"/>
           </p:nvPr>
         </p:nvSpPr>
         <p:spPr/>
@@ -1485,7 +1503,7 @@
 </file>
 
 <file path=ppt/notesSlides/notesSlide22.xml><?xml version="1.0" encoding="utf-8"?>
-<p:notes xmlns:a="http://schemas.openxmlformats.org/drawingml/2006/main" xmlns:p="http://schemas.openxmlformats.org/presentationml/2006/main" xmlns:r="http://schemas.openxmlformats.org/officeDocument/2006/relationships">
+<p:notes xmlns:a="http://schemas.openxmlformats.org/drawingml/2006/main" xmlns:r="http://schemas.openxmlformats.org/officeDocument/2006/relationships" xmlns:p="http://schemas.openxmlformats.org/presentationml/2006/main">
   <p:cSld>
     <p:spTree>
       <p:nvGrpSpPr>
@@ -1505,7 +1523,7 @@
         <p:nvSpPr>
           <p:cNvPr id="2" name="Slide Image Placeholder 1"/>
           <p:cNvSpPr>
-            <a:spLocks noGrp="1"/>
+            <a:spLocks noGrp="1" noRot="1" noChangeAspect="1"/>
           </p:cNvSpPr>
           <p:nvPr>
             <p:ph type="sldImg" idx="2"/>
@@ -1520,7 +1538,7 @@
             <a:spLocks noGrp="1"/>
           </p:cNvSpPr>
           <p:nvPr>
-            <p:ph type="body" idx="3" sz="quarter"/>
+            <p:ph type="body" sz="quarter" idx="3"/>
           </p:nvPr>
         </p:nvSpPr>
         <p:spPr/>
@@ -1541,7 +1559,7 @@
             <a:spLocks noGrp="1"/>
           </p:cNvSpPr>
           <p:nvPr>
-            <p:ph type="sldNum" idx="5" sz="quarter"/>
+            <p:ph type="sldNum" sz="quarter" idx="5"/>
           </p:nvPr>
         </p:nvSpPr>
         <p:spPr/>
@@ -1555,7 +1573,7 @@
 </file>
 
 <file path=ppt/notesSlides/notesSlide23.xml><?xml version="1.0" encoding="utf-8"?>
-<p:notes xmlns:a="http://schemas.openxmlformats.org/drawingml/2006/main" xmlns:p="http://schemas.openxmlformats.org/presentationml/2006/main" xmlns:r="http://schemas.openxmlformats.org/officeDocument/2006/relationships">
+<p:notes xmlns:a="http://schemas.openxmlformats.org/drawingml/2006/main" xmlns:r="http://schemas.openxmlformats.org/officeDocument/2006/relationships" xmlns:p="http://schemas.openxmlformats.org/presentationml/2006/main">
   <p:cSld>
     <p:spTree>
       <p:nvGrpSpPr>
@@ -1575,7 +1593,7 @@
         <p:nvSpPr>
           <p:cNvPr id="2" name="Slide Image Placeholder 1"/>
           <p:cNvSpPr>
-            <a:spLocks noGrp="1"/>
+            <a:spLocks noGrp="1" noRot="1" noChangeAspect="1"/>
           </p:cNvSpPr>
           <p:nvPr>
             <p:ph type="sldImg" idx="2"/>
@@ -1590,7 +1608,7 @@
             <a:spLocks noGrp="1"/>
           </p:cNvSpPr>
           <p:nvPr>
-            <p:ph type="body" idx="3" sz="quarter"/>
+            <p:ph type="body" sz="quarter" idx="3"/>
           </p:nvPr>
         </p:nvSpPr>
         <p:spPr/>
@@ -1611,7 +1629,7 @@
             <a:spLocks noGrp="1"/>
           </p:cNvSpPr>
           <p:nvPr>
-            <p:ph type="sldNum" idx="5" sz="quarter"/>
+            <p:ph type="sldNum" sz="quarter" idx="5"/>
           </p:nvPr>
         </p:nvSpPr>
         <p:spPr/>
@@ -1625,7 +1643,7 @@
 </file>
 
 <file path=ppt/notesSlides/notesSlide24.xml><?xml version="1.0" encoding="utf-8"?>
-<p:notes xmlns:a="http://schemas.openxmlformats.org/drawingml/2006/main" xmlns:p="http://schemas.openxmlformats.org/presentationml/2006/main" xmlns:r="http://schemas.openxmlformats.org/officeDocument/2006/relationships">
+<p:notes xmlns:a="http://schemas.openxmlformats.org/drawingml/2006/main" xmlns:r="http://schemas.openxmlformats.org/officeDocument/2006/relationships" xmlns:p="http://schemas.openxmlformats.org/presentationml/2006/main">
   <p:cSld>
     <p:spTree>
       <p:nvGrpSpPr>
@@ -1645,7 +1663,7 @@
         <p:nvSpPr>
           <p:cNvPr id="2" name="Slide Image Placeholder 1"/>
           <p:cNvSpPr>
-            <a:spLocks noGrp="1"/>
+            <a:spLocks noGrp="1" noRot="1" noChangeAspect="1"/>
           </p:cNvSpPr>
           <p:nvPr>
             <p:ph type="sldImg" idx="2"/>
@@ -1660,7 +1678,7 @@
             <a:spLocks noGrp="1"/>
           </p:cNvSpPr>
           <p:nvPr>
-            <p:ph type="body" idx="3" sz="quarter"/>
+            <p:ph type="body" sz="quarter" idx="3"/>
           </p:nvPr>
         </p:nvSpPr>
         <p:spPr/>
@@ -1681,7 +1699,7 @@
             <a:spLocks noGrp="1"/>
           </p:cNvSpPr>
           <p:nvPr>
-            <p:ph type="sldNum" idx="5" sz="quarter"/>
+            <p:ph type="sldNum" sz="quarter" idx="5"/>
           </p:nvPr>
         </p:nvSpPr>
         <p:spPr/>
@@ -1695,7 +1713,7 @@
 </file>
 
 <file path=ppt/notesSlides/notesSlide25.xml><?xml version="1.0" encoding="utf-8"?>
-<p:notes xmlns:a="http://schemas.openxmlformats.org/drawingml/2006/main" xmlns:p="http://schemas.openxmlformats.org/presentationml/2006/main" xmlns:r="http://schemas.openxmlformats.org/officeDocument/2006/relationships">
+<p:notes xmlns:a="http://schemas.openxmlformats.org/drawingml/2006/main" xmlns:r="http://schemas.openxmlformats.org/officeDocument/2006/relationships" xmlns:p="http://schemas.openxmlformats.org/presentationml/2006/main">
   <p:cSld>
     <p:spTree>
       <p:nvGrpSpPr>
@@ -1715,7 +1733,7 @@
         <p:nvSpPr>
           <p:cNvPr id="2" name="Slide Image Placeholder 1"/>
           <p:cNvSpPr>
-            <a:spLocks noGrp="1"/>
+            <a:spLocks noGrp="1" noRot="1" noChangeAspect="1"/>
           </p:cNvSpPr>
           <p:nvPr>
             <p:ph type="sldImg" idx="2"/>
@@ -1730,7 +1748,7 @@
             <a:spLocks noGrp="1"/>
           </p:cNvSpPr>
           <p:nvPr>
-            <p:ph type="body" idx="3" sz="quarter"/>
+            <p:ph type="body" sz="quarter" idx="3"/>
           </p:nvPr>
         </p:nvSpPr>
         <p:spPr/>
@@ -1751,7 +1769,7 @@
             <a:spLocks noGrp="1"/>
           </p:cNvSpPr>
           <p:nvPr>
-            <p:ph type="sldNum" idx="5" sz="quarter"/>
+            <p:ph type="sldNum" sz="quarter" idx="5"/>
           </p:nvPr>
         </p:nvSpPr>
         <p:spPr/>
@@ -1765,7 +1783,7 @@
 </file>
 
 <file path=ppt/notesSlides/notesSlide26.xml><?xml version="1.0" encoding="utf-8"?>
-<p:notes xmlns:a="http://schemas.openxmlformats.org/drawingml/2006/main" xmlns:p="http://schemas.openxmlformats.org/presentationml/2006/main" xmlns:r="http://schemas.openxmlformats.org/officeDocument/2006/relationships">
+<p:notes xmlns:a="http://schemas.openxmlformats.org/drawingml/2006/main" xmlns:r="http://schemas.openxmlformats.org/officeDocument/2006/relationships" xmlns:p="http://schemas.openxmlformats.org/presentationml/2006/main">
   <p:cSld>
     <p:spTree>
       <p:nvGrpSpPr>
@@ -1785,7 +1803,7 @@
         <p:nvSpPr>
           <p:cNvPr id="2" name="Slide Image Placeholder 1"/>
           <p:cNvSpPr>
-            <a:spLocks noGrp="1"/>
+            <a:spLocks noGrp="1" noRot="1" noChangeAspect="1"/>
           </p:cNvSpPr>
           <p:nvPr>
             <p:ph type="sldImg" idx="2"/>
@@ -1800,7 +1818,7 @@
             <a:spLocks noGrp="1"/>
           </p:cNvSpPr>
           <p:nvPr>
-            <p:ph type="body" idx="3" sz="quarter"/>
+            <p:ph type="body" sz="quarter" idx="3"/>
           </p:nvPr>
         </p:nvSpPr>
         <p:spPr/>
@@ -1821,7 +1839,7 @@
             <a:spLocks noGrp="1"/>
           </p:cNvSpPr>
           <p:nvPr>
-            <p:ph type="sldNum" idx="5" sz="quarter"/>
+            <p:ph type="sldNum" sz="quarter" idx="5"/>
           </p:nvPr>
         </p:nvSpPr>
         <p:spPr/>
@@ -1835,7 +1853,7 @@
 </file>
 
 <file path=ppt/notesSlides/notesSlide27.xml><?xml version="1.0" encoding="utf-8"?>
-<p:notes xmlns:a="http://schemas.openxmlformats.org/drawingml/2006/main" xmlns:p="http://schemas.openxmlformats.org/presentationml/2006/main" xmlns:r="http://schemas.openxmlformats.org/officeDocument/2006/relationships">
+<p:notes xmlns:a="http://schemas.openxmlformats.org/drawingml/2006/main" xmlns:r="http://schemas.openxmlformats.org/officeDocument/2006/relationships" xmlns:p="http://schemas.openxmlformats.org/presentationml/2006/main">
   <p:cSld>
     <p:spTree>
       <p:nvGrpSpPr>
@@ -1855,7 +1873,7 @@
         <p:nvSpPr>
           <p:cNvPr id="2" name="Slide Image Placeholder 1"/>
           <p:cNvSpPr>
-            <a:spLocks noGrp="1"/>
+            <a:spLocks noGrp="1" noRot="1" noChangeAspect="1"/>
           </p:cNvSpPr>
           <p:nvPr>
             <p:ph type="sldImg" idx="2"/>
@@ -1870,7 +1888,7 @@
             <a:spLocks noGrp="1"/>
           </p:cNvSpPr>
           <p:nvPr>
-            <p:ph type="body" idx="3" sz="quarter"/>
+            <p:ph type="body" sz="quarter" idx="3"/>
           </p:nvPr>
         </p:nvSpPr>
         <p:spPr/>
@@ -1891,7 +1909,7 @@
             <a:spLocks noGrp="1"/>
           </p:cNvSpPr>
           <p:nvPr>
-            <p:ph type="sldNum" idx="5" sz="quarter"/>
+            <p:ph type="sldNum" sz="quarter" idx="5"/>
           </p:nvPr>
         </p:nvSpPr>
         <p:spPr/>
@@ -1905,7 +1923,7 @@
 </file>
 
 <file path=ppt/notesSlides/notesSlide28.xml><?xml version="1.0" encoding="utf-8"?>
-<p:notes xmlns:a="http://schemas.openxmlformats.org/drawingml/2006/main" xmlns:p="http://schemas.openxmlformats.org/presentationml/2006/main" xmlns:r="http://schemas.openxmlformats.org/officeDocument/2006/relationships">
+<p:notes xmlns:a="http://schemas.openxmlformats.org/drawingml/2006/main" xmlns:r="http://schemas.openxmlformats.org/officeDocument/2006/relationships" xmlns:p="http://schemas.openxmlformats.org/presentationml/2006/main">
   <p:cSld>
     <p:spTree>
       <p:nvGrpSpPr>
@@ -1925,7 +1943,7 @@
         <p:nvSpPr>
           <p:cNvPr id="2" name="Slide Image Placeholder 1"/>
           <p:cNvSpPr>
-            <a:spLocks noGrp="1"/>
+            <a:spLocks noGrp="1" noRot="1" noChangeAspect="1"/>
           </p:cNvSpPr>
           <p:nvPr>
             <p:ph type="sldImg" idx="2"/>
@@ -1940,7 +1958,7 @@
             <a:spLocks noGrp="1"/>
           </p:cNvSpPr>
           <p:nvPr>
-            <p:ph type="body" idx="3" sz="quarter"/>
+            <p:ph type="body" sz="quarter" idx="3"/>
           </p:nvPr>
         </p:nvSpPr>
         <p:spPr/>
@@ -1961,7 +1979,7 @@
             <a:spLocks noGrp="1"/>
           </p:cNvSpPr>
           <p:nvPr>
-            <p:ph type="sldNum" idx="5" sz="quarter"/>
+            <p:ph type="sldNum" sz="quarter" idx="5"/>
           </p:nvPr>
         </p:nvSpPr>
         <p:spPr/>
@@ -1975,7 +1993,7 @@
 </file>
 
 <file path=ppt/notesSlides/notesSlide29.xml><?xml version="1.0" encoding="utf-8"?>
-<p:notes xmlns:a="http://schemas.openxmlformats.org/drawingml/2006/main" xmlns:p="http://schemas.openxmlformats.org/presentationml/2006/main" xmlns:r="http://schemas.openxmlformats.org/officeDocument/2006/relationships">
+<p:notes xmlns:a="http://schemas.openxmlformats.org/drawingml/2006/main" xmlns:r="http://schemas.openxmlformats.org/officeDocument/2006/relationships" xmlns:p="http://schemas.openxmlformats.org/presentationml/2006/main">
   <p:cSld>
     <p:spTree>
       <p:nvGrpSpPr>
@@ -1995,7 +2013,7 @@
         <p:nvSpPr>
           <p:cNvPr id="2" name="Slide Image Placeholder 1"/>
           <p:cNvSpPr>
-            <a:spLocks noGrp="1"/>
+            <a:spLocks noGrp="1" noRot="1" noChangeAspect="1"/>
           </p:cNvSpPr>
           <p:nvPr>
             <p:ph type="sldImg" idx="2"/>
@@ -2010,7 +2028,7 @@
             <a:spLocks noGrp="1"/>
           </p:cNvSpPr>
           <p:nvPr>
-            <p:ph type="body" idx="3" sz="quarter"/>
+            <p:ph type="body" sz="quarter" idx="3"/>
           </p:nvPr>
         </p:nvSpPr>
         <p:spPr/>
@@ -2031,7 +2049,7 @@
             <a:spLocks noGrp="1"/>
           </p:cNvSpPr>
           <p:nvPr>
-            <p:ph type="sldNum" idx="5" sz="quarter"/>
+            <p:ph type="sldNum" sz="quarter" idx="5"/>
           </p:nvPr>
         </p:nvSpPr>
         <p:spPr/>
@@ -2045,7 +2063,7 @@
 </file>
 
 <file path=ppt/notesSlides/notesSlide3.xml><?xml version="1.0" encoding="utf-8"?>
-<p:notes xmlns:a="http://schemas.openxmlformats.org/drawingml/2006/main" xmlns:p="http://schemas.openxmlformats.org/presentationml/2006/main" xmlns:r="http://schemas.openxmlformats.org/officeDocument/2006/relationships">
+<p:notes xmlns:a="http://schemas.openxmlformats.org/drawingml/2006/main" xmlns:r="http://schemas.openxmlformats.org/officeDocument/2006/relationships" xmlns:p="http://schemas.openxmlformats.org/presentationml/2006/main">
   <p:cSld>
     <p:spTree>
       <p:nvGrpSpPr>
@@ -2065,7 +2083,7 @@
         <p:nvSpPr>
           <p:cNvPr id="2" name="Slide Image Placeholder 1"/>
           <p:cNvSpPr>
-            <a:spLocks noGrp="1"/>
+            <a:spLocks noGrp="1" noRot="1" noChangeAspect="1"/>
           </p:cNvSpPr>
           <p:nvPr>
             <p:ph type="sldImg" idx="2"/>
@@ -2080,7 +2098,7 @@
             <a:spLocks noGrp="1"/>
           </p:cNvSpPr>
           <p:nvPr>
-            <p:ph type="body" idx="3" sz="quarter"/>
+            <p:ph type="body" sz="quarter" idx="3"/>
           </p:nvPr>
         </p:nvSpPr>
         <p:spPr/>
@@ -2101,7 +2119,7 @@
             <a:spLocks noGrp="1"/>
           </p:cNvSpPr>
           <p:nvPr>
-            <p:ph type="sldNum" idx="5" sz="quarter"/>
+            <p:ph type="sldNum" sz="quarter" idx="5"/>
           </p:nvPr>
         </p:nvSpPr>
         <p:spPr/>
@@ -2115,7 +2133,7 @@
 </file>
 
 <file path=ppt/notesSlides/notesSlide30.xml><?xml version="1.0" encoding="utf-8"?>
-<p:notes xmlns:a="http://schemas.openxmlformats.org/drawingml/2006/main" xmlns:p="http://schemas.openxmlformats.org/presentationml/2006/main" xmlns:r="http://schemas.openxmlformats.org/officeDocument/2006/relationships">
+<p:notes xmlns:a="http://schemas.openxmlformats.org/drawingml/2006/main" xmlns:r="http://schemas.openxmlformats.org/officeDocument/2006/relationships" xmlns:p="http://schemas.openxmlformats.org/presentationml/2006/main">
   <p:cSld>
     <p:spTree>
       <p:nvGrpSpPr>
@@ -2135,7 +2153,7 @@
         <p:nvSpPr>
           <p:cNvPr id="2" name="Slide Image Placeholder 1"/>
           <p:cNvSpPr>
-            <a:spLocks noGrp="1"/>
+            <a:spLocks noGrp="1" noRot="1" noChangeAspect="1"/>
           </p:cNvSpPr>
           <p:nvPr>
             <p:ph type="sldImg" idx="2"/>
@@ -2150,7 +2168,7 @@
             <a:spLocks noGrp="1"/>
           </p:cNvSpPr>
           <p:nvPr>
-            <p:ph type="body" idx="3" sz="quarter"/>
+            <p:ph type="body" sz="quarter" idx="3"/>
           </p:nvPr>
         </p:nvSpPr>
         <p:spPr/>
@@ -2171,7 +2189,7 @@
             <a:spLocks noGrp="1"/>
           </p:cNvSpPr>
           <p:nvPr>
-            <p:ph type="sldNum" idx="5" sz="quarter"/>
+            <p:ph type="sldNum" sz="quarter" idx="5"/>
           </p:nvPr>
         </p:nvSpPr>
         <p:spPr/>
@@ -2185,7 +2203,7 @@
 </file>
 
 <file path=ppt/notesSlides/notesSlide31.xml><?xml version="1.0" encoding="utf-8"?>
-<p:notes xmlns:a="http://schemas.openxmlformats.org/drawingml/2006/main" xmlns:p="http://schemas.openxmlformats.org/presentationml/2006/main" xmlns:r="http://schemas.openxmlformats.org/officeDocument/2006/relationships">
+<p:notes xmlns:a="http://schemas.openxmlformats.org/drawingml/2006/main" xmlns:r="http://schemas.openxmlformats.org/officeDocument/2006/relationships" xmlns:p="http://schemas.openxmlformats.org/presentationml/2006/main">
   <p:cSld>
     <p:spTree>
       <p:nvGrpSpPr>
@@ -2205,7 +2223,7 @@
         <p:nvSpPr>
           <p:cNvPr id="2" name="Slide Image Placeholder 1"/>
           <p:cNvSpPr>
-            <a:spLocks noGrp="1"/>
+            <a:spLocks noGrp="1" noRot="1" noChangeAspect="1"/>
           </p:cNvSpPr>
           <p:nvPr>
             <p:ph type="sldImg" idx="2"/>
@@ -2220,7 +2238,7 @@
             <a:spLocks noGrp="1"/>
           </p:cNvSpPr>
           <p:nvPr>
-            <p:ph type="body" idx="3" sz="quarter"/>
+            <p:ph type="body" sz="quarter" idx="3"/>
           </p:nvPr>
         </p:nvSpPr>
         <p:spPr/>
@@ -2241,7 +2259,7 @@
             <a:spLocks noGrp="1"/>
           </p:cNvSpPr>
           <p:nvPr>
-            <p:ph type="sldNum" idx="5" sz="quarter"/>
+            <p:ph type="sldNum" sz="quarter" idx="5"/>
           </p:nvPr>
         </p:nvSpPr>
         <p:spPr/>
@@ -2255,7 +2273,7 @@
 </file>
 
 <file path=ppt/notesSlides/notesSlide32.xml><?xml version="1.0" encoding="utf-8"?>
-<p:notes xmlns:a="http://schemas.openxmlformats.org/drawingml/2006/main" xmlns:p="http://schemas.openxmlformats.org/presentationml/2006/main" xmlns:r="http://schemas.openxmlformats.org/officeDocument/2006/relationships">
+<p:notes xmlns:a="http://schemas.openxmlformats.org/drawingml/2006/main" xmlns:r="http://schemas.openxmlformats.org/officeDocument/2006/relationships" xmlns:p="http://schemas.openxmlformats.org/presentationml/2006/main">
   <p:cSld>
     <p:spTree>
       <p:nvGrpSpPr>
@@ -2275,7 +2293,7 @@
         <p:nvSpPr>
           <p:cNvPr id="2" name="Slide Image Placeholder 1"/>
           <p:cNvSpPr>
-            <a:spLocks noGrp="1"/>
+            <a:spLocks noGrp="1" noRot="1" noChangeAspect="1"/>
           </p:cNvSpPr>
           <p:nvPr>
             <p:ph type="sldImg" idx="2"/>
@@ -2290,7 +2308,7 @@
             <a:spLocks noGrp="1"/>
           </p:cNvSpPr>
           <p:nvPr>
-            <p:ph type="body" idx="3" sz="quarter"/>
+            <p:ph type="body" sz="quarter" idx="3"/>
           </p:nvPr>
         </p:nvSpPr>
         <p:spPr/>
@@ -2311,7 +2329,7 @@
             <a:spLocks noGrp="1"/>
           </p:cNvSpPr>
           <p:nvPr>
-            <p:ph type="sldNum" idx="5" sz="quarter"/>
+            <p:ph type="sldNum" sz="quarter" idx="5"/>
           </p:nvPr>
         </p:nvSpPr>
         <p:spPr/>
@@ -2325,7 +2343,7 @@
 </file>
 
 <file path=ppt/notesSlides/notesSlide33.xml><?xml version="1.0" encoding="utf-8"?>
-<p:notes xmlns:a="http://schemas.openxmlformats.org/drawingml/2006/main" xmlns:p="http://schemas.openxmlformats.org/presentationml/2006/main" xmlns:r="http://schemas.openxmlformats.org/officeDocument/2006/relationships">
+<p:notes xmlns:a="http://schemas.openxmlformats.org/drawingml/2006/main" xmlns:r="http://schemas.openxmlformats.org/officeDocument/2006/relationships" xmlns:p="http://schemas.openxmlformats.org/presentationml/2006/main">
   <p:cSld>
     <p:spTree>
       <p:nvGrpSpPr>
@@ -2345,7 +2363,7 @@
         <p:nvSpPr>
           <p:cNvPr id="2" name="Slide Image Placeholder 1"/>
           <p:cNvSpPr>
-            <a:spLocks noGrp="1"/>
+            <a:spLocks noGrp="1" noRot="1" noChangeAspect="1"/>
           </p:cNvSpPr>
           <p:nvPr>
             <p:ph type="sldImg" idx="2"/>
@@ -2360,7 +2378,7 @@
             <a:spLocks noGrp="1"/>
           </p:cNvSpPr>
           <p:nvPr>
-            <p:ph type="body" idx="3" sz="quarter"/>
+            <p:ph type="body" sz="quarter" idx="3"/>
           </p:nvPr>
         </p:nvSpPr>
         <p:spPr/>
@@ -2381,7 +2399,7 @@
             <a:spLocks noGrp="1"/>
           </p:cNvSpPr>
           <p:nvPr>
-            <p:ph type="sldNum" idx="5" sz="quarter"/>
+            <p:ph type="sldNum" sz="quarter" idx="5"/>
           </p:nvPr>
         </p:nvSpPr>
         <p:spPr/>
@@ -2395,7 +2413,7 @@
 </file>
 
 <file path=ppt/notesSlides/notesSlide34.xml><?xml version="1.0" encoding="utf-8"?>
-<p:notes xmlns:a="http://schemas.openxmlformats.org/drawingml/2006/main" xmlns:p="http://schemas.openxmlformats.org/presentationml/2006/main" xmlns:r="http://schemas.openxmlformats.org/officeDocument/2006/relationships">
+<p:notes xmlns:a="http://schemas.openxmlformats.org/drawingml/2006/main" xmlns:r="http://schemas.openxmlformats.org/officeDocument/2006/relationships" xmlns:p="http://schemas.openxmlformats.org/presentationml/2006/main">
   <p:cSld>
     <p:spTree>
       <p:nvGrpSpPr>
@@ -2415,7 +2433,7 @@
         <p:nvSpPr>
           <p:cNvPr id="2" name="Slide Image Placeholder 1"/>
           <p:cNvSpPr>
-            <a:spLocks noGrp="1"/>
+            <a:spLocks noGrp="1" noRot="1" noChangeAspect="1"/>
           </p:cNvSpPr>
           <p:nvPr>
             <p:ph type="sldImg" idx="2"/>
@@ -2430,7 +2448,7 @@
             <a:spLocks noGrp="1"/>
           </p:cNvSpPr>
           <p:nvPr>
-            <p:ph type="body" idx="3" sz="quarter"/>
+            <p:ph type="body" sz="quarter" idx="3"/>
           </p:nvPr>
         </p:nvSpPr>
         <p:spPr/>
@@ -2451,7 +2469,7 @@
             <a:spLocks noGrp="1"/>
           </p:cNvSpPr>
           <p:nvPr>
-            <p:ph type="sldNum" idx="5" sz="quarter"/>
+            <p:ph type="sldNum" sz="quarter" idx="5"/>
           </p:nvPr>
         </p:nvSpPr>
         <p:spPr/>
@@ -2465,7 +2483,7 @@
 </file>
 
 <file path=ppt/notesSlides/notesSlide4.xml><?xml version="1.0" encoding="utf-8"?>
-<p:notes xmlns:a="http://schemas.openxmlformats.org/drawingml/2006/main" xmlns:p="http://schemas.openxmlformats.org/presentationml/2006/main" xmlns:r="http://schemas.openxmlformats.org/officeDocument/2006/relationships">
+<p:notes xmlns:a="http://schemas.openxmlformats.org/drawingml/2006/main" xmlns:r="http://schemas.openxmlformats.org/officeDocument/2006/relationships" xmlns:p="http://schemas.openxmlformats.org/presentationml/2006/main">
   <p:cSld>
     <p:spTree>
       <p:nvGrpSpPr>
@@ -2485,7 +2503,7 @@
         <p:nvSpPr>
           <p:cNvPr id="2" name="Slide Image Placeholder 1"/>
           <p:cNvSpPr>
-            <a:spLocks noGrp="1"/>
+            <a:spLocks noGrp="1" noRot="1" noChangeAspect="1"/>
           </p:cNvSpPr>
           <p:nvPr>
             <p:ph type="sldImg" idx="2"/>
@@ -2500,7 +2518,7 @@
             <a:spLocks noGrp="1"/>
           </p:cNvSpPr>
           <p:nvPr>
-            <p:ph type="body" idx="3" sz="quarter"/>
+            <p:ph type="body" sz="quarter" idx="3"/>
           </p:nvPr>
         </p:nvSpPr>
         <p:spPr/>
@@ -2521,7 +2539,7 @@
             <a:spLocks noGrp="1"/>
           </p:cNvSpPr>
           <p:nvPr>
-            <p:ph type="sldNum" idx="5" sz="quarter"/>
+            <p:ph type="sldNum" sz="quarter" idx="5"/>
           </p:nvPr>
         </p:nvSpPr>
         <p:spPr/>
@@ -2535,7 +2553,7 @@
 </file>
 
 <file path=ppt/notesSlides/notesSlide5.xml><?xml version="1.0" encoding="utf-8"?>
-<p:notes xmlns:a="http://schemas.openxmlformats.org/drawingml/2006/main" xmlns:p="http://schemas.openxmlformats.org/presentationml/2006/main" xmlns:r="http://schemas.openxmlformats.org/officeDocument/2006/relationships">
+<p:notes xmlns:a="http://schemas.openxmlformats.org/drawingml/2006/main" xmlns:r="http://schemas.openxmlformats.org/officeDocument/2006/relationships" xmlns:p="http://schemas.openxmlformats.org/presentationml/2006/main">
   <p:cSld>
     <p:spTree>
       <p:nvGrpSpPr>
@@ -2555,7 +2573,7 @@
         <p:nvSpPr>
           <p:cNvPr id="2" name="Slide Image Placeholder 1"/>
           <p:cNvSpPr>
-            <a:spLocks noGrp="1"/>
+            <a:spLocks noGrp="1" noRot="1" noChangeAspect="1"/>
           </p:cNvSpPr>
           <p:nvPr>
             <p:ph type="sldImg" idx="2"/>
@@ -2570,7 +2588,7 @@
             <a:spLocks noGrp="1"/>
           </p:cNvSpPr>
           <p:nvPr>
-            <p:ph type="body" idx="3" sz="quarter"/>
+            <p:ph type="body" sz="quarter" idx="3"/>
           </p:nvPr>
         </p:nvSpPr>
         <p:spPr/>
@@ -2591,7 +2609,7 @@
             <a:spLocks noGrp="1"/>
           </p:cNvSpPr>
           <p:nvPr>
-            <p:ph type="sldNum" idx="5" sz="quarter"/>
+            <p:ph type="sldNum" sz="quarter" idx="5"/>
           </p:nvPr>
         </p:nvSpPr>
         <p:spPr/>
@@ -2605,7 +2623,7 @@
 </file>
 
 <file path=ppt/notesSlides/notesSlide6.xml><?xml version="1.0" encoding="utf-8"?>
-<p:notes xmlns:a="http://schemas.openxmlformats.org/drawingml/2006/main" xmlns:p="http://schemas.openxmlformats.org/presentationml/2006/main" xmlns:r="http://schemas.openxmlformats.org/officeDocument/2006/relationships">
+<p:notes xmlns:a="http://schemas.openxmlformats.org/drawingml/2006/main" xmlns:r="http://schemas.openxmlformats.org/officeDocument/2006/relationships" xmlns:p="http://schemas.openxmlformats.org/presentationml/2006/main">
   <p:cSld>
     <p:spTree>
       <p:nvGrpSpPr>
@@ -2625,7 +2643,7 @@
         <p:nvSpPr>
           <p:cNvPr id="2" name="Slide Image Placeholder 1"/>
           <p:cNvSpPr>
-            <a:spLocks noGrp="1"/>
+            <a:spLocks noGrp="1" noRot="1" noChangeAspect="1"/>
           </p:cNvSpPr>
           <p:nvPr>
             <p:ph type="sldImg" idx="2"/>
@@ -2640,7 +2658,7 @@
             <a:spLocks noGrp="1"/>
           </p:cNvSpPr>
           <p:nvPr>
-            <p:ph type="body" idx="3" sz="quarter"/>
+            <p:ph type="body" sz="quarter" idx="3"/>
           </p:nvPr>
         </p:nvSpPr>
         <p:spPr/>
@@ -2661,7 +2679,7 @@
             <a:spLocks noGrp="1"/>
           </p:cNvSpPr>
           <p:nvPr>
-            <p:ph type="sldNum" idx="5" sz="quarter"/>
+            <p:ph type="sldNum" sz="quarter" idx="5"/>
           </p:nvPr>
         </p:nvSpPr>
         <p:spPr/>
@@ -2675,7 +2693,7 @@
 </file>
 
 <file path=ppt/notesSlides/notesSlide7.xml><?xml version="1.0" encoding="utf-8"?>
-<p:notes xmlns:a="http://schemas.openxmlformats.org/drawingml/2006/main" xmlns:p="http://schemas.openxmlformats.org/presentationml/2006/main" xmlns:r="http://schemas.openxmlformats.org/officeDocument/2006/relationships">
+<p:notes xmlns:a="http://schemas.openxmlformats.org/drawingml/2006/main" xmlns:r="http://schemas.openxmlformats.org/officeDocument/2006/relationships" xmlns:p="http://schemas.openxmlformats.org/presentationml/2006/main">
   <p:cSld>
     <p:spTree>
       <p:nvGrpSpPr>
@@ -2695,7 +2713,7 @@
         <p:nvSpPr>
           <p:cNvPr id="2" name="Slide Image Placeholder 1"/>
           <p:cNvSpPr>
-            <a:spLocks noGrp="1"/>
+            <a:spLocks noGrp="1" noRot="1" noChangeAspect="1"/>
           </p:cNvSpPr>
           <p:nvPr>
             <p:ph type="sldImg" idx="2"/>
@@ -2710,7 +2728,7 @@
             <a:spLocks noGrp="1"/>
           </p:cNvSpPr>
           <p:nvPr>
-            <p:ph type="body" idx="3" sz="quarter"/>
+            <p:ph type="body" sz="quarter" idx="3"/>
           </p:nvPr>
         </p:nvSpPr>
         <p:spPr/>
@@ -2731,7 +2749,7 @@
             <a:spLocks noGrp="1"/>
           </p:cNvSpPr>
           <p:nvPr>
-            <p:ph type="sldNum" idx="5" sz="quarter"/>
+            <p:ph type="sldNum" sz="quarter" idx="5"/>
           </p:nvPr>
         </p:nvSpPr>
         <p:spPr/>
@@ -2745,7 +2763,7 @@
 </file>
 
 <file path=ppt/notesSlides/notesSlide8.xml><?xml version="1.0" encoding="utf-8"?>
-<p:notes xmlns:a="http://schemas.openxmlformats.org/drawingml/2006/main" xmlns:p="http://schemas.openxmlformats.org/presentationml/2006/main" xmlns:r="http://schemas.openxmlformats.org/officeDocument/2006/relationships">
+<p:notes xmlns:a="http://schemas.openxmlformats.org/drawingml/2006/main" xmlns:r="http://schemas.openxmlformats.org/officeDocument/2006/relationships" xmlns:p="http://schemas.openxmlformats.org/presentationml/2006/main">
   <p:cSld>
     <p:spTree>
       <p:nvGrpSpPr>
@@ -2765,7 +2783,7 @@
         <p:nvSpPr>
           <p:cNvPr id="2" name="Slide Image Placeholder 1"/>
           <p:cNvSpPr>
-            <a:spLocks noGrp="1"/>
+            <a:spLocks noGrp="1" noRot="1" noChangeAspect="1"/>
           </p:cNvSpPr>
           <p:nvPr>
             <p:ph type="sldImg" idx="2"/>
@@ -2780,7 +2798,7 @@
             <a:spLocks noGrp="1"/>
           </p:cNvSpPr>
           <p:nvPr>
-            <p:ph type="body" idx="3" sz="quarter"/>
+            <p:ph type="body" sz="quarter" idx="3"/>
           </p:nvPr>
         </p:nvSpPr>
         <p:spPr/>
@@ -2801,7 +2819,7 @@
             <a:spLocks noGrp="1"/>
           </p:cNvSpPr>
           <p:nvPr>
-            <p:ph type="sldNum" idx="5" sz="quarter"/>
+            <p:ph type="sldNum" sz="quarter" idx="5"/>
           </p:nvPr>
         </p:nvSpPr>
         <p:spPr/>
@@ -2815,7 +2833,7 @@
 </file>
 
 <file path=ppt/notesSlides/notesSlide9.xml><?xml version="1.0" encoding="utf-8"?>
-<p:notes xmlns:a="http://schemas.openxmlformats.org/drawingml/2006/main" xmlns:p="http://schemas.openxmlformats.org/presentationml/2006/main" xmlns:r="http://schemas.openxmlformats.org/officeDocument/2006/relationships">
+<p:notes xmlns:a="http://schemas.openxmlformats.org/drawingml/2006/main" xmlns:r="http://schemas.openxmlformats.org/officeDocument/2006/relationships" xmlns:p="http://schemas.openxmlformats.org/presentationml/2006/main">
   <p:cSld>
     <p:spTree>
       <p:nvGrpSpPr>
@@ -2835,7 +2853,7 @@
         <p:nvSpPr>
           <p:cNvPr id="2" name="Slide Image Placeholder 1"/>
           <p:cNvSpPr>
-            <a:spLocks noGrp="1"/>
+            <a:spLocks noGrp="1" noRot="1" noChangeAspect="1"/>
           </p:cNvSpPr>
           <p:nvPr>
             <p:ph type="sldImg" idx="2"/>
@@ -2850,7 +2868,7 @@
             <a:spLocks noGrp="1"/>
           </p:cNvSpPr>
           <p:nvPr>
-            <p:ph type="body" idx="3" sz="quarter"/>
+            <p:ph type="body" sz="quarter" idx="3"/>
           </p:nvPr>
         </p:nvSpPr>
         <p:spPr/>
@@ -2871,7 +2889,7 @@
             <a:spLocks noGrp="1"/>
           </p:cNvSpPr>
           <p:nvPr>
-            <p:ph type="sldNum" idx="5" sz="quarter"/>
+            <p:ph type="sldNum" sz="quarter" idx="5"/>
           </p:nvPr>
         </p:nvSpPr>
         <p:spPr/>
@@ -2922,10 +2940,9 @@
           <a:lstStyle/>
           <a:p>
             <a:r>
-              <a:rPr lang="en-US" smtClean="0"/>
+              <a:rPr lang="en-US"/>
               <a:t>Click to edit Master title style</a:t>
             </a:r>
-            <a:endParaRPr lang="en-US"/>
           </a:p>
         </p:txBody>
       </p:sp>
@@ -3041,10 +3058,9 @@
           </a:lstStyle>
           <a:p>
             <a:r>
-              <a:rPr lang="en-US" smtClean="0"/>
+              <a:rPr lang="en-US"/>
               <a:t>Click to edit Master subtitle style</a:t>
             </a:r>
-            <a:endParaRPr lang="en-US"/>
           </a:p>
         </p:txBody>
       </p:sp>
@@ -3065,7 +3081,7 @@
           <a:p>
             <a:fld id="{5BCAD085-E8A6-8845-BD4E-CB4CCA059FC4}" type="datetimeFigureOut">
               <a:rPr lang="en-US" smtClean="0"/>
-              <a:t>1/27/13</a:t>
+              <a:t>10/29/2026</a:t>
             </a:fld>
             <a:endParaRPr lang="en-US"/>
           </a:p>
@@ -3159,10 +3175,9 @@
           <a:lstStyle/>
           <a:p>
             <a:r>
-              <a:rPr lang="en-US" smtClean="0"/>
+              <a:rPr lang="en-US"/>
               <a:t>Click to edit Master title style</a:t>
             </a:r>
-            <a:endParaRPr lang="en-US"/>
           </a:p>
         </p:txBody>
       </p:sp>
@@ -3183,38 +3198,37 @@
           <a:p>
             <a:pPr lvl="0"/>
             <a:r>
-              <a:rPr lang="en-US" smtClean="0"/>
+              <a:rPr lang="en-US"/>
               <a:t>Click to edit Master text styles</a:t>
             </a:r>
           </a:p>
           <a:p>
             <a:pPr lvl="1"/>
             <a:r>
-              <a:rPr lang="en-US" smtClean="0"/>
+              <a:rPr lang="en-US"/>
               <a:t>Second level</a:t>
             </a:r>
           </a:p>
           <a:p>
             <a:pPr lvl="2"/>
             <a:r>
-              <a:rPr lang="en-US" smtClean="0"/>
+              <a:rPr lang="en-US"/>
               <a:t>Third level</a:t>
             </a:r>
           </a:p>
           <a:p>
             <a:pPr lvl="3"/>
             <a:r>
-              <a:rPr lang="en-US" smtClean="0"/>
+              <a:rPr lang="en-US"/>
               <a:t>Fourth level</a:t>
             </a:r>
           </a:p>
           <a:p>
             <a:pPr lvl="4"/>
             <a:r>
-              <a:rPr lang="en-US" smtClean="0"/>
+              <a:rPr lang="en-US"/>
               <a:t>Fifth level</a:t>
             </a:r>
-            <a:endParaRPr lang="en-US"/>
           </a:p>
         </p:txBody>
       </p:sp>
@@ -3235,7 +3249,7 @@
           <a:p>
             <a:fld id="{5BCAD085-E8A6-8845-BD4E-CB4CCA059FC4}" type="datetimeFigureOut">
               <a:rPr lang="en-US" smtClean="0"/>
-              <a:t>1/27/13</a:t>
+              <a:t>10/29/2026</a:t>
             </a:fld>
             <a:endParaRPr lang="en-US"/>
           </a:p>
@@ -3334,10 +3348,9 @@
           <a:lstStyle/>
           <a:p>
             <a:r>
-              <a:rPr lang="en-US" smtClean="0"/>
+              <a:rPr lang="en-US"/>
               <a:t>Click to edit Master title style</a:t>
             </a:r>
-            <a:endParaRPr lang="en-US"/>
           </a:p>
         </p:txBody>
       </p:sp>
@@ -3363,38 +3376,37 @@
           <a:p>
             <a:pPr lvl="0"/>
             <a:r>
-              <a:rPr lang="en-US" smtClean="0"/>
+              <a:rPr lang="en-US"/>
               <a:t>Click to edit Master text styles</a:t>
             </a:r>
           </a:p>
           <a:p>
             <a:pPr lvl="1"/>
             <a:r>
-              <a:rPr lang="en-US" smtClean="0"/>
+              <a:rPr lang="en-US"/>
               <a:t>Second level</a:t>
             </a:r>
           </a:p>
           <a:p>
             <a:pPr lvl="2"/>
             <a:r>
-              <a:rPr lang="en-US" smtClean="0"/>
+              <a:rPr lang="en-US"/>
               <a:t>Third level</a:t>
             </a:r>
           </a:p>
           <a:p>
             <a:pPr lvl="3"/>
             <a:r>
-              <a:rPr lang="en-US" smtClean="0"/>
+              <a:rPr lang="en-US"/>
               <a:t>Fourth level</a:t>
             </a:r>
           </a:p>
           <a:p>
             <a:pPr lvl="4"/>
             <a:r>
-              <a:rPr lang="en-US" smtClean="0"/>
+              <a:rPr lang="en-US"/>
               <a:t>Fifth level</a:t>
             </a:r>
-            <a:endParaRPr lang="en-US"/>
           </a:p>
         </p:txBody>
       </p:sp>
@@ -3415,7 +3427,7 @@
           <a:p>
             <a:fld id="{5BCAD085-E8A6-8845-BD4E-CB4CCA059FC4}" type="datetimeFigureOut">
               <a:rPr lang="en-US" smtClean="0"/>
-              <a:t>1/27/13</a:t>
+              <a:t>10/29/2026</a:t>
             </a:fld>
             <a:endParaRPr lang="en-US"/>
           </a:p>
@@ -3509,10 +3521,9 @@
           <a:lstStyle/>
           <a:p>
             <a:r>
-              <a:rPr lang="en-US" smtClean="0"/>
+              <a:rPr lang="en-US"/>
               <a:t>Click to edit Master title style</a:t>
             </a:r>
-            <a:endParaRPr lang="en-US"/>
           </a:p>
         </p:txBody>
       </p:sp>
@@ -3533,38 +3544,37 @@
           <a:p>
             <a:pPr lvl="0"/>
             <a:r>
-              <a:rPr lang="en-US" smtClean="0"/>
+              <a:rPr lang="en-US"/>
               <a:t>Click to edit Master text styles</a:t>
             </a:r>
           </a:p>
           <a:p>
             <a:pPr lvl="1"/>
             <a:r>
-              <a:rPr lang="en-US" smtClean="0"/>
+              <a:rPr lang="en-US"/>
               <a:t>Second level</a:t>
             </a:r>
           </a:p>
           <a:p>
             <a:pPr lvl="2"/>
             <a:r>
-              <a:rPr lang="en-US" smtClean="0"/>
+              <a:rPr lang="en-US"/>
               <a:t>Third level</a:t>
             </a:r>
           </a:p>
           <a:p>
             <a:pPr lvl="3"/>
             <a:r>
-              <a:rPr lang="en-US" smtClean="0"/>
+              <a:rPr lang="en-US"/>
               <a:t>Fourth level</a:t>
             </a:r>
           </a:p>
           <a:p>
             <a:pPr lvl="4"/>
             <a:r>
-              <a:rPr lang="en-US" smtClean="0"/>
+              <a:rPr lang="en-US"/>
               <a:t>Fifth level</a:t>
             </a:r>
-            <a:endParaRPr lang="en-US"/>
           </a:p>
         </p:txBody>
       </p:sp>
@@ -3585,7 +3595,7 @@
           <a:p>
             <a:fld id="{5BCAD085-E8A6-8845-BD4E-CB4CCA059FC4}" type="datetimeFigureOut">
               <a:rPr lang="en-US" smtClean="0"/>
-              <a:t>1/27/13</a:t>
+              <a:t>10/29/2026</a:t>
             </a:fld>
             <a:endParaRPr lang="en-US"/>
           </a:p>
@@ -3688,10 +3698,9 @@
           </a:lstStyle>
           <a:p>
             <a:r>
-              <a:rPr lang="en-US" smtClean="0"/>
+              <a:rPr lang="en-US"/>
               <a:t>Click to edit Master title style</a:t>
             </a:r>
-            <a:endParaRPr lang="en-US"/>
           </a:p>
         </p:txBody>
       </p:sp>
@@ -3808,7 +3817,7 @@
           <a:p>
             <a:pPr lvl="0"/>
             <a:r>
-              <a:rPr lang="en-US" smtClean="0"/>
+              <a:rPr lang="en-US"/>
               <a:t>Click to edit Master text styles</a:t>
             </a:r>
           </a:p>
@@ -3831,7 +3840,7 @@
           <a:p>
             <a:fld id="{5BCAD085-E8A6-8845-BD4E-CB4CCA059FC4}" type="datetimeFigureOut">
               <a:rPr lang="en-US" smtClean="0"/>
-              <a:t>1/27/13</a:t>
+              <a:t>10/29/2026</a:t>
             </a:fld>
             <a:endParaRPr lang="en-US"/>
           </a:p>
@@ -3925,10 +3934,9 @@
           <a:lstStyle/>
           <a:p>
             <a:r>
-              <a:rPr lang="en-US" smtClean="0"/>
+              <a:rPr lang="en-US"/>
               <a:t>Click to edit Master title style</a:t>
             </a:r>
-            <a:endParaRPr lang="en-US"/>
           </a:p>
         </p:txBody>
       </p:sp>
@@ -3982,38 +3990,37 @@
           <a:p>
             <a:pPr lvl="0"/>
             <a:r>
-              <a:rPr lang="en-US" smtClean="0"/>
+              <a:rPr lang="en-US"/>
               <a:t>Click to edit Master text styles</a:t>
             </a:r>
           </a:p>
           <a:p>
             <a:pPr lvl="1"/>
             <a:r>
-              <a:rPr lang="en-US" smtClean="0"/>
+              <a:rPr lang="en-US"/>
               <a:t>Second level</a:t>
             </a:r>
           </a:p>
           <a:p>
             <a:pPr lvl="2"/>
             <a:r>
-              <a:rPr lang="en-US" smtClean="0"/>
+              <a:rPr lang="en-US"/>
               <a:t>Third level</a:t>
             </a:r>
           </a:p>
           <a:p>
             <a:pPr lvl="3"/>
             <a:r>
-              <a:rPr lang="en-US" smtClean="0"/>
+              <a:rPr lang="en-US"/>
               <a:t>Fourth level</a:t>
             </a:r>
           </a:p>
           <a:p>
             <a:pPr lvl="4"/>
             <a:r>
-              <a:rPr lang="en-US" smtClean="0"/>
+              <a:rPr lang="en-US"/>
               <a:t>Fifth level</a:t>
             </a:r>
-            <a:endParaRPr lang="en-US"/>
           </a:p>
         </p:txBody>
       </p:sp>
@@ -4067,38 +4074,37 @@
           <a:p>
             <a:pPr lvl="0"/>
             <a:r>
-              <a:rPr lang="en-US" smtClean="0"/>
+              <a:rPr lang="en-US"/>
               <a:t>Click to edit Master text styles</a:t>
             </a:r>
           </a:p>
           <a:p>
             <a:pPr lvl="1"/>
             <a:r>
-              <a:rPr lang="en-US" smtClean="0"/>
+              <a:rPr lang="en-US"/>
               <a:t>Second level</a:t>
             </a:r>
           </a:p>
           <a:p>
             <a:pPr lvl="2"/>
             <a:r>
-              <a:rPr lang="en-US" smtClean="0"/>
+              <a:rPr lang="en-US"/>
               <a:t>Third level</a:t>
             </a:r>
           </a:p>
           <a:p>
             <a:pPr lvl="3"/>
             <a:r>
-              <a:rPr lang="en-US" smtClean="0"/>
+              <a:rPr lang="en-US"/>
               <a:t>Fourth level</a:t>
             </a:r>
           </a:p>
           <a:p>
             <a:pPr lvl="4"/>
             <a:r>
-              <a:rPr lang="en-US" smtClean="0"/>
+              <a:rPr lang="en-US"/>
               <a:t>Fifth level</a:t>
             </a:r>
-            <a:endParaRPr lang="en-US"/>
           </a:p>
         </p:txBody>
       </p:sp>
@@ -4119,7 +4125,7 @@
           <a:p>
             <a:fld id="{5BCAD085-E8A6-8845-BD4E-CB4CCA059FC4}" type="datetimeFigureOut">
               <a:rPr lang="en-US" smtClean="0"/>
-              <a:t>1/27/13</a:t>
+              <a:t>10/29/2026</a:t>
             </a:fld>
             <a:endParaRPr lang="en-US"/>
           </a:p>
@@ -4217,10 +4223,9 @@
           </a:lstStyle>
           <a:p>
             <a:r>
-              <a:rPr lang="en-US" smtClean="0"/>
+              <a:rPr lang="en-US"/>
               <a:t>Click to edit Master title style</a:t>
             </a:r>
-            <a:endParaRPr lang="en-US"/>
           </a:p>
         </p:txBody>
       </p:sp>
@@ -4283,7 +4288,7 @@
           <a:p>
             <a:pPr lvl="0"/>
             <a:r>
-              <a:rPr lang="en-US" smtClean="0"/>
+              <a:rPr lang="en-US"/>
               <a:t>Click to edit Master text styles</a:t>
             </a:r>
           </a:p>
@@ -4339,38 +4344,37 @@
           <a:p>
             <a:pPr lvl="0"/>
             <a:r>
-              <a:rPr lang="en-US" smtClean="0"/>
+              <a:rPr lang="en-US"/>
               <a:t>Click to edit Master text styles</a:t>
             </a:r>
           </a:p>
           <a:p>
             <a:pPr lvl="1"/>
             <a:r>
-              <a:rPr lang="en-US" smtClean="0"/>
+              <a:rPr lang="en-US"/>
               <a:t>Second level</a:t>
             </a:r>
           </a:p>
           <a:p>
             <a:pPr lvl="2"/>
             <a:r>
-              <a:rPr lang="en-US" smtClean="0"/>
+              <a:rPr lang="en-US"/>
               <a:t>Third level</a:t>
             </a:r>
           </a:p>
           <a:p>
             <a:pPr lvl="3"/>
             <a:r>
-              <a:rPr lang="en-US" smtClean="0"/>
+              <a:rPr lang="en-US"/>
               <a:t>Fourth level</a:t>
             </a:r>
           </a:p>
           <a:p>
             <a:pPr lvl="4"/>
             <a:r>
-              <a:rPr lang="en-US" smtClean="0"/>
+              <a:rPr lang="en-US"/>
               <a:t>Fifth level</a:t>
             </a:r>
-            <a:endParaRPr lang="en-US"/>
           </a:p>
         </p:txBody>
       </p:sp>
@@ -4433,7 +4437,7 @@
           <a:p>
             <a:pPr lvl="0"/>
             <a:r>
-              <a:rPr lang="en-US" smtClean="0"/>
+              <a:rPr lang="en-US"/>
               <a:t>Click to edit Master text styles</a:t>
             </a:r>
           </a:p>
@@ -4489,38 +4493,37 @@
           <a:p>
             <a:pPr lvl="0"/>
             <a:r>
-              <a:rPr lang="en-US" smtClean="0"/>
+              <a:rPr lang="en-US"/>
               <a:t>Click to edit Master text styles</a:t>
             </a:r>
           </a:p>
           <a:p>
             <a:pPr lvl="1"/>
             <a:r>
-              <a:rPr lang="en-US" smtClean="0"/>
+              <a:rPr lang="en-US"/>
               <a:t>Second level</a:t>
             </a:r>
           </a:p>
           <a:p>
             <a:pPr lvl="2"/>
             <a:r>
-              <a:rPr lang="en-US" smtClean="0"/>
+              <a:rPr lang="en-US"/>
               <a:t>Third level</a:t>
             </a:r>
           </a:p>
           <a:p>
             <a:pPr lvl="3"/>
             <a:r>
-              <a:rPr lang="en-US" smtClean="0"/>
+              <a:rPr lang="en-US"/>
               <a:t>Fourth level</a:t>
             </a:r>
           </a:p>
           <a:p>
             <a:pPr lvl="4"/>
             <a:r>
-              <a:rPr lang="en-US" smtClean="0"/>
+              <a:rPr lang="en-US"/>
               <a:t>Fifth level</a:t>
             </a:r>
-            <a:endParaRPr lang="en-US"/>
           </a:p>
         </p:txBody>
       </p:sp>
@@ -4541,7 +4544,7 @@
           <a:p>
             <a:fld id="{5BCAD085-E8A6-8845-BD4E-CB4CCA059FC4}" type="datetimeFigureOut">
               <a:rPr lang="en-US" smtClean="0"/>
-              <a:t>1/27/13</a:t>
+              <a:t>10/29/2026</a:t>
             </a:fld>
             <a:endParaRPr lang="en-US"/>
           </a:p>
@@ -4635,10 +4638,9 @@
           <a:lstStyle/>
           <a:p>
             <a:r>
-              <a:rPr lang="en-US" smtClean="0"/>
+              <a:rPr lang="en-US"/>
               <a:t>Click to edit Master title style</a:t>
             </a:r>
-            <a:endParaRPr lang="en-US"/>
           </a:p>
         </p:txBody>
       </p:sp>
@@ -4659,7 +4661,7 @@
           <a:p>
             <a:fld id="{5BCAD085-E8A6-8845-BD4E-CB4CCA059FC4}" type="datetimeFigureOut">
               <a:rPr lang="en-US" smtClean="0"/>
-              <a:t>1/27/13</a:t>
+              <a:t>10/29/2026</a:t>
             </a:fld>
             <a:endParaRPr lang="en-US"/>
           </a:p>
@@ -4754,7 +4756,7 @@
           <a:p>
             <a:fld id="{5BCAD085-E8A6-8845-BD4E-CB4CCA059FC4}" type="datetimeFigureOut">
               <a:rPr lang="en-US" smtClean="0"/>
-              <a:t>1/27/13</a:t>
+              <a:t>10/29/2026</a:t>
             </a:fld>
             <a:endParaRPr lang="en-US"/>
           </a:p>
@@ -4857,10 +4859,9 @@
           </a:lstStyle>
           <a:p>
             <a:r>
-              <a:rPr lang="en-US" smtClean="0"/>
+              <a:rPr lang="en-US"/>
               <a:t>Click to edit Master title style</a:t>
             </a:r>
-            <a:endParaRPr lang="en-US"/>
           </a:p>
         </p:txBody>
       </p:sp>
@@ -4914,38 +4915,37 @@
           <a:p>
             <a:pPr lvl="0"/>
             <a:r>
-              <a:rPr lang="en-US" smtClean="0"/>
+              <a:rPr lang="en-US"/>
               <a:t>Click to edit Master text styles</a:t>
             </a:r>
           </a:p>
           <a:p>
             <a:pPr lvl="1"/>
             <a:r>
-              <a:rPr lang="en-US" smtClean="0"/>
+              <a:rPr lang="en-US"/>
               <a:t>Second level</a:t>
             </a:r>
           </a:p>
           <a:p>
             <a:pPr lvl="2"/>
             <a:r>
-              <a:rPr lang="en-US" smtClean="0"/>
+              <a:rPr lang="en-US"/>
               <a:t>Third level</a:t>
             </a:r>
           </a:p>
           <a:p>
             <a:pPr lvl="3"/>
             <a:r>
-              <a:rPr lang="en-US" smtClean="0"/>
+              <a:rPr lang="en-US"/>
               <a:t>Fourth level</a:t>
             </a:r>
           </a:p>
           <a:p>
             <a:pPr lvl="4"/>
             <a:r>
-              <a:rPr lang="en-US" smtClean="0"/>
+              <a:rPr lang="en-US"/>
               <a:t>Fifth level</a:t>
             </a:r>
-            <a:endParaRPr lang="en-US"/>
           </a:p>
         </p:txBody>
       </p:sp>
@@ -5008,7 +5008,7 @@
           <a:p>
             <a:pPr lvl="0"/>
             <a:r>
-              <a:rPr lang="en-US" smtClean="0"/>
+              <a:rPr lang="en-US"/>
               <a:t>Click to edit Master text styles</a:t>
             </a:r>
           </a:p>
@@ -5031,7 +5031,7 @@
           <a:p>
             <a:fld id="{5BCAD085-E8A6-8845-BD4E-CB4CCA059FC4}" type="datetimeFigureOut">
               <a:rPr lang="en-US" smtClean="0"/>
-              <a:t>1/27/13</a:t>
+              <a:t>10/29/2026</a:t>
             </a:fld>
             <a:endParaRPr lang="en-US"/>
           </a:p>
@@ -5134,10 +5134,9 @@
           </a:lstStyle>
           <a:p>
             <a:r>
-              <a:rPr lang="en-US" smtClean="0"/>
+              <a:rPr lang="en-US"/>
               <a:t>Click to edit Master title style</a:t>
             </a:r>
-            <a:endParaRPr lang="en-US"/>
           </a:p>
         </p:txBody>
       </p:sp>
@@ -5261,7 +5260,7 @@
           <a:p>
             <a:pPr lvl="0"/>
             <a:r>
-              <a:rPr lang="en-US" smtClean="0"/>
+              <a:rPr lang="en-US"/>
               <a:t>Click to edit Master text styles</a:t>
             </a:r>
           </a:p>
@@ -5284,7 +5283,7 @@
           <a:p>
             <a:fld id="{5BCAD085-E8A6-8845-BD4E-CB4CCA059FC4}" type="datetimeFigureOut">
               <a:rPr lang="en-US" smtClean="0"/>
-              <a:t>1/27/13</a:t>
+              <a:t>10/29/2026</a:t>
             </a:fld>
             <a:endParaRPr lang="en-US"/>
           </a:p>
@@ -5393,10 +5392,9 @@
           <a:lstStyle/>
           <a:p>
             <a:r>
-              <a:rPr lang="en-US" smtClean="0"/>
+              <a:rPr lang="en-US"/>
               <a:t>Click to edit Master title style</a:t>
             </a:r>
-            <a:endParaRPr lang="en-US"/>
           </a:p>
         </p:txBody>
       </p:sp>
@@ -5427,38 +5425,37 @@
           <a:p>
             <a:pPr lvl="0"/>
             <a:r>
-              <a:rPr lang="en-US" smtClean="0"/>
+              <a:rPr lang="en-US"/>
               <a:t>Click to edit Master text styles</a:t>
             </a:r>
           </a:p>
           <a:p>
             <a:pPr lvl="1"/>
             <a:r>
-              <a:rPr lang="en-US" smtClean="0"/>
+              <a:rPr lang="en-US"/>
               <a:t>Second level</a:t>
             </a:r>
           </a:p>
           <a:p>
             <a:pPr lvl="2"/>
             <a:r>
-              <a:rPr lang="en-US" smtClean="0"/>
+              <a:rPr lang="en-US"/>
               <a:t>Third level</a:t>
             </a:r>
           </a:p>
           <a:p>
             <a:pPr lvl="3"/>
             <a:r>
-              <a:rPr lang="en-US" smtClean="0"/>
+              <a:rPr lang="en-US"/>
               <a:t>Fourth level</a:t>
             </a:r>
           </a:p>
           <a:p>
             <a:pPr lvl="4"/>
             <a:r>
-              <a:rPr lang="en-US" smtClean="0"/>
+              <a:rPr lang="en-US"/>
               <a:t>Fifth level</a:t>
             </a:r>
-            <a:endParaRPr lang="en-US"/>
           </a:p>
         </p:txBody>
       </p:sp>
@@ -5497,7 +5494,7 @@
           <a:p>
             <a:fld id="{5BCAD085-E8A6-8845-BD4E-CB4CCA059FC4}" type="datetimeFigureOut">
               <a:rPr lang="en-US" smtClean="0"/>
-              <a:t>1/27/13</a:t>
+              <a:t>10/29/2026</a:t>
             </a:fld>
             <a:endParaRPr lang="en-US"/>
           </a:p>
@@ -5856,7 +5853,7 @@
 </file>
 
 <file path=ppt/slides/slide1.xml><?xml version="1.0" encoding="utf-8"?>
-<p:sld xmlns:a="http://schemas.openxmlformats.org/drawingml/2006/main" xmlns:p="http://schemas.openxmlformats.org/presentationml/2006/main" xmlns:r="http://schemas.openxmlformats.org/officeDocument/2006/relationships">
+<p:sld xmlns:a="http://schemas.openxmlformats.org/drawingml/2006/main" xmlns:r="http://schemas.openxmlformats.org/officeDocument/2006/relationships" xmlns:p="http://schemas.openxmlformats.org/presentationml/2006/main">
   <p:cSld>
     <p:spTree>
       <p:nvGrpSpPr>
@@ -5864,7 +5861,14 @@
         <p:cNvGrpSpPr/>
         <p:nvPr/>
       </p:nvGrpSpPr>
-      <p:grpSpPr/>
+      <p:grpSpPr>
+        <a:xfrm>
+          <a:off x="0" y="0"/>
+          <a:ext cx="0" cy="0"/>
+          <a:chOff x="0" y="0"/>
+          <a:chExt cx="0" cy="0"/>
+        </a:xfrm>
+      </p:grpSpPr>
       <p:sp>
         <p:nvSpPr>
           <p:cNvPr id="2" name="Rectangle 1"/>
@@ -5906,6 +5910,7 @@
           <a:lstStyle/>
           <a:p>
             <a:pPr algn="ctr"/>
+            <a:endParaRPr/>
           </a:p>
         </p:txBody>
       </p:sp>
@@ -5950,6 +5955,7 @@
           <a:lstStyle/>
           <a:p>
             <a:pPr algn="ctr"/>
+            <a:endParaRPr/>
           </a:p>
         </p:txBody>
       </p:sp>
@@ -5994,6 +6000,7 @@
           <a:lstStyle/>
           <a:p>
             <a:pPr algn="ctr"/>
+            <a:endParaRPr/>
           </a:p>
         </p:txBody>
       </p:sp>
@@ -6045,7 +6052,7 @@
         <p:spPr>
           <a:xfrm>
             <a:off x="731520" y="2377440"/>
-            <a:ext cx="10698480" cy="1554480"/>
+            <a:ext cx="10698480" cy="615553"/>
           </a:xfrm>
           <a:prstGeom prst="rect">
             <a:avLst/>
@@ -6064,14 +6071,29 @@
               </a:spcAft>
             </a:pPr>
             <a:r>
-              <a:rPr sz="3400" b="1">
+              <a:rPr sz="3400" b="1" dirty="0">
                 <a:solidFill>
                   <a:srgbClr val="C0392B"/>
                 </a:solidFill>
                 <a:latin typeface="맑은 고딕"/>
               </a:rPr>
-              <a:t>RAC 개요와</a:t>
-            </a:r>
+              <a:t>RAC </a:t>
+            </a:r>
+            <a:r>
+              <a:rPr sz="3400" b="1" dirty="0" err="1">
+                <a:solidFill>
+                  <a:srgbClr val="C0392B"/>
+                </a:solidFill>
+                <a:latin typeface="맑은 고딕"/>
+              </a:rPr>
+              <a:t>개요</a:t>
+            </a:r>
+            <a:endParaRPr sz="3400" b="1" dirty="0">
+              <a:solidFill>
+                <a:srgbClr val="C0392B"/>
+              </a:solidFill>
+              <a:latin typeface="맑은 고딕"/>
+            </a:endParaRPr>
           </a:p>
         </p:txBody>
       </p:sp>
@@ -6162,7 +6184,7 @@
 </file>
 
 <file path=ppt/slides/slide10.xml><?xml version="1.0" encoding="utf-8"?>
-<p:sld xmlns:a="http://schemas.openxmlformats.org/drawingml/2006/main" xmlns:p="http://schemas.openxmlformats.org/presentationml/2006/main" xmlns:r="http://schemas.openxmlformats.org/officeDocument/2006/relationships">
+<p:sld xmlns:a="http://schemas.openxmlformats.org/drawingml/2006/main" xmlns:r="http://schemas.openxmlformats.org/officeDocument/2006/relationships" xmlns:p="http://schemas.openxmlformats.org/presentationml/2006/main">
   <p:cSld>
     <p:spTree>
       <p:nvGrpSpPr>
@@ -6170,7 +6192,14 @@
         <p:cNvGrpSpPr/>
         <p:nvPr/>
       </p:nvGrpSpPr>
-      <p:grpSpPr/>
+      <p:grpSpPr>
+        <a:xfrm>
+          <a:off x="0" y="0"/>
+          <a:ext cx="0" cy="0"/>
+          <a:chOff x="0" y="0"/>
+          <a:chExt cx="0" cy="0"/>
+        </a:xfrm>
+      </p:grpSpPr>
       <p:sp>
         <p:nvSpPr>
           <p:cNvPr id="2" name="Rectangle 1"/>
@@ -6212,6 +6241,7 @@
           <a:lstStyle/>
           <a:p>
             <a:pPr algn="ctr"/>
+            <a:endParaRPr/>
           </a:p>
         </p:txBody>
       </p:sp>
@@ -6405,7 +6435,7 @@
 </file>
 
 <file path=ppt/slides/slide11.xml><?xml version="1.0" encoding="utf-8"?>
-<p:sld xmlns:a="http://schemas.openxmlformats.org/drawingml/2006/main" xmlns:p="http://schemas.openxmlformats.org/presentationml/2006/main" xmlns:r="http://schemas.openxmlformats.org/officeDocument/2006/relationships">
+<p:sld xmlns:a="http://schemas.openxmlformats.org/drawingml/2006/main" xmlns:r="http://schemas.openxmlformats.org/officeDocument/2006/relationships" xmlns:p="http://schemas.openxmlformats.org/presentationml/2006/main">
   <p:cSld>
     <p:spTree>
       <p:nvGrpSpPr>
@@ -6413,7 +6443,14 @@
         <p:cNvGrpSpPr/>
         <p:nvPr/>
       </p:nvGrpSpPr>
-      <p:grpSpPr/>
+      <p:grpSpPr>
+        <a:xfrm>
+          <a:off x="0" y="0"/>
+          <a:ext cx="0" cy="0"/>
+          <a:chOff x="0" y="0"/>
+          <a:chExt cx="0" cy="0"/>
+        </a:xfrm>
+      </p:grpSpPr>
       <p:sp>
         <p:nvSpPr>
           <p:cNvPr id="2" name="Rectangle 1"/>
@@ -6455,6 +6492,7 @@
           <a:lstStyle/>
           <a:p>
             <a:pPr algn="ctr"/>
+            <a:endParaRPr/>
           </a:p>
         </p:txBody>
       </p:sp>
@@ -6577,6 +6615,7 @@
           <a:lstStyle/>
           <a:p>
             <a:pPr algn="ctr"/>
+            <a:endParaRPr/>
           </a:p>
         </p:txBody>
       </p:sp>
@@ -6676,7 +6715,7 @@
 </file>
 
 <file path=ppt/slides/slide12.xml><?xml version="1.0" encoding="utf-8"?>
-<p:sld xmlns:a="http://schemas.openxmlformats.org/drawingml/2006/main" xmlns:p="http://schemas.openxmlformats.org/presentationml/2006/main" xmlns:r="http://schemas.openxmlformats.org/officeDocument/2006/relationships">
+<p:sld xmlns:a="http://schemas.openxmlformats.org/drawingml/2006/main" xmlns:r="http://schemas.openxmlformats.org/officeDocument/2006/relationships" xmlns:p="http://schemas.openxmlformats.org/presentationml/2006/main">
   <p:cSld>
     <p:spTree>
       <p:nvGrpSpPr>
@@ -6684,7 +6723,14 @@
         <p:cNvGrpSpPr/>
         <p:nvPr/>
       </p:nvGrpSpPr>
-      <p:grpSpPr/>
+      <p:grpSpPr>
+        <a:xfrm>
+          <a:off x="0" y="0"/>
+          <a:ext cx="0" cy="0"/>
+          <a:chOff x="0" y="0"/>
+          <a:chExt cx="0" cy="0"/>
+        </a:xfrm>
+      </p:grpSpPr>
       <p:sp>
         <p:nvSpPr>
           <p:cNvPr id="2" name="Rectangle 1"/>
@@ -6726,6 +6772,7 @@
           <a:lstStyle/>
           <a:p>
             <a:pPr algn="ctr"/>
+            <a:endParaRPr/>
           </a:p>
         </p:txBody>
       </p:sp>
@@ -6919,7 +6966,7 @@
 </file>
 
 <file path=ppt/slides/slide13.xml><?xml version="1.0" encoding="utf-8"?>
-<p:sld xmlns:a="http://schemas.openxmlformats.org/drawingml/2006/main" xmlns:p="http://schemas.openxmlformats.org/presentationml/2006/main" xmlns:r="http://schemas.openxmlformats.org/officeDocument/2006/relationships">
+<p:sld xmlns:a="http://schemas.openxmlformats.org/drawingml/2006/main" xmlns:r="http://schemas.openxmlformats.org/officeDocument/2006/relationships" xmlns:p="http://schemas.openxmlformats.org/presentationml/2006/main">
   <p:cSld>
     <p:spTree>
       <p:nvGrpSpPr>
@@ -6927,7 +6974,14 @@
         <p:cNvGrpSpPr/>
         <p:nvPr/>
       </p:nvGrpSpPr>
-      <p:grpSpPr/>
+      <p:grpSpPr>
+        <a:xfrm>
+          <a:off x="0" y="0"/>
+          <a:ext cx="0" cy="0"/>
+          <a:chOff x="0" y="0"/>
+          <a:chExt cx="0" cy="0"/>
+        </a:xfrm>
+      </p:grpSpPr>
       <p:sp>
         <p:nvSpPr>
           <p:cNvPr id="2" name="Rectangle 1"/>
@@ -6969,6 +7023,7 @@
           <a:lstStyle/>
           <a:p>
             <a:pPr algn="ctr"/>
+            <a:endParaRPr/>
           </a:p>
         </p:txBody>
       </p:sp>
@@ -7162,7 +7217,7 @@
 </file>
 
 <file path=ppt/slides/slide14.xml><?xml version="1.0" encoding="utf-8"?>
-<p:sld xmlns:a="http://schemas.openxmlformats.org/drawingml/2006/main" xmlns:p="http://schemas.openxmlformats.org/presentationml/2006/main" xmlns:r="http://schemas.openxmlformats.org/officeDocument/2006/relationships">
+<p:sld xmlns:a="http://schemas.openxmlformats.org/drawingml/2006/main" xmlns:r="http://schemas.openxmlformats.org/officeDocument/2006/relationships" xmlns:p="http://schemas.openxmlformats.org/presentationml/2006/main">
   <p:cSld>
     <p:spTree>
       <p:nvGrpSpPr>
@@ -7170,7 +7225,14 @@
         <p:cNvGrpSpPr/>
         <p:nvPr/>
       </p:nvGrpSpPr>
-      <p:grpSpPr/>
+      <p:grpSpPr>
+        <a:xfrm>
+          <a:off x="0" y="0"/>
+          <a:ext cx="0" cy="0"/>
+          <a:chOff x="0" y="0"/>
+          <a:chExt cx="0" cy="0"/>
+        </a:xfrm>
+      </p:grpSpPr>
       <p:sp>
         <p:nvSpPr>
           <p:cNvPr id="2" name="Rectangle 1"/>
@@ -7212,6 +7274,7 @@
           <a:lstStyle/>
           <a:p>
             <a:pPr algn="ctr"/>
+            <a:endParaRPr/>
           </a:p>
         </p:txBody>
       </p:sp>
@@ -7405,7 +7468,7 @@
 </file>
 
 <file path=ppt/slides/slide15.xml><?xml version="1.0" encoding="utf-8"?>
-<p:sld xmlns:a="http://schemas.openxmlformats.org/drawingml/2006/main" xmlns:p="http://schemas.openxmlformats.org/presentationml/2006/main" xmlns:r="http://schemas.openxmlformats.org/officeDocument/2006/relationships">
+<p:sld xmlns:a="http://schemas.openxmlformats.org/drawingml/2006/main" xmlns:r="http://schemas.openxmlformats.org/officeDocument/2006/relationships" xmlns:p="http://schemas.openxmlformats.org/presentationml/2006/main">
   <p:cSld>
     <p:spTree>
       <p:nvGrpSpPr>
@@ -7413,7 +7476,14 @@
         <p:cNvGrpSpPr/>
         <p:nvPr/>
       </p:nvGrpSpPr>
-      <p:grpSpPr/>
+      <p:grpSpPr>
+        <a:xfrm>
+          <a:off x="0" y="0"/>
+          <a:ext cx="0" cy="0"/>
+          <a:chOff x="0" y="0"/>
+          <a:chExt cx="0" cy="0"/>
+        </a:xfrm>
+      </p:grpSpPr>
       <p:sp>
         <p:nvSpPr>
           <p:cNvPr id="2" name="Rectangle 1"/>
@@ -7455,6 +7525,7 @@
           <a:lstStyle/>
           <a:p>
             <a:pPr algn="ctr"/>
+            <a:endParaRPr/>
           </a:p>
         </p:txBody>
       </p:sp>
@@ -7577,6 +7648,7 @@
           <a:lstStyle/>
           <a:p>
             <a:pPr algn="ctr"/>
+            <a:endParaRPr/>
           </a:p>
         </p:txBody>
       </p:sp>
@@ -7676,7 +7748,7 @@
 </file>
 
 <file path=ppt/slides/slide16.xml><?xml version="1.0" encoding="utf-8"?>
-<p:sld xmlns:a="http://schemas.openxmlformats.org/drawingml/2006/main" xmlns:p="http://schemas.openxmlformats.org/presentationml/2006/main" xmlns:r="http://schemas.openxmlformats.org/officeDocument/2006/relationships">
+<p:sld xmlns:a="http://schemas.openxmlformats.org/drawingml/2006/main" xmlns:r="http://schemas.openxmlformats.org/officeDocument/2006/relationships" xmlns:p="http://schemas.openxmlformats.org/presentationml/2006/main">
   <p:cSld>
     <p:spTree>
       <p:nvGrpSpPr>
@@ -7684,7 +7756,14 @@
         <p:cNvGrpSpPr/>
         <p:nvPr/>
       </p:nvGrpSpPr>
-      <p:grpSpPr/>
+      <p:grpSpPr>
+        <a:xfrm>
+          <a:off x="0" y="0"/>
+          <a:ext cx="0" cy="0"/>
+          <a:chOff x="0" y="0"/>
+          <a:chExt cx="0" cy="0"/>
+        </a:xfrm>
+      </p:grpSpPr>
       <p:sp>
         <p:nvSpPr>
           <p:cNvPr id="2" name="Rectangle 1"/>
@@ -7726,6 +7805,7 @@
           <a:lstStyle/>
           <a:p>
             <a:pPr algn="ctr"/>
+            <a:endParaRPr/>
           </a:p>
         </p:txBody>
       </p:sp>
@@ -7919,7 +7999,7 @@
 </file>
 
 <file path=ppt/slides/slide17.xml><?xml version="1.0" encoding="utf-8"?>
-<p:sld xmlns:a="http://schemas.openxmlformats.org/drawingml/2006/main" xmlns:p="http://schemas.openxmlformats.org/presentationml/2006/main" xmlns:r="http://schemas.openxmlformats.org/officeDocument/2006/relationships">
+<p:sld xmlns:a="http://schemas.openxmlformats.org/drawingml/2006/main" xmlns:r="http://schemas.openxmlformats.org/officeDocument/2006/relationships" xmlns:p="http://schemas.openxmlformats.org/presentationml/2006/main">
   <p:cSld>
     <p:spTree>
       <p:nvGrpSpPr>
@@ -7927,7 +8007,14 @@
         <p:cNvGrpSpPr/>
         <p:nvPr/>
       </p:nvGrpSpPr>
-      <p:grpSpPr/>
+      <p:grpSpPr>
+        <a:xfrm>
+          <a:off x="0" y="0"/>
+          <a:ext cx="0" cy="0"/>
+          <a:chOff x="0" y="0"/>
+          <a:chExt cx="0" cy="0"/>
+        </a:xfrm>
+      </p:grpSpPr>
       <p:sp>
         <p:nvSpPr>
           <p:cNvPr id="2" name="Rectangle 1"/>
@@ -7969,6 +8056,7 @@
           <a:lstStyle/>
           <a:p>
             <a:pPr algn="ctr"/>
+            <a:endParaRPr/>
           </a:p>
         </p:txBody>
       </p:sp>
@@ -8162,7 +8250,7 @@
 </file>
 
 <file path=ppt/slides/slide18.xml><?xml version="1.0" encoding="utf-8"?>
-<p:sld xmlns:a="http://schemas.openxmlformats.org/drawingml/2006/main" xmlns:p="http://schemas.openxmlformats.org/presentationml/2006/main" xmlns:r="http://schemas.openxmlformats.org/officeDocument/2006/relationships">
+<p:sld xmlns:a="http://schemas.openxmlformats.org/drawingml/2006/main" xmlns:r="http://schemas.openxmlformats.org/officeDocument/2006/relationships" xmlns:p="http://schemas.openxmlformats.org/presentationml/2006/main">
   <p:cSld>
     <p:spTree>
       <p:nvGrpSpPr>
@@ -8170,7 +8258,14 @@
         <p:cNvGrpSpPr/>
         <p:nvPr/>
       </p:nvGrpSpPr>
-      <p:grpSpPr/>
+      <p:grpSpPr>
+        <a:xfrm>
+          <a:off x="0" y="0"/>
+          <a:ext cx="0" cy="0"/>
+          <a:chOff x="0" y="0"/>
+          <a:chExt cx="0" cy="0"/>
+        </a:xfrm>
+      </p:grpSpPr>
       <p:sp>
         <p:nvSpPr>
           <p:cNvPr id="2" name="Rectangle 1"/>
@@ -8212,6 +8307,7 @@
           <a:lstStyle/>
           <a:p>
             <a:pPr algn="ctr"/>
+            <a:endParaRPr/>
           </a:p>
         </p:txBody>
       </p:sp>
@@ -8405,7 +8501,7 @@
 </file>
 
 <file path=ppt/slides/slide19.xml><?xml version="1.0" encoding="utf-8"?>
-<p:sld xmlns:a="http://schemas.openxmlformats.org/drawingml/2006/main" xmlns:p="http://schemas.openxmlformats.org/presentationml/2006/main" xmlns:r="http://schemas.openxmlformats.org/officeDocument/2006/relationships">
+<p:sld xmlns:a="http://schemas.openxmlformats.org/drawingml/2006/main" xmlns:r="http://schemas.openxmlformats.org/officeDocument/2006/relationships" xmlns:p="http://schemas.openxmlformats.org/presentationml/2006/main">
   <p:cSld>
     <p:spTree>
       <p:nvGrpSpPr>
@@ -8413,7 +8509,14 @@
         <p:cNvGrpSpPr/>
         <p:nvPr/>
       </p:nvGrpSpPr>
-      <p:grpSpPr/>
+      <p:grpSpPr>
+        <a:xfrm>
+          <a:off x="0" y="0"/>
+          <a:ext cx="0" cy="0"/>
+          <a:chOff x="0" y="0"/>
+          <a:chExt cx="0" cy="0"/>
+        </a:xfrm>
+      </p:grpSpPr>
       <p:sp>
         <p:nvSpPr>
           <p:cNvPr id="2" name="Rectangle 1"/>
@@ -8455,6 +8558,7 @@
           <a:lstStyle/>
           <a:p>
             <a:pPr algn="ctr"/>
+            <a:endParaRPr/>
           </a:p>
         </p:txBody>
       </p:sp>
@@ -8577,6 +8681,7 @@
           <a:lstStyle/>
           <a:p>
             <a:pPr algn="ctr"/>
+            <a:endParaRPr/>
           </a:p>
         </p:txBody>
       </p:sp>
@@ -8676,7 +8781,7 @@
 </file>
 
 <file path=ppt/slides/slide2.xml><?xml version="1.0" encoding="utf-8"?>
-<p:sld xmlns:a="http://schemas.openxmlformats.org/drawingml/2006/main" xmlns:p="http://schemas.openxmlformats.org/presentationml/2006/main" xmlns:r="http://schemas.openxmlformats.org/officeDocument/2006/relationships">
+<p:sld xmlns:a="http://schemas.openxmlformats.org/drawingml/2006/main" xmlns:r="http://schemas.openxmlformats.org/officeDocument/2006/relationships" xmlns:p="http://schemas.openxmlformats.org/presentationml/2006/main">
   <p:cSld>
     <p:spTree>
       <p:nvGrpSpPr>
@@ -8684,7 +8789,14 @@
         <p:cNvGrpSpPr/>
         <p:nvPr/>
       </p:nvGrpSpPr>
-      <p:grpSpPr/>
+      <p:grpSpPr>
+        <a:xfrm>
+          <a:off x="0" y="0"/>
+          <a:ext cx="0" cy="0"/>
+          <a:chOff x="0" y="0"/>
+          <a:chExt cx="0" cy="0"/>
+        </a:xfrm>
+      </p:grpSpPr>
       <p:sp>
         <p:nvSpPr>
           <p:cNvPr id="2" name="Rectangle 1"/>
@@ -8726,6 +8838,7 @@
           <a:lstStyle/>
           <a:p>
             <a:pPr algn="ctr"/>
+            <a:endParaRPr/>
           </a:p>
         </p:txBody>
       </p:sp>
@@ -8912,7 +9025,7 @@
 </file>
 
 <file path=ppt/slides/slide20.xml><?xml version="1.0" encoding="utf-8"?>
-<p:sld xmlns:a="http://schemas.openxmlformats.org/drawingml/2006/main" xmlns:p="http://schemas.openxmlformats.org/presentationml/2006/main" xmlns:r="http://schemas.openxmlformats.org/officeDocument/2006/relationships">
+<p:sld xmlns:a="http://schemas.openxmlformats.org/drawingml/2006/main" xmlns:r="http://schemas.openxmlformats.org/officeDocument/2006/relationships" xmlns:p="http://schemas.openxmlformats.org/presentationml/2006/main">
   <p:cSld>
     <p:spTree>
       <p:nvGrpSpPr>
@@ -8920,7 +9033,14 @@
         <p:cNvGrpSpPr/>
         <p:nvPr/>
       </p:nvGrpSpPr>
-      <p:grpSpPr/>
+      <p:grpSpPr>
+        <a:xfrm>
+          <a:off x="0" y="0"/>
+          <a:ext cx="0" cy="0"/>
+          <a:chOff x="0" y="0"/>
+          <a:chExt cx="0" cy="0"/>
+        </a:xfrm>
+      </p:grpSpPr>
       <p:sp>
         <p:nvSpPr>
           <p:cNvPr id="2" name="Rectangle 1"/>
@@ -8962,6 +9082,7 @@
           <a:lstStyle/>
           <a:p>
             <a:pPr algn="ctr"/>
+            <a:endParaRPr/>
           </a:p>
         </p:txBody>
       </p:sp>
@@ -9155,7 +9276,7 @@
 </file>
 
 <file path=ppt/slides/slide21.xml><?xml version="1.0" encoding="utf-8"?>
-<p:sld xmlns:a="http://schemas.openxmlformats.org/drawingml/2006/main" xmlns:p="http://schemas.openxmlformats.org/presentationml/2006/main" xmlns:r="http://schemas.openxmlformats.org/officeDocument/2006/relationships">
+<p:sld xmlns:a="http://schemas.openxmlformats.org/drawingml/2006/main" xmlns:r="http://schemas.openxmlformats.org/officeDocument/2006/relationships" xmlns:p="http://schemas.openxmlformats.org/presentationml/2006/main">
   <p:cSld>
     <p:spTree>
       <p:nvGrpSpPr>
@@ -9163,7 +9284,14 @@
         <p:cNvGrpSpPr/>
         <p:nvPr/>
       </p:nvGrpSpPr>
-      <p:grpSpPr/>
+      <p:grpSpPr>
+        <a:xfrm>
+          <a:off x="0" y="0"/>
+          <a:ext cx="0" cy="0"/>
+          <a:chOff x="0" y="0"/>
+          <a:chExt cx="0" cy="0"/>
+        </a:xfrm>
+      </p:grpSpPr>
       <p:sp>
         <p:nvSpPr>
           <p:cNvPr id="2" name="Rectangle 1"/>
@@ -9205,6 +9333,7 @@
           <a:lstStyle/>
           <a:p>
             <a:pPr algn="ctr"/>
+            <a:endParaRPr/>
           </a:p>
         </p:txBody>
       </p:sp>
@@ -9398,7 +9527,7 @@
 </file>
 
 <file path=ppt/slides/slide22.xml><?xml version="1.0" encoding="utf-8"?>
-<p:sld xmlns:a="http://schemas.openxmlformats.org/drawingml/2006/main" xmlns:p="http://schemas.openxmlformats.org/presentationml/2006/main" xmlns:r="http://schemas.openxmlformats.org/officeDocument/2006/relationships">
+<p:sld xmlns:a="http://schemas.openxmlformats.org/drawingml/2006/main" xmlns:r="http://schemas.openxmlformats.org/officeDocument/2006/relationships" xmlns:p="http://schemas.openxmlformats.org/presentationml/2006/main">
   <p:cSld>
     <p:spTree>
       <p:nvGrpSpPr>
@@ -9406,7 +9535,14 @@
         <p:cNvGrpSpPr/>
         <p:nvPr/>
       </p:nvGrpSpPr>
-      <p:grpSpPr/>
+      <p:grpSpPr>
+        <a:xfrm>
+          <a:off x="0" y="0"/>
+          <a:ext cx="0" cy="0"/>
+          <a:chOff x="0" y="0"/>
+          <a:chExt cx="0" cy="0"/>
+        </a:xfrm>
+      </p:grpSpPr>
       <p:sp>
         <p:nvSpPr>
           <p:cNvPr id="2" name="Rectangle 1"/>
@@ -9448,6 +9584,7 @@
           <a:lstStyle/>
           <a:p>
             <a:pPr algn="ctr"/>
+            <a:endParaRPr/>
           </a:p>
         </p:txBody>
       </p:sp>
@@ -9641,7 +9778,7 @@
 </file>
 
 <file path=ppt/slides/slide23.xml><?xml version="1.0" encoding="utf-8"?>
-<p:sld xmlns:a="http://schemas.openxmlformats.org/drawingml/2006/main" xmlns:p="http://schemas.openxmlformats.org/presentationml/2006/main" xmlns:r="http://schemas.openxmlformats.org/officeDocument/2006/relationships">
+<p:sld xmlns:a="http://schemas.openxmlformats.org/drawingml/2006/main" xmlns:r="http://schemas.openxmlformats.org/officeDocument/2006/relationships" xmlns:p="http://schemas.openxmlformats.org/presentationml/2006/main">
   <p:cSld>
     <p:spTree>
       <p:nvGrpSpPr>
@@ -9649,7 +9786,14 @@
         <p:cNvGrpSpPr/>
         <p:nvPr/>
       </p:nvGrpSpPr>
-      <p:grpSpPr/>
+      <p:grpSpPr>
+        <a:xfrm>
+          <a:off x="0" y="0"/>
+          <a:ext cx="0" cy="0"/>
+          <a:chOff x="0" y="0"/>
+          <a:chExt cx="0" cy="0"/>
+        </a:xfrm>
+      </p:grpSpPr>
       <p:sp>
         <p:nvSpPr>
           <p:cNvPr id="2" name="Rectangle 1"/>
@@ -9691,6 +9835,7 @@
           <a:lstStyle/>
           <a:p>
             <a:pPr algn="ctr"/>
+            <a:endParaRPr/>
           </a:p>
         </p:txBody>
       </p:sp>
@@ -9884,7 +10029,7 @@
 </file>
 
 <file path=ppt/slides/slide24.xml><?xml version="1.0" encoding="utf-8"?>
-<p:sld xmlns:a="http://schemas.openxmlformats.org/drawingml/2006/main" xmlns:p="http://schemas.openxmlformats.org/presentationml/2006/main" xmlns:r="http://schemas.openxmlformats.org/officeDocument/2006/relationships">
+<p:sld xmlns:a="http://schemas.openxmlformats.org/drawingml/2006/main" xmlns:r="http://schemas.openxmlformats.org/officeDocument/2006/relationships" xmlns:p="http://schemas.openxmlformats.org/presentationml/2006/main">
   <p:cSld>
     <p:spTree>
       <p:nvGrpSpPr>
@@ -9892,7 +10037,14 @@
         <p:cNvGrpSpPr/>
         <p:nvPr/>
       </p:nvGrpSpPr>
-      <p:grpSpPr/>
+      <p:grpSpPr>
+        <a:xfrm>
+          <a:off x="0" y="0"/>
+          <a:ext cx="0" cy="0"/>
+          <a:chOff x="0" y="0"/>
+          <a:chExt cx="0" cy="0"/>
+        </a:xfrm>
+      </p:grpSpPr>
       <p:sp>
         <p:nvSpPr>
           <p:cNvPr id="2" name="Rectangle 1"/>
@@ -9934,6 +10086,7 @@
           <a:lstStyle/>
           <a:p>
             <a:pPr algn="ctr"/>
+            <a:endParaRPr/>
           </a:p>
         </p:txBody>
       </p:sp>
@@ -10127,7 +10280,7 @@
 </file>
 
 <file path=ppt/slides/slide25.xml><?xml version="1.0" encoding="utf-8"?>
-<p:sld xmlns:a="http://schemas.openxmlformats.org/drawingml/2006/main" xmlns:p="http://schemas.openxmlformats.org/presentationml/2006/main" xmlns:r="http://schemas.openxmlformats.org/officeDocument/2006/relationships">
+<p:sld xmlns:a="http://schemas.openxmlformats.org/drawingml/2006/main" xmlns:r="http://schemas.openxmlformats.org/officeDocument/2006/relationships" xmlns:p="http://schemas.openxmlformats.org/presentationml/2006/main">
   <p:cSld>
     <p:spTree>
       <p:nvGrpSpPr>
@@ -10135,7 +10288,14 @@
         <p:cNvGrpSpPr/>
         <p:nvPr/>
       </p:nvGrpSpPr>
-      <p:grpSpPr/>
+      <p:grpSpPr>
+        <a:xfrm>
+          <a:off x="0" y="0"/>
+          <a:ext cx="0" cy="0"/>
+          <a:chOff x="0" y="0"/>
+          <a:chExt cx="0" cy="0"/>
+        </a:xfrm>
+      </p:grpSpPr>
       <p:sp>
         <p:nvSpPr>
           <p:cNvPr id="2" name="Rectangle 1"/>
@@ -10177,6 +10337,7 @@
           <a:lstStyle/>
           <a:p>
             <a:pPr algn="ctr"/>
+            <a:endParaRPr/>
           </a:p>
         </p:txBody>
       </p:sp>
@@ -10299,6 +10460,7 @@
           <a:lstStyle/>
           <a:p>
             <a:pPr algn="ctr"/>
+            <a:endParaRPr/>
           </a:p>
         </p:txBody>
       </p:sp>
@@ -10414,7 +10576,7 @@
 </file>
 
 <file path=ppt/slides/slide26.xml><?xml version="1.0" encoding="utf-8"?>
-<p:sld xmlns:a="http://schemas.openxmlformats.org/drawingml/2006/main" xmlns:p="http://schemas.openxmlformats.org/presentationml/2006/main" xmlns:r="http://schemas.openxmlformats.org/officeDocument/2006/relationships">
+<p:sld xmlns:a="http://schemas.openxmlformats.org/drawingml/2006/main" xmlns:r="http://schemas.openxmlformats.org/officeDocument/2006/relationships" xmlns:p="http://schemas.openxmlformats.org/presentationml/2006/main">
   <p:cSld>
     <p:spTree>
       <p:nvGrpSpPr>
@@ -10422,7 +10584,14 @@
         <p:cNvGrpSpPr/>
         <p:nvPr/>
       </p:nvGrpSpPr>
-      <p:grpSpPr/>
+      <p:grpSpPr>
+        <a:xfrm>
+          <a:off x="0" y="0"/>
+          <a:ext cx="0" cy="0"/>
+          <a:chOff x="0" y="0"/>
+          <a:chExt cx="0" cy="0"/>
+        </a:xfrm>
+      </p:grpSpPr>
       <p:sp>
         <p:nvSpPr>
           <p:cNvPr id="2" name="Rectangle 1"/>
@@ -10464,6 +10633,7 @@
           <a:lstStyle/>
           <a:p>
             <a:pPr algn="ctr"/>
+            <a:endParaRPr/>
           </a:p>
         </p:txBody>
       </p:sp>
@@ -10657,7 +10827,7 @@
 </file>
 
 <file path=ppt/slides/slide27.xml><?xml version="1.0" encoding="utf-8"?>
-<p:sld xmlns:a="http://schemas.openxmlformats.org/drawingml/2006/main" xmlns:p="http://schemas.openxmlformats.org/presentationml/2006/main" xmlns:r="http://schemas.openxmlformats.org/officeDocument/2006/relationships">
+<p:sld xmlns:a="http://schemas.openxmlformats.org/drawingml/2006/main" xmlns:r="http://schemas.openxmlformats.org/officeDocument/2006/relationships" xmlns:p="http://schemas.openxmlformats.org/presentationml/2006/main">
   <p:cSld>
     <p:spTree>
       <p:nvGrpSpPr>
@@ -10665,7 +10835,14 @@
         <p:cNvGrpSpPr/>
         <p:nvPr/>
       </p:nvGrpSpPr>
-      <p:grpSpPr/>
+      <p:grpSpPr>
+        <a:xfrm>
+          <a:off x="0" y="0"/>
+          <a:ext cx="0" cy="0"/>
+          <a:chOff x="0" y="0"/>
+          <a:chExt cx="0" cy="0"/>
+        </a:xfrm>
+      </p:grpSpPr>
       <p:sp>
         <p:nvSpPr>
           <p:cNvPr id="2" name="Rectangle 1"/>
@@ -10707,6 +10884,7 @@
           <a:lstStyle/>
           <a:p>
             <a:pPr algn="ctr"/>
+            <a:endParaRPr/>
           </a:p>
         </p:txBody>
       </p:sp>
@@ -10900,7 +11078,7 @@
 </file>
 
 <file path=ppt/slides/slide28.xml><?xml version="1.0" encoding="utf-8"?>
-<p:sld xmlns:a="http://schemas.openxmlformats.org/drawingml/2006/main" xmlns:p="http://schemas.openxmlformats.org/presentationml/2006/main" xmlns:r="http://schemas.openxmlformats.org/officeDocument/2006/relationships">
+<p:sld xmlns:a="http://schemas.openxmlformats.org/drawingml/2006/main" xmlns:r="http://schemas.openxmlformats.org/officeDocument/2006/relationships" xmlns:p="http://schemas.openxmlformats.org/presentationml/2006/main">
   <p:cSld>
     <p:spTree>
       <p:nvGrpSpPr>
@@ -10908,7 +11086,14 @@
         <p:cNvGrpSpPr/>
         <p:nvPr/>
       </p:nvGrpSpPr>
-      <p:grpSpPr/>
+      <p:grpSpPr>
+        <a:xfrm>
+          <a:off x="0" y="0"/>
+          <a:ext cx="0" cy="0"/>
+          <a:chOff x="0" y="0"/>
+          <a:chExt cx="0" cy="0"/>
+        </a:xfrm>
+      </p:grpSpPr>
       <p:sp>
         <p:nvSpPr>
           <p:cNvPr id="2" name="Rectangle 1"/>
@@ -10950,6 +11135,7 @@
           <a:lstStyle/>
           <a:p>
             <a:pPr algn="ctr"/>
+            <a:endParaRPr/>
           </a:p>
         </p:txBody>
       </p:sp>
@@ -11143,7 +11329,7 @@
 </file>
 
 <file path=ppt/slides/slide29.xml><?xml version="1.0" encoding="utf-8"?>
-<p:sld xmlns:a="http://schemas.openxmlformats.org/drawingml/2006/main" xmlns:p="http://schemas.openxmlformats.org/presentationml/2006/main" xmlns:r="http://schemas.openxmlformats.org/officeDocument/2006/relationships">
+<p:sld xmlns:a="http://schemas.openxmlformats.org/drawingml/2006/main" xmlns:r="http://schemas.openxmlformats.org/officeDocument/2006/relationships" xmlns:p="http://schemas.openxmlformats.org/presentationml/2006/main">
   <p:cSld>
     <p:spTree>
       <p:nvGrpSpPr>
@@ -11151,7 +11337,14 @@
         <p:cNvGrpSpPr/>
         <p:nvPr/>
       </p:nvGrpSpPr>
-      <p:grpSpPr/>
+      <p:grpSpPr>
+        <a:xfrm>
+          <a:off x="0" y="0"/>
+          <a:ext cx="0" cy="0"/>
+          <a:chOff x="0" y="0"/>
+          <a:chExt cx="0" cy="0"/>
+        </a:xfrm>
+      </p:grpSpPr>
       <p:sp>
         <p:nvSpPr>
           <p:cNvPr id="2" name="Rectangle 1"/>
@@ -11193,6 +11386,7 @@
           <a:lstStyle/>
           <a:p>
             <a:pPr algn="ctr"/>
+            <a:endParaRPr/>
           </a:p>
         </p:txBody>
       </p:sp>
@@ -11386,7 +11580,7 @@
 </file>
 
 <file path=ppt/slides/slide3.xml><?xml version="1.0" encoding="utf-8"?>
-<p:sld xmlns:a="http://schemas.openxmlformats.org/drawingml/2006/main" xmlns:p="http://schemas.openxmlformats.org/presentationml/2006/main" xmlns:r="http://schemas.openxmlformats.org/officeDocument/2006/relationships">
+<p:sld xmlns:a="http://schemas.openxmlformats.org/drawingml/2006/main" xmlns:r="http://schemas.openxmlformats.org/officeDocument/2006/relationships" xmlns:p="http://schemas.openxmlformats.org/presentationml/2006/main">
   <p:cSld>
     <p:spTree>
       <p:nvGrpSpPr>
@@ -11394,7 +11588,14 @@
         <p:cNvGrpSpPr/>
         <p:nvPr/>
       </p:nvGrpSpPr>
-      <p:grpSpPr/>
+      <p:grpSpPr>
+        <a:xfrm>
+          <a:off x="0" y="0"/>
+          <a:ext cx="0" cy="0"/>
+          <a:chOff x="0" y="0"/>
+          <a:chExt cx="0" cy="0"/>
+        </a:xfrm>
+      </p:grpSpPr>
       <p:sp>
         <p:nvSpPr>
           <p:cNvPr id="2" name="Rectangle 1"/>
@@ -11436,6 +11637,7 @@
           <a:lstStyle/>
           <a:p>
             <a:pPr algn="ctr"/>
+            <a:endParaRPr/>
           </a:p>
         </p:txBody>
       </p:sp>
@@ -11654,7 +11856,7 @@
 </file>
 
 <file path=ppt/slides/slide30.xml><?xml version="1.0" encoding="utf-8"?>
-<p:sld xmlns:a="http://schemas.openxmlformats.org/drawingml/2006/main" xmlns:p="http://schemas.openxmlformats.org/presentationml/2006/main" xmlns:r="http://schemas.openxmlformats.org/officeDocument/2006/relationships">
+<p:sld xmlns:a="http://schemas.openxmlformats.org/drawingml/2006/main" xmlns:r="http://schemas.openxmlformats.org/officeDocument/2006/relationships" xmlns:p="http://schemas.openxmlformats.org/presentationml/2006/main">
   <p:cSld>
     <p:spTree>
       <p:nvGrpSpPr>
@@ -11662,7 +11864,14 @@
         <p:cNvGrpSpPr/>
         <p:nvPr/>
       </p:nvGrpSpPr>
-      <p:grpSpPr/>
+      <p:grpSpPr>
+        <a:xfrm>
+          <a:off x="0" y="0"/>
+          <a:ext cx="0" cy="0"/>
+          <a:chOff x="0" y="0"/>
+          <a:chExt cx="0" cy="0"/>
+        </a:xfrm>
+      </p:grpSpPr>
       <p:sp>
         <p:nvSpPr>
           <p:cNvPr id="2" name="Rectangle 1"/>
@@ -11704,6 +11913,7 @@
           <a:lstStyle/>
           <a:p>
             <a:pPr algn="ctr"/>
+            <a:endParaRPr/>
           </a:p>
         </p:txBody>
       </p:sp>
@@ -11897,7 +12107,7 @@
 </file>
 
 <file path=ppt/slides/slide31.xml><?xml version="1.0" encoding="utf-8"?>
-<p:sld xmlns:a="http://schemas.openxmlformats.org/drawingml/2006/main" xmlns:p="http://schemas.openxmlformats.org/presentationml/2006/main" xmlns:r="http://schemas.openxmlformats.org/officeDocument/2006/relationships">
+<p:sld xmlns:a="http://schemas.openxmlformats.org/drawingml/2006/main" xmlns:r="http://schemas.openxmlformats.org/officeDocument/2006/relationships" xmlns:p="http://schemas.openxmlformats.org/presentationml/2006/main">
   <p:cSld>
     <p:spTree>
       <p:nvGrpSpPr>
@@ -11905,7 +12115,14 @@
         <p:cNvGrpSpPr/>
         <p:nvPr/>
       </p:nvGrpSpPr>
-      <p:grpSpPr/>
+      <p:grpSpPr>
+        <a:xfrm>
+          <a:off x="0" y="0"/>
+          <a:ext cx="0" cy="0"/>
+          <a:chOff x="0" y="0"/>
+          <a:chExt cx="0" cy="0"/>
+        </a:xfrm>
+      </p:grpSpPr>
       <p:sp>
         <p:nvSpPr>
           <p:cNvPr id="2" name="Rectangle 1"/>
@@ -11947,6 +12164,7 @@
           <a:lstStyle/>
           <a:p>
             <a:pPr algn="ctr"/>
+            <a:endParaRPr/>
           </a:p>
         </p:txBody>
       </p:sp>
@@ -12140,7 +12358,7 @@
 </file>
 
 <file path=ppt/slides/slide32.xml><?xml version="1.0" encoding="utf-8"?>
-<p:sld xmlns:a="http://schemas.openxmlformats.org/drawingml/2006/main" xmlns:p="http://schemas.openxmlformats.org/presentationml/2006/main" xmlns:r="http://schemas.openxmlformats.org/officeDocument/2006/relationships">
+<p:sld xmlns:a="http://schemas.openxmlformats.org/drawingml/2006/main" xmlns:r="http://schemas.openxmlformats.org/officeDocument/2006/relationships" xmlns:p="http://schemas.openxmlformats.org/presentationml/2006/main">
   <p:cSld>
     <p:spTree>
       <p:nvGrpSpPr>
@@ -12148,7 +12366,14 @@
         <p:cNvGrpSpPr/>
         <p:nvPr/>
       </p:nvGrpSpPr>
-      <p:grpSpPr/>
+      <p:grpSpPr>
+        <a:xfrm>
+          <a:off x="0" y="0"/>
+          <a:ext cx="0" cy="0"/>
+          <a:chOff x="0" y="0"/>
+          <a:chExt cx="0" cy="0"/>
+        </a:xfrm>
+      </p:grpSpPr>
       <p:sp>
         <p:nvSpPr>
           <p:cNvPr id="2" name="Rectangle 1"/>
@@ -12190,6 +12415,7 @@
           <a:lstStyle/>
           <a:p>
             <a:pPr algn="ctr"/>
+            <a:endParaRPr/>
           </a:p>
         </p:txBody>
       </p:sp>
@@ -12383,7 +12609,7 @@
 </file>
 
 <file path=ppt/slides/slide33.xml><?xml version="1.0" encoding="utf-8"?>
-<p:sld xmlns:a="http://schemas.openxmlformats.org/drawingml/2006/main" xmlns:p="http://schemas.openxmlformats.org/presentationml/2006/main" xmlns:r="http://schemas.openxmlformats.org/officeDocument/2006/relationships">
+<p:sld xmlns:a="http://schemas.openxmlformats.org/drawingml/2006/main" xmlns:r="http://schemas.openxmlformats.org/officeDocument/2006/relationships" xmlns:p="http://schemas.openxmlformats.org/presentationml/2006/main">
   <p:cSld>
     <p:spTree>
       <p:nvGrpSpPr>
@@ -12391,7 +12617,14 @@
         <p:cNvGrpSpPr/>
         <p:nvPr/>
       </p:nvGrpSpPr>
-      <p:grpSpPr/>
+      <p:grpSpPr>
+        <a:xfrm>
+          <a:off x="0" y="0"/>
+          <a:ext cx="0" cy="0"/>
+          <a:chOff x="0" y="0"/>
+          <a:chExt cx="0" cy="0"/>
+        </a:xfrm>
+      </p:grpSpPr>
       <p:sp>
         <p:nvSpPr>
           <p:cNvPr id="2" name="Rectangle 1"/>
@@ -12433,6 +12666,7 @@
           <a:lstStyle/>
           <a:p>
             <a:pPr algn="ctr"/>
+            <a:endParaRPr/>
           </a:p>
         </p:txBody>
       </p:sp>
@@ -12555,6 +12789,7 @@
           <a:lstStyle/>
           <a:p>
             <a:pPr algn="ctr"/>
+            <a:endParaRPr/>
           </a:p>
         </p:txBody>
       </p:sp>
@@ -12654,7 +12889,7 @@
 </file>
 
 <file path=ppt/slides/slide34.xml><?xml version="1.0" encoding="utf-8"?>
-<p:sld xmlns:a="http://schemas.openxmlformats.org/drawingml/2006/main" xmlns:p="http://schemas.openxmlformats.org/presentationml/2006/main" xmlns:r="http://schemas.openxmlformats.org/officeDocument/2006/relationships">
+<p:sld xmlns:a="http://schemas.openxmlformats.org/drawingml/2006/main" xmlns:r="http://schemas.openxmlformats.org/officeDocument/2006/relationships" xmlns:p="http://schemas.openxmlformats.org/presentationml/2006/main">
   <p:cSld>
     <p:spTree>
       <p:nvGrpSpPr>
@@ -12662,7 +12897,14 @@
         <p:cNvGrpSpPr/>
         <p:nvPr/>
       </p:nvGrpSpPr>
-      <p:grpSpPr/>
+      <p:grpSpPr>
+        <a:xfrm>
+          <a:off x="0" y="0"/>
+          <a:ext cx="0" cy="0"/>
+          <a:chOff x="0" y="0"/>
+          <a:chExt cx="0" cy="0"/>
+        </a:xfrm>
+      </p:grpSpPr>
       <p:sp>
         <p:nvSpPr>
           <p:cNvPr id="2" name="Rectangle 1"/>
@@ -12704,6 +12946,7 @@
           <a:lstStyle/>
           <a:p>
             <a:pPr algn="ctr"/>
+            <a:endParaRPr/>
           </a:p>
         </p:txBody>
       </p:sp>
@@ -12897,7 +13140,7 @@
 </file>
 
 <file path=ppt/slides/slide35.xml><?xml version="1.0" encoding="utf-8"?>
-<p:sld xmlns:a="http://schemas.openxmlformats.org/drawingml/2006/main" xmlns:p="http://schemas.openxmlformats.org/presentationml/2006/main" xmlns:r="http://schemas.openxmlformats.org/officeDocument/2006/relationships">
+<p:sld xmlns:a="http://schemas.openxmlformats.org/drawingml/2006/main" xmlns:r="http://schemas.openxmlformats.org/officeDocument/2006/relationships" xmlns:p="http://schemas.openxmlformats.org/presentationml/2006/main">
   <p:cSld>
     <p:spTree>
       <p:nvGrpSpPr>
@@ -12905,7 +13148,14 @@
         <p:cNvGrpSpPr/>
         <p:nvPr/>
       </p:nvGrpSpPr>
-      <p:grpSpPr/>
+      <p:grpSpPr>
+        <a:xfrm>
+          <a:off x="0" y="0"/>
+          <a:ext cx="0" cy="0"/>
+          <a:chOff x="0" y="0"/>
+          <a:chExt cx="0" cy="0"/>
+        </a:xfrm>
+      </p:grpSpPr>
       <p:sp>
         <p:nvSpPr>
           <p:cNvPr id="2" name="Rectangle 1"/>
@@ -12947,6 +13197,7 @@
           <a:lstStyle/>
           <a:p>
             <a:pPr algn="ctr"/>
+            <a:endParaRPr/>
           </a:p>
         </p:txBody>
       </p:sp>
@@ -13140,7 +13391,7 @@
 </file>
 
 <file path=ppt/slides/slide36.xml><?xml version="1.0" encoding="utf-8"?>
-<p:sld xmlns:a="http://schemas.openxmlformats.org/drawingml/2006/main" xmlns:p="http://schemas.openxmlformats.org/presentationml/2006/main" xmlns:r="http://schemas.openxmlformats.org/officeDocument/2006/relationships">
+<p:sld xmlns:a="http://schemas.openxmlformats.org/drawingml/2006/main" xmlns:r="http://schemas.openxmlformats.org/officeDocument/2006/relationships" xmlns:p="http://schemas.openxmlformats.org/presentationml/2006/main">
   <p:cSld>
     <p:spTree>
       <p:nvGrpSpPr>
@@ -13148,7 +13399,14 @@
         <p:cNvGrpSpPr/>
         <p:nvPr/>
       </p:nvGrpSpPr>
-      <p:grpSpPr/>
+      <p:grpSpPr>
+        <a:xfrm>
+          <a:off x="0" y="0"/>
+          <a:ext cx="0" cy="0"/>
+          <a:chOff x="0" y="0"/>
+          <a:chExt cx="0" cy="0"/>
+        </a:xfrm>
+      </p:grpSpPr>
       <p:sp>
         <p:nvSpPr>
           <p:cNvPr id="2" name="Rectangle 1"/>
@@ -13190,6 +13448,7 @@
           <a:lstStyle/>
           <a:p>
             <a:pPr algn="ctr"/>
+            <a:endParaRPr/>
           </a:p>
         </p:txBody>
       </p:sp>
@@ -13383,7 +13642,7 @@
 </file>
 
 <file path=ppt/slides/slide37.xml><?xml version="1.0" encoding="utf-8"?>
-<p:sld xmlns:a="http://schemas.openxmlformats.org/drawingml/2006/main" xmlns:p="http://schemas.openxmlformats.org/presentationml/2006/main" xmlns:r="http://schemas.openxmlformats.org/officeDocument/2006/relationships">
+<p:sld xmlns:a="http://schemas.openxmlformats.org/drawingml/2006/main" xmlns:r="http://schemas.openxmlformats.org/officeDocument/2006/relationships" xmlns:p="http://schemas.openxmlformats.org/presentationml/2006/main">
   <p:cSld>
     <p:spTree>
       <p:nvGrpSpPr>
@@ -13391,7 +13650,14 @@
         <p:cNvGrpSpPr/>
         <p:nvPr/>
       </p:nvGrpSpPr>
-      <p:grpSpPr/>
+      <p:grpSpPr>
+        <a:xfrm>
+          <a:off x="0" y="0"/>
+          <a:ext cx="0" cy="0"/>
+          <a:chOff x="0" y="0"/>
+          <a:chExt cx="0" cy="0"/>
+        </a:xfrm>
+      </p:grpSpPr>
       <p:sp>
         <p:nvSpPr>
           <p:cNvPr id="2" name="Rectangle 1"/>
@@ -13433,6 +13699,7 @@
           <a:lstStyle/>
           <a:p>
             <a:pPr algn="ctr"/>
+            <a:endParaRPr/>
           </a:p>
         </p:txBody>
       </p:sp>
@@ -13626,7 +13893,7 @@
 </file>
 
 <file path=ppt/slides/slide38.xml><?xml version="1.0" encoding="utf-8"?>
-<p:sld xmlns:a="http://schemas.openxmlformats.org/drawingml/2006/main" xmlns:p="http://schemas.openxmlformats.org/presentationml/2006/main" xmlns:r="http://schemas.openxmlformats.org/officeDocument/2006/relationships">
+<p:sld xmlns:a="http://schemas.openxmlformats.org/drawingml/2006/main" xmlns:r="http://schemas.openxmlformats.org/officeDocument/2006/relationships" xmlns:p="http://schemas.openxmlformats.org/presentationml/2006/main">
   <p:cSld>
     <p:spTree>
       <p:nvGrpSpPr>
@@ -13634,7 +13901,14 @@
         <p:cNvGrpSpPr/>
         <p:nvPr/>
       </p:nvGrpSpPr>
-      <p:grpSpPr/>
+      <p:grpSpPr>
+        <a:xfrm>
+          <a:off x="0" y="0"/>
+          <a:ext cx="0" cy="0"/>
+          <a:chOff x="0" y="0"/>
+          <a:chExt cx="0" cy="0"/>
+        </a:xfrm>
+      </p:grpSpPr>
       <p:sp>
         <p:nvSpPr>
           <p:cNvPr id="2" name="Rectangle 1"/>
@@ -13676,6 +13950,7 @@
           <a:lstStyle/>
           <a:p>
             <a:pPr algn="ctr"/>
+            <a:endParaRPr/>
           </a:p>
         </p:txBody>
       </p:sp>
@@ -13869,7 +14144,7 @@
 </file>
 
 <file path=ppt/slides/slide39.xml><?xml version="1.0" encoding="utf-8"?>
-<p:sld xmlns:a="http://schemas.openxmlformats.org/drawingml/2006/main" xmlns:p="http://schemas.openxmlformats.org/presentationml/2006/main" xmlns:r="http://schemas.openxmlformats.org/officeDocument/2006/relationships">
+<p:sld xmlns:a="http://schemas.openxmlformats.org/drawingml/2006/main" xmlns:r="http://schemas.openxmlformats.org/officeDocument/2006/relationships" xmlns:p="http://schemas.openxmlformats.org/presentationml/2006/main">
   <p:cSld>
     <p:spTree>
       <p:nvGrpSpPr>
@@ -13877,7 +14152,14 @@
         <p:cNvGrpSpPr/>
         <p:nvPr/>
       </p:nvGrpSpPr>
-      <p:grpSpPr/>
+      <p:grpSpPr>
+        <a:xfrm>
+          <a:off x="0" y="0"/>
+          <a:ext cx="0" cy="0"/>
+          <a:chOff x="0" y="0"/>
+          <a:chExt cx="0" cy="0"/>
+        </a:xfrm>
+      </p:grpSpPr>
       <p:sp>
         <p:nvSpPr>
           <p:cNvPr id="2" name="Rectangle 1"/>
@@ -13919,6 +14201,7 @@
           <a:lstStyle/>
           <a:p>
             <a:pPr algn="ctr"/>
+            <a:endParaRPr/>
           </a:p>
         </p:txBody>
       </p:sp>
@@ -14041,6 +14324,7 @@
           <a:lstStyle/>
           <a:p>
             <a:pPr algn="ctr"/>
+            <a:endParaRPr/>
           </a:p>
         </p:txBody>
       </p:sp>
@@ -14124,7 +14408,7 @@
 </file>
 
 <file path=ppt/slides/slide4.xml><?xml version="1.0" encoding="utf-8"?>
-<p:sld xmlns:a="http://schemas.openxmlformats.org/drawingml/2006/main" xmlns:p="http://schemas.openxmlformats.org/presentationml/2006/main" xmlns:r="http://schemas.openxmlformats.org/officeDocument/2006/relationships">
+<p:sld xmlns:a="http://schemas.openxmlformats.org/drawingml/2006/main" xmlns:r="http://schemas.openxmlformats.org/officeDocument/2006/relationships" xmlns:p="http://schemas.openxmlformats.org/presentationml/2006/main">
   <p:cSld>
     <p:spTree>
       <p:nvGrpSpPr>
@@ -14132,7 +14416,14 @@
         <p:cNvGrpSpPr/>
         <p:nvPr/>
       </p:nvGrpSpPr>
-      <p:grpSpPr/>
+      <p:grpSpPr>
+        <a:xfrm>
+          <a:off x="0" y="0"/>
+          <a:ext cx="0" cy="0"/>
+          <a:chOff x="0" y="0"/>
+          <a:chExt cx="0" cy="0"/>
+        </a:xfrm>
+      </p:grpSpPr>
       <p:sp>
         <p:nvSpPr>
           <p:cNvPr id="2" name="Rectangle 1"/>
@@ -14174,6 +14465,7 @@
           <a:lstStyle/>
           <a:p>
             <a:pPr algn="ctr"/>
+            <a:endParaRPr/>
           </a:p>
         </p:txBody>
       </p:sp>
@@ -14296,6 +14588,7 @@
           <a:lstStyle/>
           <a:p>
             <a:pPr algn="ctr"/>
+            <a:endParaRPr/>
           </a:p>
         </p:txBody>
       </p:sp>
@@ -14411,7 +14704,7 @@
 </file>
 
 <file path=ppt/slides/slide40.xml><?xml version="1.0" encoding="utf-8"?>
-<p:sld xmlns:a="http://schemas.openxmlformats.org/drawingml/2006/main" xmlns:p="http://schemas.openxmlformats.org/presentationml/2006/main" xmlns:r="http://schemas.openxmlformats.org/officeDocument/2006/relationships">
+<p:sld xmlns:a="http://schemas.openxmlformats.org/drawingml/2006/main" xmlns:r="http://schemas.openxmlformats.org/officeDocument/2006/relationships" xmlns:p="http://schemas.openxmlformats.org/presentationml/2006/main">
   <p:cSld>
     <p:spTree>
       <p:nvGrpSpPr>
@@ -14419,7 +14712,14 @@
         <p:cNvGrpSpPr/>
         <p:nvPr/>
       </p:nvGrpSpPr>
-      <p:grpSpPr/>
+      <p:grpSpPr>
+        <a:xfrm>
+          <a:off x="0" y="0"/>
+          <a:ext cx="0" cy="0"/>
+          <a:chOff x="0" y="0"/>
+          <a:chExt cx="0" cy="0"/>
+        </a:xfrm>
+      </p:grpSpPr>
       <p:sp>
         <p:nvSpPr>
           <p:cNvPr id="2" name="Rectangle 1"/>
@@ -14461,6 +14761,7 @@
           <a:lstStyle/>
           <a:p>
             <a:pPr algn="ctr"/>
+            <a:endParaRPr/>
           </a:p>
         </p:txBody>
       </p:sp>
@@ -14654,7 +14955,7 @@
 </file>
 
 <file path=ppt/slides/slide41.xml><?xml version="1.0" encoding="utf-8"?>
-<p:sld xmlns:a="http://schemas.openxmlformats.org/drawingml/2006/main" xmlns:p="http://schemas.openxmlformats.org/presentationml/2006/main" xmlns:r="http://schemas.openxmlformats.org/officeDocument/2006/relationships">
+<p:sld xmlns:a="http://schemas.openxmlformats.org/drawingml/2006/main" xmlns:r="http://schemas.openxmlformats.org/officeDocument/2006/relationships" xmlns:p="http://schemas.openxmlformats.org/presentationml/2006/main">
   <p:cSld>
     <p:spTree>
       <p:nvGrpSpPr>
@@ -14662,7 +14963,14 @@
         <p:cNvGrpSpPr/>
         <p:nvPr/>
       </p:nvGrpSpPr>
-      <p:grpSpPr/>
+      <p:grpSpPr>
+        <a:xfrm>
+          <a:off x="0" y="0"/>
+          <a:ext cx="0" cy="0"/>
+          <a:chOff x="0" y="0"/>
+          <a:chExt cx="0" cy="0"/>
+        </a:xfrm>
+      </p:grpSpPr>
       <p:sp>
         <p:nvSpPr>
           <p:cNvPr id="2" name="Rectangle 1"/>
@@ -14704,6 +15012,7 @@
           <a:lstStyle/>
           <a:p>
             <a:pPr algn="ctr"/>
+            <a:endParaRPr/>
           </a:p>
         </p:txBody>
       </p:sp>
@@ -14897,7 +15206,7 @@
 </file>
 
 <file path=ppt/slides/slide42.xml><?xml version="1.0" encoding="utf-8"?>
-<p:sld xmlns:a="http://schemas.openxmlformats.org/drawingml/2006/main" xmlns:p="http://schemas.openxmlformats.org/presentationml/2006/main" xmlns:r="http://schemas.openxmlformats.org/officeDocument/2006/relationships">
+<p:sld xmlns:a="http://schemas.openxmlformats.org/drawingml/2006/main" xmlns:r="http://schemas.openxmlformats.org/officeDocument/2006/relationships" xmlns:p="http://schemas.openxmlformats.org/presentationml/2006/main">
   <p:cSld>
     <p:spTree>
       <p:nvGrpSpPr>
@@ -14905,7 +15214,14 @@
         <p:cNvGrpSpPr/>
         <p:nvPr/>
       </p:nvGrpSpPr>
-      <p:grpSpPr/>
+      <p:grpSpPr>
+        <a:xfrm>
+          <a:off x="0" y="0"/>
+          <a:ext cx="0" cy="0"/>
+          <a:chOff x="0" y="0"/>
+          <a:chExt cx="0" cy="0"/>
+        </a:xfrm>
+      </p:grpSpPr>
       <p:sp>
         <p:nvSpPr>
           <p:cNvPr id="2" name="Rectangle 1"/>
@@ -14947,6 +15263,7 @@
           <a:lstStyle/>
           <a:p>
             <a:pPr algn="ctr"/>
+            <a:endParaRPr/>
           </a:p>
         </p:txBody>
       </p:sp>
@@ -15140,7 +15457,7 @@
 </file>
 
 <file path=ppt/slides/slide43.xml><?xml version="1.0" encoding="utf-8"?>
-<p:sld xmlns:a="http://schemas.openxmlformats.org/drawingml/2006/main" xmlns:p="http://schemas.openxmlformats.org/presentationml/2006/main" xmlns:r="http://schemas.openxmlformats.org/officeDocument/2006/relationships">
+<p:sld xmlns:a="http://schemas.openxmlformats.org/drawingml/2006/main" xmlns:r="http://schemas.openxmlformats.org/officeDocument/2006/relationships" xmlns:p="http://schemas.openxmlformats.org/presentationml/2006/main">
   <p:cSld>
     <p:spTree>
       <p:nvGrpSpPr>
@@ -15148,7 +15465,14 @@
         <p:cNvGrpSpPr/>
         <p:nvPr/>
       </p:nvGrpSpPr>
-      <p:grpSpPr/>
+      <p:grpSpPr>
+        <a:xfrm>
+          <a:off x="0" y="0"/>
+          <a:ext cx="0" cy="0"/>
+          <a:chOff x="0" y="0"/>
+          <a:chExt cx="0" cy="0"/>
+        </a:xfrm>
+      </p:grpSpPr>
       <p:sp>
         <p:nvSpPr>
           <p:cNvPr id="2" name="Rectangle 1"/>
@@ -15190,6 +15514,7 @@
           <a:lstStyle/>
           <a:p>
             <a:pPr algn="ctr"/>
+            <a:endParaRPr/>
           </a:p>
         </p:txBody>
       </p:sp>
@@ -15312,6 +15637,7 @@
           <a:lstStyle/>
           <a:p>
             <a:pPr algn="ctr"/>
+            <a:endParaRPr/>
           </a:p>
         </p:txBody>
       </p:sp>
@@ -15411,7 +15737,7 @@
 </file>
 
 <file path=ppt/slides/slide44.xml><?xml version="1.0" encoding="utf-8"?>
-<p:sld xmlns:a="http://schemas.openxmlformats.org/drawingml/2006/main" xmlns:p="http://schemas.openxmlformats.org/presentationml/2006/main" xmlns:r="http://schemas.openxmlformats.org/officeDocument/2006/relationships">
+<p:sld xmlns:a="http://schemas.openxmlformats.org/drawingml/2006/main" xmlns:r="http://schemas.openxmlformats.org/officeDocument/2006/relationships" xmlns:p="http://schemas.openxmlformats.org/presentationml/2006/main">
   <p:cSld>
     <p:spTree>
       <p:nvGrpSpPr>
@@ -15419,7 +15745,14 @@
         <p:cNvGrpSpPr/>
         <p:nvPr/>
       </p:nvGrpSpPr>
-      <p:grpSpPr/>
+      <p:grpSpPr>
+        <a:xfrm>
+          <a:off x="0" y="0"/>
+          <a:ext cx="0" cy="0"/>
+          <a:chOff x="0" y="0"/>
+          <a:chExt cx="0" cy="0"/>
+        </a:xfrm>
+      </p:grpSpPr>
       <p:sp>
         <p:nvSpPr>
           <p:cNvPr id="2" name="Rectangle 1"/>
@@ -15461,6 +15794,7 @@
           <a:lstStyle/>
           <a:p>
             <a:pPr algn="ctr"/>
+            <a:endParaRPr/>
           </a:p>
         </p:txBody>
       </p:sp>
@@ -15654,7 +15988,7 @@
 </file>
 
 <file path=ppt/slides/slide45.xml><?xml version="1.0" encoding="utf-8"?>
-<p:sld xmlns:a="http://schemas.openxmlformats.org/drawingml/2006/main" xmlns:p="http://schemas.openxmlformats.org/presentationml/2006/main" xmlns:r="http://schemas.openxmlformats.org/officeDocument/2006/relationships">
+<p:sld xmlns:a="http://schemas.openxmlformats.org/drawingml/2006/main" xmlns:r="http://schemas.openxmlformats.org/officeDocument/2006/relationships" xmlns:p="http://schemas.openxmlformats.org/presentationml/2006/main">
   <p:cSld>
     <p:spTree>
       <p:nvGrpSpPr>
@@ -15662,7 +15996,14 @@
         <p:cNvGrpSpPr/>
         <p:nvPr/>
       </p:nvGrpSpPr>
-      <p:grpSpPr/>
+      <p:grpSpPr>
+        <a:xfrm>
+          <a:off x="0" y="0"/>
+          <a:ext cx="0" cy="0"/>
+          <a:chOff x="0" y="0"/>
+          <a:chExt cx="0" cy="0"/>
+        </a:xfrm>
+      </p:grpSpPr>
       <p:sp>
         <p:nvSpPr>
           <p:cNvPr id="2" name="Rectangle 1"/>
@@ -15704,6 +16045,7 @@
           <a:lstStyle/>
           <a:p>
             <a:pPr algn="ctr"/>
+            <a:endParaRPr/>
           </a:p>
         </p:txBody>
       </p:sp>
@@ -15897,7 +16239,7 @@
 </file>
 
 <file path=ppt/slides/slide46.xml><?xml version="1.0" encoding="utf-8"?>
-<p:sld xmlns:a="http://schemas.openxmlformats.org/drawingml/2006/main" xmlns:p="http://schemas.openxmlformats.org/presentationml/2006/main" xmlns:r="http://schemas.openxmlformats.org/officeDocument/2006/relationships">
+<p:sld xmlns:a="http://schemas.openxmlformats.org/drawingml/2006/main" xmlns:r="http://schemas.openxmlformats.org/officeDocument/2006/relationships" xmlns:p="http://schemas.openxmlformats.org/presentationml/2006/main">
   <p:cSld>
     <p:spTree>
       <p:nvGrpSpPr>
@@ -15905,7 +16247,14 @@
         <p:cNvGrpSpPr/>
         <p:nvPr/>
       </p:nvGrpSpPr>
-      <p:grpSpPr/>
+      <p:grpSpPr>
+        <a:xfrm>
+          <a:off x="0" y="0"/>
+          <a:ext cx="0" cy="0"/>
+          <a:chOff x="0" y="0"/>
+          <a:chExt cx="0" cy="0"/>
+        </a:xfrm>
+      </p:grpSpPr>
       <p:sp>
         <p:nvSpPr>
           <p:cNvPr id="2" name="Rectangle 1"/>
@@ -15947,6 +16296,7 @@
           <a:lstStyle/>
           <a:p>
             <a:pPr algn="ctr"/>
+            <a:endParaRPr/>
           </a:p>
         </p:txBody>
       </p:sp>
@@ -16165,7 +16515,7 @@
 </file>
 
 <file path=ppt/slides/slide47.xml><?xml version="1.0" encoding="utf-8"?>
-<p:sld xmlns:a="http://schemas.openxmlformats.org/drawingml/2006/main" xmlns:p="http://schemas.openxmlformats.org/presentationml/2006/main" xmlns:r="http://schemas.openxmlformats.org/officeDocument/2006/relationships">
+<p:sld xmlns:a="http://schemas.openxmlformats.org/drawingml/2006/main" xmlns:r="http://schemas.openxmlformats.org/officeDocument/2006/relationships" xmlns:p="http://schemas.openxmlformats.org/presentationml/2006/main">
   <p:cSld>
     <p:spTree>
       <p:nvGrpSpPr>
@@ -16173,7 +16523,14 @@
         <p:cNvGrpSpPr/>
         <p:nvPr/>
       </p:nvGrpSpPr>
-      <p:grpSpPr/>
+      <p:grpSpPr>
+        <a:xfrm>
+          <a:off x="0" y="0"/>
+          <a:ext cx="0" cy="0"/>
+          <a:chOff x="0" y="0"/>
+          <a:chExt cx="0" cy="0"/>
+        </a:xfrm>
+      </p:grpSpPr>
       <p:sp>
         <p:nvSpPr>
           <p:cNvPr id="2" name="Rectangle 1"/>
@@ -16215,6 +16572,7 @@
           <a:lstStyle/>
           <a:p>
             <a:pPr algn="ctr"/>
+            <a:endParaRPr/>
           </a:p>
         </p:txBody>
       </p:sp>
@@ -16385,7 +16743,7 @@
 </file>
 
 <file path=ppt/slides/slide48.xml><?xml version="1.0" encoding="utf-8"?>
-<p:sld xmlns:a="http://schemas.openxmlformats.org/drawingml/2006/main" xmlns:p="http://schemas.openxmlformats.org/presentationml/2006/main" xmlns:r="http://schemas.openxmlformats.org/officeDocument/2006/relationships">
+<p:sld xmlns:a="http://schemas.openxmlformats.org/drawingml/2006/main" xmlns:r="http://schemas.openxmlformats.org/officeDocument/2006/relationships" xmlns:p="http://schemas.openxmlformats.org/presentationml/2006/main">
   <p:cSld>
     <p:spTree>
       <p:nvGrpSpPr>
@@ -16393,7 +16751,14 @@
         <p:cNvGrpSpPr/>
         <p:nvPr/>
       </p:nvGrpSpPr>
-      <p:grpSpPr/>
+      <p:grpSpPr>
+        <a:xfrm>
+          <a:off x="0" y="0"/>
+          <a:ext cx="0" cy="0"/>
+          <a:chOff x="0" y="0"/>
+          <a:chExt cx="0" cy="0"/>
+        </a:xfrm>
+      </p:grpSpPr>
       <p:sp>
         <p:nvSpPr>
           <p:cNvPr id="2" name="Rectangle 1"/>
@@ -16435,6 +16800,7 @@
           <a:lstStyle/>
           <a:p>
             <a:pPr algn="ctr"/>
+            <a:endParaRPr/>
           </a:p>
         </p:txBody>
       </p:sp>
@@ -16505,110 +16871,839 @@
               </a:spcAft>
             </a:pPr>
             <a:r>
-              <a:rPr sz="1600" b="0">
-                <a:solidFill>
-                  <a:srgbClr val="222222"/>
-                </a:solidFill>
-                <a:latin typeface="맑은 고딕"/>
-              </a:rPr>
-              <a:t>•  01 클러스터 전체 상태 파악 — crsctl status resource -t 읽는 법, 25분</a:t>
-            </a:r>
-          </a:p>
-          <a:p>
-            <a:pPr algn="l">
-              <a:spcAft>
-                <a:spcPts val="1000"/>
-              </a:spcAft>
-            </a:pPr>
-            <a:r>
-              <a:rPr sz="1600" b="0">
-                <a:solidFill>
-                  <a:srgbClr val="222222"/>
-                </a:solidFill>
-                <a:latin typeface="맑은 고딕"/>
-              </a:rPr>
-              <a:t>•  02 하나의 DB 를 공유한다는 것 확인 — GV$ 와 V$, 공유 파일, 20분</a:t>
-            </a:r>
-          </a:p>
-          <a:p>
-            <a:pPr algn="l">
-              <a:spcAft>
-                <a:spcPts val="1000"/>
-              </a:spcAft>
-            </a:pPr>
-            <a:r>
-              <a:rPr sz="1600" b="0">
-                <a:solidFill>
-                  <a:srgbClr val="222222"/>
-                </a:solidFill>
-                <a:latin typeface="맑은 고딕"/>
-              </a:rPr>
-              <a:t>•  03 Cache Fusion 실측 — gc 통계 델타와 GV$BH, 두 노드 사용, 35분</a:t>
-            </a:r>
-          </a:p>
-          <a:p>
-            <a:pPr algn="l">
-              <a:spcAft>
-                <a:spcPts val="1000"/>
-              </a:spcAft>
-            </a:pPr>
-            <a:r>
-              <a:rPr sz="1600" b="0">
-                <a:solidFill>
-                  <a:srgbClr val="222222"/>
-                </a:solidFill>
-                <a:latin typeface="맑은 고딕"/>
-              </a:rPr>
-              <a:t>•  04 단일 인스턴스와의 구조 차이 — 스레드·UNDO·컨트롤 파일, 25분</a:t>
-            </a:r>
-          </a:p>
-          <a:p>
-            <a:pPr algn="l">
-              <a:spcAft>
-                <a:spcPts val="1000"/>
-              </a:spcAft>
-            </a:pPr>
-            <a:r>
-              <a:rPr sz="1600" b="0">
-                <a:solidFill>
-                  <a:srgbClr val="222222"/>
-                </a:solidFill>
-                <a:latin typeface="맑은 고딕"/>
-              </a:rPr>
-              <a:t>•  05 라이선스 경계 확인 — V$OPTION, DBA_REGISTRY, CDB_FEATURE_USAGE, 20분</a:t>
-            </a:r>
-          </a:p>
-          <a:p>
-            <a:pPr algn="l">
-              <a:spcAft>
-                <a:spcPts val="1000"/>
-              </a:spcAft>
-            </a:pPr>
-            <a:r>
-              <a:rPr sz="1600" b="0">
-                <a:solidFill>
-                  <a:srgbClr val="222222"/>
-                </a:solidFill>
-                <a:latin typeface="맑은 고딕"/>
-              </a:rPr>
-              <a:t>•  06 노드 하나를 정지했을 때 — SCAN 분포와 V$THREAD 변화, 두 노드, 35분</a:t>
-            </a:r>
-          </a:p>
-          <a:p>
-            <a:pPr algn="l">
-              <a:spcAft>
-                <a:spcPts val="1000"/>
-              </a:spcAft>
-            </a:pPr>
-            <a:r>
-              <a:rPr sz="1600" b="0">
-                <a:solidFill>
-                  <a:srgbClr val="222222"/>
-                </a:solidFill>
-                <a:latin typeface="맑은 고딕"/>
-              </a:rPr>
-              <a:t>•  실습 6은 인스턴스를 정지한다 — 반드시 srvctl start instance 로 복귀</a:t>
-            </a:r>
+              <a:rPr sz="1600" b="0" dirty="0">
+                <a:solidFill>
+                  <a:srgbClr val="222222"/>
+                </a:solidFill>
+                <a:latin typeface="맑은 고딕"/>
+              </a:rPr>
+              <a:t>•  01 </a:t>
+            </a:r>
+            <a:r>
+              <a:rPr sz="1600" b="0" dirty="0" err="1">
+                <a:solidFill>
+                  <a:srgbClr val="222222"/>
+                </a:solidFill>
+                <a:latin typeface="맑은 고딕"/>
+              </a:rPr>
+              <a:t>클러스터</a:t>
+            </a:r>
+            <a:r>
+              <a:rPr sz="1600" b="0" dirty="0">
+                <a:solidFill>
+                  <a:srgbClr val="222222"/>
+                </a:solidFill>
+                <a:latin typeface="맑은 고딕"/>
+              </a:rPr>
+              <a:t> </a:t>
+            </a:r>
+            <a:r>
+              <a:rPr sz="1600" b="0" dirty="0" err="1">
+                <a:solidFill>
+                  <a:srgbClr val="222222"/>
+                </a:solidFill>
+                <a:latin typeface="맑은 고딕"/>
+              </a:rPr>
+              <a:t>전체</a:t>
+            </a:r>
+            <a:r>
+              <a:rPr sz="1600" b="0" dirty="0">
+                <a:solidFill>
+                  <a:srgbClr val="222222"/>
+                </a:solidFill>
+                <a:latin typeface="맑은 고딕"/>
+              </a:rPr>
+              <a:t> </a:t>
+            </a:r>
+            <a:r>
+              <a:rPr sz="1600" b="0" dirty="0" err="1">
+                <a:solidFill>
+                  <a:srgbClr val="222222"/>
+                </a:solidFill>
+                <a:latin typeface="맑은 고딕"/>
+              </a:rPr>
+              <a:t>상태</a:t>
+            </a:r>
+            <a:r>
+              <a:rPr sz="1600" b="0" dirty="0">
+                <a:solidFill>
+                  <a:srgbClr val="222222"/>
+                </a:solidFill>
+                <a:latin typeface="맑은 고딕"/>
+              </a:rPr>
+              <a:t> </a:t>
+            </a:r>
+            <a:r>
+              <a:rPr sz="1600" b="0" dirty="0" err="1">
+                <a:solidFill>
+                  <a:srgbClr val="222222"/>
+                </a:solidFill>
+                <a:latin typeface="맑은 고딕"/>
+              </a:rPr>
+              <a:t>파악</a:t>
+            </a:r>
+            <a:r>
+              <a:rPr sz="1600" b="0" dirty="0">
+                <a:solidFill>
+                  <a:srgbClr val="222222"/>
+                </a:solidFill>
+                <a:latin typeface="맑은 고딕"/>
+              </a:rPr>
+              <a:t> — </a:t>
+            </a:r>
+            <a:r>
+              <a:rPr sz="1600" b="0" dirty="0" err="1">
+                <a:solidFill>
+                  <a:srgbClr val="222222"/>
+                </a:solidFill>
+                <a:latin typeface="맑은 고딕"/>
+              </a:rPr>
+              <a:t>crsctl</a:t>
+            </a:r>
+            <a:r>
+              <a:rPr sz="1600" b="0" dirty="0">
+                <a:solidFill>
+                  <a:srgbClr val="222222"/>
+                </a:solidFill>
+                <a:latin typeface="맑은 고딕"/>
+              </a:rPr>
+              <a:t> status resource -t </a:t>
+            </a:r>
+            <a:r>
+              <a:rPr sz="1600" b="0" dirty="0" err="1">
+                <a:solidFill>
+                  <a:srgbClr val="222222"/>
+                </a:solidFill>
+                <a:latin typeface="맑은 고딕"/>
+              </a:rPr>
+              <a:t>읽는</a:t>
+            </a:r>
+            <a:r>
+              <a:rPr sz="1600" b="0" dirty="0">
+                <a:solidFill>
+                  <a:srgbClr val="222222"/>
+                </a:solidFill>
+                <a:latin typeface="맑은 고딕"/>
+              </a:rPr>
+              <a:t> 법, </a:t>
+            </a:r>
+            <a:r>
+              <a:rPr lang="en-US" altLang="ko-KR" sz="1600" b="0" dirty="0">
+                <a:solidFill>
+                  <a:srgbClr val="222222"/>
+                </a:solidFill>
+                <a:latin typeface="맑은 고딕"/>
+              </a:rPr>
+              <a:t>25</a:t>
+            </a:r>
+            <a:r>
+              <a:rPr lang="ko-KR" altLang="en-US" sz="1600" b="0" dirty="0">
+                <a:solidFill>
+                  <a:srgbClr val="222222"/>
+                </a:solidFill>
+                <a:latin typeface="맑은 고딕"/>
+              </a:rPr>
+              <a:t>분</a:t>
+            </a:r>
+            <a:endParaRPr sz="1600" b="0" dirty="0">
+              <a:solidFill>
+                <a:srgbClr val="222222"/>
+              </a:solidFill>
+              <a:latin typeface="맑은 고딕"/>
+            </a:endParaRPr>
+          </a:p>
+          <a:p>
+            <a:pPr algn="l">
+              <a:spcAft>
+                <a:spcPts val="1000"/>
+              </a:spcAft>
+            </a:pPr>
+            <a:r>
+              <a:rPr sz="1600" b="0" dirty="0">
+                <a:solidFill>
+                  <a:srgbClr val="222222"/>
+                </a:solidFill>
+                <a:latin typeface="맑은 고딕"/>
+              </a:rPr>
+              <a:t>•  02 </a:t>
+            </a:r>
+            <a:r>
+              <a:rPr sz="1600" b="0" dirty="0" err="1">
+                <a:solidFill>
+                  <a:srgbClr val="222222"/>
+                </a:solidFill>
+                <a:latin typeface="맑은 고딕"/>
+              </a:rPr>
+              <a:t>하나의</a:t>
+            </a:r>
+            <a:r>
+              <a:rPr sz="1600" b="0" dirty="0">
+                <a:solidFill>
+                  <a:srgbClr val="222222"/>
+                </a:solidFill>
+                <a:latin typeface="맑은 고딕"/>
+              </a:rPr>
+              <a:t> DB 를 </a:t>
+            </a:r>
+            <a:r>
+              <a:rPr sz="1600" b="0" dirty="0" err="1">
+                <a:solidFill>
+                  <a:srgbClr val="222222"/>
+                </a:solidFill>
+                <a:latin typeface="맑은 고딕"/>
+              </a:rPr>
+              <a:t>공유한다는</a:t>
+            </a:r>
+            <a:r>
+              <a:rPr sz="1600" b="0" dirty="0">
+                <a:solidFill>
+                  <a:srgbClr val="222222"/>
+                </a:solidFill>
+                <a:latin typeface="맑은 고딕"/>
+              </a:rPr>
+              <a:t> 것 </a:t>
+            </a:r>
+            <a:r>
+              <a:rPr sz="1600" b="0" dirty="0" err="1">
+                <a:solidFill>
+                  <a:srgbClr val="222222"/>
+                </a:solidFill>
+                <a:latin typeface="맑은 고딕"/>
+              </a:rPr>
+              <a:t>확인</a:t>
+            </a:r>
+            <a:r>
+              <a:rPr sz="1600" b="0" dirty="0">
+                <a:solidFill>
+                  <a:srgbClr val="222222"/>
+                </a:solidFill>
+                <a:latin typeface="맑은 고딕"/>
+              </a:rPr>
+              <a:t> — GV$ 와 V$, </a:t>
+            </a:r>
+            <a:r>
+              <a:rPr sz="1600" b="0" dirty="0" err="1">
+                <a:solidFill>
+                  <a:srgbClr val="222222"/>
+                </a:solidFill>
+                <a:latin typeface="맑은 고딕"/>
+              </a:rPr>
+              <a:t>공유</a:t>
+            </a:r>
+            <a:r>
+              <a:rPr sz="1600" b="0" dirty="0">
+                <a:solidFill>
+                  <a:srgbClr val="222222"/>
+                </a:solidFill>
+                <a:latin typeface="맑은 고딕"/>
+              </a:rPr>
+              <a:t> </a:t>
+            </a:r>
+            <a:r>
+              <a:rPr sz="1600" b="0" dirty="0" err="1">
+                <a:solidFill>
+                  <a:srgbClr val="222222"/>
+                </a:solidFill>
+                <a:latin typeface="맑은 고딕"/>
+              </a:rPr>
+              <a:t>파일</a:t>
+            </a:r>
+            <a:r>
+              <a:rPr sz="1600" b="0" dirty="0">
+                <a:solidFill>
+                  <a:srgbClr val="222222"/>
+                </a:solidFill>
+                <a:latin typeface="맑은 고딕"/>
+              </a:rPr>
+              <a:t>, </a:t>
+            </a:r>
+            <a:r>
+              <a:rPr lang="en-US" altLang="ko-KR" sz="1600" b="0" dirty="0">
+                <a:solidFill>
+                  <a:srgbClr val="222222"/>
+                </a:solidFill>
+                <a:latin typeface="맑은 고딕"/>
+              </a:rPr>
+              <a:t>20</a:t>
+            </a:r>
+            <a:r>
+              <a:rPr lang="ko-KR" altLang="en-US" sz="1600" b="0" dirty="0">
+                <a:solidFill>
+                  <a:srgbClr val="222222"/>
+                </a:solidFill>
+                <a:latin typeface="맑은 고딕"/>
+              </a:rPr>
+              <a:t>분</a:t>
+            </a:r>
+            <a:endParaRPr sz="1600" b="0" dirty="0">
+              <a:solidFill>
+                <a:srgbClr val="222222"/>
+              </a:solidFill>
+              <a:latin typeface="맑은 고딕"/>
+            </a:endParaRPr>
+          </a:p>
+          <a:p>
+            <a:pPr algn="l">
+              <a:spcAft>
+                <a:spcPts val="1000"/>
+              </a:spcAft>
+            </a:pPr>
+            <a:r>
+              <a:rPr sz="1600" b="0" dirty="0">
+                <a:solidFill>
+                  <a:srgbClr val="222222"/>
+                </a:solidFill>
+                <a:latin typeface="맑은 고딕"/>
+              </a:rPr>
+              <a:t>•  03 Cache Fusion </a:t>
+            </a:r>
+            <a:r>
+              <a:rPr sz="1600" b="0" dirty="0" err="1">
+                <a:solidFill>
+                  <a:srgbClr val="222222"/>
+                </a:solidFill>
+                <a:latin typeface="맑은 고딕"/>
+              </a:rPr>
+              <a:t>실측</a:t>
+            </a:r>
+            <a:r>
+              <a:rPr sz="1600" b="0" dirty="0">
+                <a:solidFill>
+                  <a:srgbClr val="222222"/>
+                </a:solidFill>
+                <a:latin typeface="맑은 고딕"/>
+              </a:rPr>
+              <a:t> — </a:t>
+            </a:r>
+            <a:r>
+              <a:rPr sz="1600" b="0" dirty="0" err="1">
+                <a:solidFill>
+                  <a:srgbClr val="222222"/>
+                </a:solidFill>
+                <a:latin typeface="맑은 고딕"/>
+              </a:rPr>
+              <a:t>gc</a:t>
+            </a:r>
+            <a:r>
+              <a:rPr sz="1600" b="0" dirty="0">
+                <a:solidFill>
+                  <a:srgbClr val="222222"/>
+                </a:solidFill>
+                <a:latin typeface="맑은 고딕"/>
+              </a:rPr>
+              <a:t> </a:t>
+            </a:r>
+            <a:r>
+              <a:rPr sz="1600" b="0" dirty="0" err="1">
+                <a:solidFill>
+                  <a:srgbClr val="222222"/>
+                </a:solidFill>
+                <a:latin typeface="맑은 고딕"/>
+              </a:rPr>
+              <a:t>통계</a:t>
+            </a:r>
+            <a:r>
+              <a:rPr sz="1600" b="0" dirty="0">
+                <a:solidFill>
+                  <a:srgbClr val="222222"/>
+                </a:solidFill>
+                <a:latin typeface="맑은 고딕"/>
+              </a:rPr>
+              <a:t> </a:t>
+            </a:r>
+            <a:r>
+              <a:rPr sz="1600" b="0" dirty="0" err="1">
+                <a:solidFill>
+                  <a:srgbClr val="222222"/>
+                </a:solidFill>
+                <a:latin typeface="맑은 고딕"/>
+              </a:rPr>
+              <a:t>델타와</a:t>
+            </a:r>
+            <a:r>
+              <a:rPr sz="1600" b="0" dirty="0">
+                <a:solidFill>
+                  <a:srgbClr val="222222"/>
+                </a:solidFill>
+                <a:latin typeface="맑은 고딕"/>
+              </a:rPr>
+              <a:t> GV$BH, 두 </a:t>
+            </a:r>
+            <a:r>
+              <a:rPr sz="1600" b="0" dirty="0" err="1">
+                <a:solidFill>
+                  <a:srgbClr val="222222"/>
+                </a:solidFill>
+                <a:latin typeface="맑은 고딕"/>
+              </a:rPr>
+              <a:t>노드</a:t>
+            </a:r>
+            <a:r>
+              <a:rPr sz="1600" b="0" dirty="0">
+                <a:solidFill>
+                  <a:srgbClr val="222222"/>
+                </a:solidFill>
+                <a:latin typeface="맑은 고딕"/>
+              </a:rPr>
+              <a:t> </a:t>
+            </a:r>
+            <a:r>
+              <a:rPr sz="1600" b="0" dirty="0" err="1">
+                <a:solidFill>
+                  <a:srgbClr val="222222"/>
+                </a:solidFill>
+                <a:latin typeface="맑은 고딕"/>
+              </a:rPr>
+              <a:t>사용</a:t>
+            </a:r>
+            <a:r>
+              <a:rPr sz="1600" b="0" dirty="0">
+                <a:solidFill>
+                  <a:srgbClr val="222222"/>
+                </a:solidFill>
+                <a:latin typeface="맑은 고딕"/>
+              </a:rPr>
+              <a:t>, 35분</a:t>
+            </a:r>
+          </a:p>
+          <a:p>
+            <a:pPr algn="l">
+              <a:spcAft>
+                <a:spcPts val="1000"/>
+              </a:spcAft>
+            </a:pPr>
+            <a:r>
+              <a:rPr sz="1600" b="0" dirty="0">
+                <a:solidFill>
+                  <a:srgbClr val="222222"/>
+                </a:solidFill>
+                <a:latin typeface="맑은 고딕"/>
+              </a:rPr>
+              <a:t>•  04 </a:t>
+            </a:r>
+            <a:r>
+              <a:rPr sz="1600" b="0" dirty="0" err="1">
+                <a:solidFill>
+                  <a:srgbClr val="222222"/>
+                </a:solidFill>
+                <a:latin typeface="맑은 고딕"/>
+              </a:rPr>
+              <a:t>단일</a:t>
+            </a:r>
+            <a:r>
+              <a:rPr sz="1600" b="0" dirty="0">
+                <a:solidFill>
+                  <a:srgbClr val="222222"/>
+                </a:solidFill>
+                <a:latin typeface="맑은 고딕"/>
+              </a:rPr>
+              <a:t> </a:t>
+            </a:r>
+            <a:r>
+              <a:rPr sz="1600" b="0" dirty="0" err="1">
+                <a:solidFill>
+                  <a:srgbClr val="222222"/>
+                </a:solidFill>
+                <a:latin typeface="맑은 고딕"/>
+              </a:rPr>
+              <a:t>인스턴스와의</a:t>
+            </a:r>
+            <a:r>
+              <a:rPr sz="1600" b="0" dirty="0">
+                <a:solidFill>
+                  <a:srgbClr val="222222"/>
+                </a:solidFill>
+                <a:latin typeface="맑은 고딕"/>
+              </a:rPr>
+              <a:t> </a:t>
+            </a:r>
+            <a:r>
+              <a:rPr sz="1600" b="0" dirty="0" err="1">
+                <a:solidFill>
+                  <a:srgbClr val="222222"/>
+                </a:solidFill>
+                <a:latin typeface="맑은 고딕"/>
+              </a:rPr>
+              <a:t>구조</a:t>
+            </a:r>
+            <a:r>
+              <a:rPr sz="1600" b="0" dirty="0">
+                <a:solidFill>
+                  <a:srgbClr val="222222"/>
+                </a:solidFill>
+                <a:latin typeface="맑은 고딕"/>
+              </a:rPr>
+              <a:t> </a:t>
+            </a:r>
+            <a:r>
+              <a:rPr sz="1600" b="0" dirty="0" err="1">
+                <a:solidFill>
+                  <a:srgbClr val="222222"/>
+                </a:solidFill>
+                <a:latin typeface="맑은 고딕"/>
+              </a:rPr>
+              <a:t>차이</a:t>
+            </a:r>
+            <a:r>
+              <a:rPr sz="1600" b="0" dirty="0">
+                <a:solidFill>
+                  <a:srgbClr val="222222"/>
+                </a:solidFill>
+                <a:latin typeface="맑은 고딕"/>
+              </a:rPr>
+              <a:t> — </a:t>
+            </a:r>
+            <a:r>
+              <a:rPr sz="1600" b="0" dirty="0" err="1">
+                <a:solidFill>
+                  <a:srgbClr val="222222"/>
+                </a:solidFill>
+                <a:latin typeface="맑은 고딕"/>
+              </a:rPr>
+              <a:t>스레드·UNDO·컨트롤</a:t>
+            </a:r>
+            <a:r>
+              <a:rPr sz="1600" b="0" dirty="0">
+                <a:solidFill>
+                  <a:srgbClr val="222222"/>
+                </a:solidFill>
+                <a:latin typeface="맑은 고딕"/>
+              </a:rPr>
+              <a:t> </a:t>
+            </a:r>
+            <a:r>
+              <a:rPr sz="1600" b="0" dirty="0" err="1">
+                <a:solidFill>
+                  <a:srgbClr val="222222"/>
+                </a:solidFill>
+                <a:latin typeface="맑은 고딕"/>
+              </a:rPr>
+              <a:t>파일</a:t>
+            </a:r>
+            <a:r>
+              <a:rPr sz="1600" b="0" dirty="0">
+                <a:solidFill>
+                  <a:srgbClr val="222222"/>
+                </a:solidFill>
+                <a:latin typeface="맑은 고딕"/>
+              </a:rPr>
+              <a:t>, 25분</a:t>
+            </a:r>
+          </a:p>
+          <a:p>
+            <a:pPr algn="l">
+              <a:spcAft>
+                <a:spcPts val="1000"/>
+              </a:spcAft>
+            </a:pPr>
+            <a:r>
+              <a:rPr sz="1600" b="0" dirty="0">
+                <a:solidFill>
+                  <a:srgbClr val="222222"/>
+                </a:solidFill>
+                <a:latin typeface="맑은 고딕"/>
+              </a:rPr>
+              <a:t>•  05 </a:t>
+            </a:r>
+            <a:r>
+              <a:rPr sz="1600" b="0" dirty="0" err="1">
+                <a:solidFill>
+                  <a:srgbClr val="222222"/>
+                </a:solidFill>
+                <a:latin typeface="맑은 고딕"/>
+              </a:rPr>
+              <a:t>라이선스</a:t>
+            </a:r>
+            <a:r>
+              <a:rPr sz="1600" b="0" dirty="0">
+                <a:solidFill>
+                  <a:srgbClr val="222222"/>
+                </a:solidFill>
+                <a:latin typeface="맑은 고딕"/>
+              </a:rPr>
+              <a:t> </a:t>
+            </a:r>
+            <a:r>
+              <a:rPr sz="1600" b="0" dirty="0" err="1">
+                <a:solidFill>
+                  <a:srgbClr val="222222"/>
+                </a:solidFill>
+                <a:latin typeface="맑은 고딕"/>
+              </a:rPr>
+              <a:t>경계</a:t>
+            </a:r>
+            <a:r>
+              <a:rPr sz="1600" b="0" dirty="0">
+                <a:solidFill>
+                  <a:srgbClr val="222222"/>
+                </a:solidFill>
+                <a:latin typeface="맑은 고딕"/>
+              </a:rPr>
+              <a:t> </a:t>
+            </a:r>
+            <a:r>
+              <a:rPr sz="1600" b="0" dirty="0" err="1">
+                <a:solidFill>
+                  <a:srgbClr val="222222"/>
+                </a:solidFill>
+                <a:latin typeface="맑은 고딕"/>
+              </a:rPr>
+              <a:t>확인</a:t>
+            </a:r>
+            <a:r>
+              <a:rPr sz="1600" b="0" dirty="0">
+                <a:solidFill>
+                  <a:srgbClr val="222222"/>
+                </a:solidFill>
+                <a:latin typeface="맑은 고딕"/>
+              </a:rPr>
+              <a:t> — V$OPTION, DBA_REGISTRY, CDB_FEATURE_USAGE, 20분</a:t>
+            </a:r>
+          </a:p>
+          <a:p>
+            <a:pPr algn="l">
+              <a:spcAft>
+                <a:spcPts val="1000"/>
+              </a:spcAft>
+            </a:pPr>
+            <a:r>
+              <a:rPr sz="1600" b="0" dirty="0">
+                <a:solidFill>
+                  <a:srgbClr val="222222"/>
+                </a:solidFill>
+                <a:latin typeface="맑은 고딕"/>
+              </a:rPr>
+              <a:t>•  06 </a:t>
+            </a:r>
+            <a:r>
+              <a:rPr sz="1600" b="0" dirty="0" err="1">
+                <a:solidFill>
+                  <a:srgbClr val="222222"/>
+                </a:solidFill>
+                <a:latin typeface="맑은 고딕"/>
+              </a:rPr>
+              <a:t>노드</a:t>
+            </a:r>
+            <a:r>
+              <a:rPr sz="1600" b="0" dirty="0">
+                <a:solidFill>
+                  <a:srgbClr val="222222"/>
+                </a:solidFill>
+                <a:latin typeface="맑은 고딕"/>
+              </a:rPr>
+              <a:t> </a:t>
+            </a:r>
+            <a:r>
+              <a:rPr sz="1600" b="0" dirty="0" err="1">
+                <a:solidFill>
+                  <a:srgbClr val="222222"/>
+                </a:solidFill>
+                <a:latin typeface="맑은 고딕"/>
+              </a:rPr>
+              <a:t>하나를</a:t>
+            </a:r>
+            <a:r>
+              <a:rPr sz="1600" b="0" dirty="0">
+                <a:solidFill>
+                  <a:srgbClr val="222222"/>
+                </a:solidFill>
+                <a:latin typeface="맑은 고딕"/>
+              </a:rPr>
+              <a:t> </a:t>
+            </a:r>
+            <a:r>
+              <a:rPr sz="1600" b="0" dirty="0" err="1">
+                <a:solidFill>
+                  <a:srgbClr val="222222"/>
+                </a:solidFill>
+                <a:latin typeface="맑은 고딕"/>
+              </a:rPr>
+              <a:t>정지했을</a:t>
+            </a:r>
+            <a:r>
+              <a:rPr sz="1600" b="0" dirty="0">
+                <a:solidFill>
+                  <a:srgbClr val="222222"/>
+                </a:solidFill>
+                <a:latin typeface="맑은 고딕"/>
+              </a:rPr>
+              <a:t> 때 — SCAN </a:t>
+            </a:r>
+            <a:r>
+              <a:rPr sz="1600" b="0" dirty="0" err="1">
+                <a:solidFill>
+                  <a:srgbClr val="222222"/>
+                </a:solidFill>
+                <a:latin typeface="맑은 고딕"/>
+              </a:rPr>
+              <a:t>분포와</a:t>
+            </a:r>
+            <a:r>
+              <a:rPr sz="1600" b="0" dirty="0">
+                <a:solidFill>
+                  <a:srgbClr val="222222"/>
+                </a:solidFill>
+                <a:latin typeface="맑은 고딕"/>
+              </a:rPr>
+              <a:t> V$THREAD </a:t>
+            </a:r>
+            <a:r>
+              <a:rPr sz="1600" b="0" dirty="0" err="1">
+                <a:solidFill>
+                  <a:srgbClr val="222222"/>
+                </a:solidFill>
+                <a:latin typeface="맑은 고딕"/>
+              </a:rPr>
+              <a:t>변화</a:t>
+            </a:r>
+            <a:r>
+              <a:rPr sz="1600" b="0" dirty="0">
+                <a:solidFill>
+                  <a:srgbClr val="222222"/>
+                </a:solidFill>
+                <a:latin typeface="맑은 고딕"/>
+              </a:rPr>
+              <a:t>, 두 </a:t>
+            </a:r>
+            <a:r>
+              <a:rPr sz="1600" b="0" dirty="0" err="1">
+                <a:solidFill>
+                  <a:srgbClr val="222222"/>
+                </a:solidFill>
+                <a:latin typeface="맑은 고딕"/>
+              </a:rPr>
+              <a:t>노드</a:t>
+            </a:r>
+            <a:r>
+              <a:rPr sz="1600" b="0" dirty="0">
+                <a:solidFill>
+                  <a:srgbClr val="222222"/>
+                </a:solidFill>
+                <a:latin typeface="맑은 고딕"/>
+              </a:rPr>
+              <a:t>, 35분</a:t>
+            </a:r>
+          </a:p>
+          <a:p>
+            <a:pPr algn="l">
+              <a:spcAft>
+                <a:spcPts val="1000"/>
+              </a:spcAft>
+            </a:pPr>
+            <a:r>
+              <a:rPr sz="1600" b="0" dirty="0">
+                <a:solidFill>
+                  <a:srgbClr val="222222"/>
+                </a:solidFill>
+                <a:latin typeface="맑은 고딕"/>
+              </a:rPr>
+              <a:t>•  </a:t>
+            </a:r>
+            <a:r>
+              <a:rPr sz="1600" b="0" dirty="0" err="1">
+                <a:solidFill>
+                  <a:srgbClr val="222222"/>
+                </a:solidFill>
+                <a:latin typeface="맑은 고딕"/>
+              </a:rPr>
+              <a:t>실습</a:t>
+            </a:r>
+            <a:r>
+              <a:rPr sz="1600" b="0" dirty="0">
+                <a:solidFill>
+                  <a:srgbClr val="222222"/>
+                </a:solidFill>
+                <a:latin typeface="맑은 고딕"/>
+              </a:rPr>
+              <a:t> 6은 </a:t>
+            </a:r>
+            <a:r>
+              <a:rPr sz="1600" b="0" dirty="0" err="1">
+                <a:solidFill>
+                  <a:srgbClr val="222222"/>
+                </a:solidFill>
+                <a:latin typeface="맑은 고딕"/>
+              </a:rPr>
+              <a:t>인스턴스를</a:t>
+            </a:r>
+            <a:r>
+              <a:rPr sz="1600" b="0" dirty="0">
+                <a:solidFill>
+                  <a:srgbClr val="222222"/>
+                </a:solidFill>
+                <a:latin typeface="맑은 고딕"/>
+              </a:rPr>
+              <a:t> </a:t>
+            </a:r>
+            <a:r>
+              <a:rPr sz="1600" b="0" dirty="0" err="1">
+                <a:solidFill>
+                  <a:srgbClr val="222222"/>
+                </a:solidFill>
+                <a:latin typeface="맑은 고딕"/>
+              </a:rPr>
+              <a:t>정지한다</a:t>
+            </a:r>
+            <a:r>
+              <a:rPr sz="1600" b="0" dirty="0">
+                <a:solidFill>
+                  <a:srgbClr val="222222"/>
+                </a:solidFill>
+                <a:latin typeface="맑은 고딕"/>
+              </a:rPr>
+              <a:t> — </a:t>
+            </a:r>
+            <a:r>
+              <a:rPr sz="1600" b="0" dirty="0" err="1">
+                <a:solidFill>
+                  <a:srgbClr val="222222"/>
+                </a:solidFill>
+                <a:latin typeface="맑은 고딕"/>
+              </a:rPr>
+              <a:t>반드시</a:t>
+            </a:r>
+            <a:r>
+              <a:rPr sz="1600" b="0" dirty="0">
+                <a:solidFill>
+                  <a:srgbClr val="222222"/>
+                </a:solidFill>
+                <a:latin typeface="맑은 고딕"/>
+              </a:rPr>
+              <a:t> </a:t>
+            </a:r>
+            <a:r>
+              <a:rPr sz="1600" b="0" dirty="0" err="1">
+                <a:solidFill>
+                  <a:srgbClr val="222222"/>
+                </a:solidFill>
+                <a:latin typeface="맑은 고딕"/>
+              </a:rPr>
+              <a:t>srvctl</a:t>
+            </a:r>
+            <a:r>
+              <a:rPr sz="1600" b="0" dirty="0">
+                <a:solidFill>
+                  <a:srgbClr val="222222"/>
+                </a:solidFill>
+                <a:latin typeface="맑은 고딕"/>
+              </a:rPr>
+              <a:t> start instance 로 </a:t>
+            </a:r>
+            <a:r>
+              <a:rPr sz="1600" b="0" dirty="0" err="1">
+                <a:solidFill>
+                  <a:srgbClr val="222222"/>
+                </a:solidFill>
+                <a:latin typeface="맑은 고딕"/>
+              </a:rPr>
+              <a:t>복귀</a:t>
+            </a:r>
+            <a:endParaRPr sz="1600" b="0" dirty="0">
+              <a:solidFill>
+                <a:srgbClr val="222222"/>
+              </a:solidFill>
+              <a:latin typeface="맑은 고딕"/>
+            </a:endParaRPr>
           </a:p>
         </p:txBody>
       </p:sp>
@@ -16621,7 +17716,7 @@
 </file>
 
 <file path=ppt/slides/slide5.xml><?xml version="1.0" encoding="utf-8"?>
-<p:sld xmlns:a="http://schemas.openxmlformats.org/drawingml/2006/main" xmlns:p="http://schemas.openxmlformats.org/presentationml/2006/main" xmlns:r="http://schemas.openxmlformats.org/officeDocument/2006/relationships">
+<p:sld xmlns:a="http://schemas.openxmlformats.org/drawingml/2006/main" xmlns:r="http://schemas.openxmlformats.org/officeDocument/2006/relationships" xmlns:p="http://schemas.openxmlformats.org/presentationml/2006/main">
   <p:cSld>
     <p:spTree>
       <p:nvGrpSpPr>
@@ -16629,7 +17724,14 @@
         <p:cNvGrpSpPr/>
         <p:nvPr/>
       </p:nvGrpSpPr>
-      <p:grpSpPr/>
+      <p:grpSpPr>
+        <a:xfrm>
+          <a:off x="0" y="0"/>
+          <a:ext cx="0" cy="0"/>
+          <a:chOff x="0" y="0"/>
+          <a:chExt cx="0" cy="0"/>
+        </a:xfrm>
+      </p:grpSpPr>
       <p:sp>
         <p:nvSpPr>
           <p:cNvPr id="2" name="Rectangle 1"/>
@@ -16671,6 +17773,7 @@
           <a:lstStyle/>
           <a:p>
             <a:pPr algn="ctr"/>
+            <a:endParaRPr/>
           </a:p>
         </p:txBody>
       </p:sp>
@@ -16864,7 +17967,7 @@
 </file>
 
 <file path=ppt/slides/slide6.xml><?xml version="1.0" encoding="utf-8"?>
-<p:sld xmlns:a="http://schemas.openxmlformats.org/drawingml/2006/main" xmlns:p="http://schemas.openxmlformats.org/presentationml/2006/main" xmlns:r="http://schemas.openxmlformats.org/officeDocument/2006/relationships">
+<p:sld xmlns:a="http://schemas.openxmlformats.org/drawingml/2006/main" xmlns:r="http://schemas.openxmlformats.org/officeDocument/2006/relationships" xmlns:p="http://schemas.openxmlformats.org/presentationml/2006/main">
   <p:cSld>
     <p:spTree>
       <p:nvGrpSpPr>
@@ -16872,7 +17975,14 @@
         <p:cNvGrpSpPr/>
         <p:nvPr/>
       </p:nvGrpSpPr>
-      <p:grpSpPr/>
+      <p:grpSpPr>
+        <a:xfrm>
+          <a:off x="0" y="0"/>
+          <a:ext cx="0" cy="0"/>
+          <a:chOff x="0" y="0"/>
+          <a:chExt cx="0" cy="0"/>
+        </a:xfrm>
+      </p:grpSpPr>
       <p:sp>
         <p:nvSpPr>
           <p:cNvPr id="2" name="Rectangle 1"/>
@@ -16914,6 +18024,7 @@
           <a:lstStyle/>
           <a:p>
             <a:pPr algn="ctr"/>
+            <a:endParaRPr/>
           </a:p>
         </p:txBody>
       </p:sp>
@@ -17091,7 +18202,7 @@
 </file>
 
 <file path=ppt/slides/slide7.xml><?xml version="1.0" encoding="utf-8"?>
-<p:sld xmlns:a="http://schemas.openxmlformats.org/drawingml/2006/main" xmlns:p="http://schemas.openxmlformats.org/presentationml/2006/main" xmlns:r="http://schemas.openxmlformats.org/officeDocument/2006/relationships">
+<p:sld xmlns:a="http://schemas.openxmlformats.org/drawingml/2006/main" xmlns:r="http://schemas.openxmlformats.org/officeDocument/2006/relationships" xmlns:p="http://schemas.openxmlformats.org/presentationml/2006/main">
   <p:cSld>
     <p:spTree>
       <p:nvGrpSpPr>
@@ -17099,7 +18210,14 @@
         <p:cNvGrpSpPr/>
         <p:nvPr/>
       </p:nvGrpSpPr>
-      <p:grpSpPr/>
+      <p:grpSpPr>
+        <a:xfrm>
+          <a:off x="0" y="0"/>
+          <a:ext cx="0" cy="0"/>
+          <a:chOff x="0" y="0"/>
+          <a:chExt cx="0" cy="0"/>
+        </a:xfrm>
+      </p:grpSpPr>
       <p:sp>
         <p:nvSpPr>
           <p:cNvPr id="2" name="Rectangle 1"/>
@@ -17141,6 +18259,7 @@
           <a:lstStyle/>
           <a:p>
             <a:pPr algn="ctr"/>
+            <a:endParaRPr/>
           </a:p>
         </p:txBody>
       </p:sp>
@@ -17334,7 +18453,7 @@
 </file>
 
 <file path=ppt/slides/slide8.xml><?xml version="1.0" encoding="utf-8"?>
-<p:sld xmlns:a="http://schemas.openxmlformats.org/drawingml/2006/main" xmlns:p="http://schemas.openxmlformats.org/presentationml/2006/main" xmlns:r="http://schemas.openxmlformats.org/officeDocument/2006/relationships">
+<p:sld xmlns:a="http://schemas.openxmlformats.org/drawingml/2006/main" xmlns:r="http://schemas.openxmlformats.org/officeDocument/2006/relationships" xmlns:p="http://schemas.openxmlformats.org/presentationml/2006/main">
   <p:cSld>
     <p:spTree>
       <p:nvGrpSpPr>
@@ -17342,7 +18461,14 @@
         <p:cNvGrpSpPr/>
         <p:nvPr/>
       </p:nvGrpSpPr>
-      <p:grpSpPr/>
+      <p:grpSpPr>
+        <a:xfrm>
+          <a:off x="0" y="0"/>
+          <a:ext cx="0" cy="0"/>
+          <a:chOff x="0" y="0"/>
+          <a:chExt cx="0" cy="0"/>
+        </a:xfrm>
+      </p:grpSpPr>
       <p:sp>
         <p:nvSpPr>
           <p:cNvPr id="2" name="Rectangle 1"/>
@@ -17384,6 +18510,7 @@
           <a:lstStyle/>
           <a:p>
             <a:pPr algn="ctr"/>
+            <a:endParaRPr/>
           </a:p>
         </p:txBody>
       </p:sp>
@@ -17577,7 +18704,7 @@
 </file>
 
 <file path=ppt/slides/slide9.xml><?xml version="1.0" encoding="utf-8"?>
-<p:sld xmlns:a="http://schemas.openxmlformats.org/drawingml/2006/main" xmlns:p="http://schemas.openxmlformats.org/presentationml/2006/main" xmlns:r="http://schemas.openxmlformats.org/officeDocument/2006/relationships">
+<p:sld xmlns:a="http://schemas.openxmlformats.org/drawingml/2006/main" xmlns:r="http://schemas.openxmlformats.org/officeDocument/2006/relationships" xmlns:p="http://schemas.openxmlformats.org/presentationml/2006/main">
   <p:cSld>
     <p:spTree>
       <p:nvGrpSpPr>
@@ -17585,7 +18712,14 @@
         <p:cNvGrpSpPr/>
         <p:nvPr/>
       </p:nvGrpSpPr>
-      <p:grpSpPr/>
+      <p:grpSpPr>
+        <a:xfrm>
+          <a:off x="0" y="0"/>
+          <a:ext cx="0" cy="0"/>
+          <a:chOff x="0" y="0"/>
+          <a:chExt cx="0" cy="0"/>
+        </a:xfrm>
+      </p:grpSpPr>
       <p:sp>
         <p:nvSpPr>
           <p:cNvPr id="2" name="Rectangle 1"/>
@@ -17627,6 +18761,7 @@
           <a:lstStyle/>
           <a:p>
             <a:pPr algn="ctr"/>
+            <a:endParaRPr/>
           </a:p>
         </p:txBody>
       </p:sp>
@@ -18124,7 +19259,7 @@
 </file>
 
 <file path=ppt/theme/theme2.xml><?xml version="1.0" encoding="utf-8"?>
-<a:theme xmlns:a="http://schemas.openxmlformats.org/drawingml/2006/main" name="Office Theme">
+<a:theme xmlns:a="http://schemas.openxmlformats.org/drawingml/2006/main" name="Office 테마">
   <a:themeElements>
     <a:clrScheme name="Office">
       <a:dk1>
@@ -18134,44 +19269,44 @@
         <a:sysClr val="window" lastClr="FFFFFF"/>
       </a:lt1>
       <a:dk2>
-        <a:srgbClr val="1F497D"/>
+        <a:srgbClr val="0E2841"/>
       </a:dk2>
       <a:lt2>
-        <a:srgbClr val="EEECE1"/>
+        <a:srgbClr val="E8E8E8"/>
       </a:lt2>
       <a:accent1>
-        <a:srgbClr val="4F81BD"/>
+        <a:srgbClr val="156082"/>
       </a:accent1>
       <a:accent2>
-        <a:srgbClr val="C0504D"/>
+        <a:srgbClr val="E97132"/>
       </a:accent2>
       <a:accent3>
-        <a:srgbClr val="9BBB59"/>
+        <a:srgbClr val="196B24"/>
       </a:accent3>
       <a:accent4>
-        <a:srgbClr val="8064A2"/>
+        <a:srgbClr val="0F9ED5"/>
       </a:accent4>
       <a:accent5>
-        <a:srgbClr val="4BACC6"/>
+        <a:srgbClr val="A02B93"/>
       </a:accent5>
       <a:accent6>
-        <a:srgbClr val="F79646"/>
+        <a:srgbClr val="4EA72E"/>
       </a:accent6>
       <a:hlink>
-        <a:srgbClr val="0000FF"/>
+        <a:srgbClr val="467886"/>
       </a:hlink>
       <a:folHlink>
-        <a:srgbClr val="800080"/>
+        <a:srgbClr val="96607D"/>
       </a:folHlink>
     </a:clrScheme>
     <a:fontScheme name="Office">
       <a:majorFont>
-        <a:latin typeface="Calibri"/>
+        <a:latin typeface="맑은 고딕" panose="02110004020202020204"/>
         <a:ea typeface=""/>
         <a:cs typeface=""/>
-        <a:font script="Jpan" typeface="ＭＳ Ｐゴシック"/>
+        <a:font script="Jpan" typeface="游ゴシック Light"/>
         <a:font script="Hang" typeface="맑은 고딕"/>
-        <a:font script="Hans" typeface="宋体"/>
+        <a:font script="Hans" typeface="等线 Light"/>
         <a:font script="Hant" typeface="新細明體"/>
         <a:font script="Arab" typeface="Times New Roman"/>
         <a:font script="Hebr" typeface="Times New Roman"/>
@@ -18199,14 +19334,31 @@
         <a:font script="Viet" typeface="Times New Roman"/>
         <a:font script="Uigh" typeface="Microsoft Uighur"/>
         <a:font script="Geor" typeface="Sylfaen"/>
+        <a:font script="Armn" typeface="Arial"/>
+        <a:font script="Bugi" typeface="Leelawadee UI"/>
+        <a:font script="Bopo" typeface="Microsoft JhengHei"/>
+        <a:font script="Java" typeface="Javanese Text"/>
+        <a:font script="Lisu" typeface="Segoe UI"/>
+        <a:font script="Mymr" typeface="Myanmar Text"/>
+        <a:font script="Nkoo" typeface="Ebrima"/>
+        <a:font script="Olck" typeface="Nirmala UI"/>
+        <a:font script="Osma" typeface="Ebrima"/>
+        <a:font script="Phag" typeface="Phagspa"/>
+        <a:font script="Syrn" typeface="Estrangelo Edessa"/>
+        <a:font script="Syrj" typeface="Estrangelo Edessa"/>
+        <a:font script="Syre" typeface="Estrangelo Edessa"/>
+        <a:font script="Sora" typeface="Nirmala UI"/>
+        <a:font script="Tale" typeface="Microsoft Tai Le"/>
+        <a:font script="Talu" typeface="Microsoft New Tai Lue"/>
+        <a:font script="Tfng" typeface="Ebrima"/>
       </a:majorFont>
       <a:minorFont>
-        <a:latin typeface="Calibri"/>
+        <a:latin typeface="맑은 고딕" panose="02110004020202020204"/>
         <a:ea typeface=""/>
         <a:cs typeface=""/>
-        <a:font script="Jpan" typeface="ＭＳ Ｐゴシック"/>
+        <a:font script="Jpan" typeface="游ゴシック"/>
         <a:font script="Hang" typeface="맑은 고딕"/>
-        <a:font script="Hans" typeface="宋体"/>
+        <a:font script="Hans" typeface="等线"/>
         <a:font script="Hant" typeface="新細明體"/>
         <a:font script="Arab" typeface="Arial"/>
         <a:font script="Hebr" typeface="Arial"/>
@@ -18234,6 +19386,23 @@
         <a:font script="Viet" typeface="Arial"/>
         <a:font script="Uigh" typeface="Microsoft Uighur"/>
         <a:font script="Geor" typeface="Sylfaen"/>
+        <a:font script="Armn" typeface="Arial"/>
+        <a:font script="Bugi" typeface="Leelawadee UI"/>
+        <a:font script="Bopo" typeface="Microsoft JhengHei"/>
+        <a:font script="Java" typeface="Javanese Text"/>
+        <a:font script="Lisu" typeface="Segoe UI"/>
+        <a:font script="Mymr" typeface="Myanmar Text"/>
+        <a:font script="Nkoo" typeface="Ebrima"/>
+        <a:font script="Olck" typeface="Nirmala UI"/>
+        <a:font script="Osma" typeface="Ebrima"/>
+        <a:font script="Phag" typeface="Phagspa"/>
+        <a:font script="Syrn" typeface="Estrangelo Edessa"/>
+        <a:font script="Syrj" typeface="Estrangelo Edessa"/>
+        <a:font script="Syre" typeface="Estrangelo Edessa"/>
+        <a:font script="Sora" typeface="Nirmala UI"/>
+        <a:font script="Tale" typeface="Microsoft Tai Le"/>
+        <a:font script="Talu" typeface="Microsoft New Tai Lue"/>
+        <a:font script="Tfng" typeface="Ebrima"/>
       </a:minorFont>
     </a:fontScheme>
     <a:fmtScheme name="Office">
@@ -18245,180 +19414,136 @@
           <a:gsLst>
             <a:gs pos="0">
               <a:schemeClr val="phClr">
-                <a:tint val="50000"/>
-                <a:satMod val="300000"/>
+                <a:lumMod val="110000"/>
+                <a:satMod val="105000"/>
+                <a:tint val="67000"/>
               </a:schemeClr>
             </a:gs>
-            <a:gs pos="35000">
+            <a:gs pos="50000">
               <a:schemeClr val="phClr">
-                <a:tint val="37000"/>
-                <a:satMod val="300000"/>
+                <a:lumMod val="105000"/>
+                <a:satMod val="103000"/>
+                <a:tint val="73000"/>
               </a:schemeClr>
             </a:gs>
             <a:gs pos="100000">
               <a:schemeClr val="phClr">
-                <a:tint val="15000"/>
-                <a:satMod val="350000"/>
+                <a:lumMod val="105000"/>
+                <a:satMod val="109000"/>
+                <a:tint val="81000"/>
               </a:schemeClr>
             </a:gs>
           </a:gsLst>
-          <a:lin ang="16200000" scaled="1"/>
+          <a:lin ang="5400000" scaled="0"/>
         </a:gradFill>
         <a:gradFill rotWithShape="1">
           <a:gsLst>
             <a:gs pos="0">
               <a:schemeClr val="phClr">
-                <a:tint val="100000"/>
+                <a:satMod val="103000"/>
+                <a:lumMod val="102000"/>
+                <a:tint val="94000"/>
+              </a:schemeClr>
+            </a:gs>
+            <a:gs pos="50000">
+              <a:schemeClr val="phClr">
+                <a:satMod val="110000"/>
+                <a:lumMod val="100000"/>
                 <a:shade val="100000"/>
-                <a:satMod val="130000"/>
               </a:schemeClr>
             </a:gs>
             <a:gs pos="100000">
               <a:schemeClr val="phClr">
-                <a:tint val="50000"/>
-                <a:shade val="100000"/>
-                <a:satMod val="350000"/>
+                <a:lumMod val="99000"/>
+                <a:satMod val="120000"/>
+                <a:shade val="78000"/>
               </a:schemeClr>
             </a:gs>
           </a:gsLst>
-          <a:lin ang="16200000" scaled="0"/>
+          <a:lin ang="5400000" scaled="0"/>
         </a:gradFill>
       </a:fillStyleLst>
       <a:lnStyleLst>
-        <a:ln w="9525" cap="flat" cmpd="sng" algn="ctr">
+        <a:ln w="12700" cap="flat" cmpd="sng" algn="ctr">
           <a:solidFill>
-            <a:schemeClr val="phClr">
-              <a:shade val="95000"/>
-              <a:satMod val="105000"/>
-            </a:schemeClr>
+            <a:schemeClr val="phClr"/>
           </a:solidFill>
           <a:prstDash val="solid"/>
+          <a:miter lim="800000"/>
+        </a:ln>
+        <a:ln w="19050" cap="flat" cmpd="sng" algn="ctr">
+          <a:solidFill>
+            <a:schemeClr val="phClr"/>
+          </a:solidFill>
+          <a:prstDash val="solid"/>
+          <a:miter lim="800000"/>
         </a:ln>
         <a:ln w="25400" cap="flat" cmpd="sng" algn="ctr">
           <a:solidFill>
             <a:schemeClr val="phClr"/>
           </a:solidFill>
           <a:prstDash val="solid"/>
-        </a:ln>
-        <a:ln w="38100" cap="flat" cmpd="sng" algn="ctr">
-          <a:solidFill>
-            <a:schemeClr val="phClr"/>
-          </a:solidFill>
-          <a:prstDash val="solid"/>
+          <a:miter lim="800000"/>
         </a:ln>
       </a:lnStyleLst>
       <a:effectStyleLst>
         <a:effectStyle>
+          <a:effectLst/>
+        </a:effectStyle>
+        <a:effectStyle>
+          <a:effectLst/>
+        </a:effectStyle>
+        <a:effectStyle>
           <a:effectLst>
-            <a:outerShdw blurRad="40000" dist="20000" dir="5400000" rotWithShape="0">
+            <a:outerShdw blurRad="57150" dist="19050" dir="5400000" algn="ctr" rotWithShape="0">
               <a:srgbClr val="000000">
-                <a:alpha val="38000"/>
+                <a:alpha val="63000"/>
               </a:srgbClr>
             </a:outerShdw>
           </a:effectLst>
-        </a:effectStyle>
-        <a:effectStyle>
-          <a:effectLst>
-            <a:outerShdw blurRad="40000" dist="23000" dir="5400000" rotWithShape="0">
-              <a:srgbClr val="000000">
-                <a:alpha val="35000"/>
-              </a:srgbClr>
-            </a:outerShdw>
-          </a:effectLst>
-        </a:effectStyle>
-        <a:effectStyle>
-          <a:effectLst>
-            <a:outerShdw blurRad="40000" dist="23000" dir="5400000" rotWithShape="0">
-              <a:srgbClr val="000000">
-                <a:alpha val="35000"/>
-              </a:srgbClr>
-            </a:outerShdw>
-          </a:effectLst>
-          <a:scene3d>
-            <a:camera prst="orthographicFront">
-              <a:rot lat="0" lon="0" rev="0"/>
-            </a:camera>
-            <a:lightRig rig="threePt" dir="t">
-              <a:rot lat="0" lon="0" rev="1200000"/>
-            </a:lightRig>
-          </a:scene3d>
-          <a:sp3d>
-            <a:bevelT w="63500" h="25400"/>
-          </a:sp3d>
         </a:effectStyle>
       </a:effectStyleLst>
       <a:bgFillStyleLst>
         <a:solidFill>
           <a:schemeClr val="phClr"/>
         </a:solidFill>
+        <a:solidFill>
+          <a:schemeClr val="phClr">
+            <a:tint val="95000"/>
+            <a:satMod val="170000"/>
+          </a:schemeClr>
+        </a:solidFill>
         <a:gradFill rotWithShape="1">
           <a:gsLst>
             <a:gs pos="0">
               <a:schemeClr val="phClr">
-                <a:tint val="40000"/>
-                <a:satMod val="350000"/>
+                <a:tint val="93000"/>
+                <a:satMod val="150000"/>
+                <a:shade val="98000"/>
+                <a:lumMod val="102000"/>
               </a:schemeClr>
             </a:gs>
-            <a:gs pos="40000">
+            <a:gs pos="50000">
               <a:schemeClr val="phClr">
-                <a:tint val="45000"/>
-                <a:shade val="99000"/>
-                <a:satMod val="350000"/>
+                <a:tint val="98000"/>
+                <a:satMod val="130000"/>
+                <a:shade val="90000"/>
+                <a:lumMod val="103000"/>
               </a:schemeClr>
             </a:gs>
             <a:gs pos="100000">
               <a:schemeClr val="phClr">
-                <a:shade val="20000"/>
-                <a:satMod val="255000"/>
+                <a:shade val="63000"/>
+                <a:satMod val="120000"/>
               </a:schemeClr>
             </a:gs>
           </a:gsLst>
-          <a:path path="circle">
-            <a:fillToRect l="50000" t="-80000" r="50000" b="180000"/>
-          </a:path>
-        </a:gradFill>
-        <a:gradFill rotWithShape="1">
-          <a:gsLst>
-            <a:gs pos="0">
-              <a:schemeClr val="phClr">
-                <a:tint val="80000"/>
-                <a:satMod val="300000"/>
-              </a:schemeClr>
-            </a:gs>
-            <a:gs pos="100000">
-              <a:schemeClr val="phClr">
-                <a:shade val="30000"/>
-                <a:satMod val="200000"/>
-              </a:schemeClr>
-            </a:gs>
-          </a:gsLst>
-          <a:path path="circle">
-            <a:fillToRect l="50000" t="50000" r="50000" b="50000"/>
-          </a:path>
+          <a:lin ang="5400000" scaled="0"/>
         </a:gradFill>
       </a:bgFillStyleLst>
     </a:fmtScheme>
   </a:themeElements>
   <a:objectDefaults>
-    <a:spDef>
-      <a:spPr/>
-      <a:bodyPr/>
-      <a:lstStyle/>
-      <a:style>
-        <a:lnRef idx="1">
-          <a:schemeClr val="accent1"/>
-        </a:lnRef>
-        <a:fillRef idx="3">
-          <a:schemeClr val="accent1"/>
-        </a:fillRef>
-        <a:effectRef idx="2">
-          <a:schemeClr val="accent1"/>
-        </a:effectRef>
-        <a:fontRef idx="minor">
-          <a:schemeClr val="lt1"/>
-        </a:fontRef>
-      </a:style>
-    </a:spDef>
     <a:lnDef>
       <a:spPr/>
       <a:bodyPr/>
@@ -18440,5 +19565,10 @@
     </a:lnDef>
   </a:objectDefaults>
   <a:extraClrSchemeLst/>
+  <a:extLst>
+    <a:ext uri="{05A4C25C-085E-4340-85A3-A5531E510DB2}">
+      <thm15:themeFamily xmlns:thm15="http://schemas.microsoft.com/office/thememl/2012/main" name="Office Theme" id="{2E142A2C-CD16-42D6-873A-C26D2A0506FA}" vid="{1BDDFF52-6CD6-40A5-AB3C-68EB2F1E4D0A}"/>
+    </a:ext>
+  </a:extLst>
 </a:theme>
 </file>